--- a/SAMSONITE_BRASIL_LTDA.pptx
+++ b/SAMSONITE_BRASIL_LTDA.pptx
@@ -162,10 +162,10 @@
                 <c:formatCode>General</c:formatCode>
                 <c:ptCount val="2"/>
                 <c:pt idx="0">
-                  <c:v>248</c:v>
+                  <c:v>0</c:v>
                 </c:pt>
                 <c:pt idx="1">
-                  <c:v>253</c:v>
+                  <c:v>238</c:v>
                 </c:pt>
               </c:numCache>
             </c:numRef>
@@ -211,10 +211,10 @@
                 <c:formatCode>General</c:formatCode>
                 <c:ptCount val="2"/>
                 <c:pt idx="0">
-                  <c:v>2</c:v>
+                  <c:v>0</c:v>
                 </c:pt>
                 <c:pt idx="1">
-                  <c:v>2</c:v>
+                  <c:v>1</c:v>
                 </c:pt>
               </c:numCache>
             </c:numRef>
@@ -3688,7 +3688,7 @@
         <p:spPr>
           <a:xfrm>
             <a:off x="1005840" y="2240279"/>
-            <a:ext cx="2377439" cy="891540"/>
+            <a:ext cx="2377440" cy="868680"/>
           </a:xfrm>
           <a:prstGeom prst="rect">
             <a:avLst/>
@@ -3709,7 +3709,7 @@
                 </a:solidFill>
                 <a:latin typeface="Calibri"/>
               </a:rPr>
-              <a:t>255</a:t>
+              <a:t>239</a:t>
             </a:r>
           </a:p>
         </p:txBody>
@@ -3722,8 +3722,8 @@
         </p:nvSpPr>
         <p:spPr>
           <a:xfrm>
-            <a:off x="1005840" y="3058668"/>
-            <a:ext cx="2377439" cy="548640"/>
+            <a:off x="1005840" y="3090672"/>
+            <a:ext cx="2377440" cy="411480"/>
           </a:xfrm>
           <a:prstGeom prst="rect">
             <a:avLst/>
@@ -3803,7 +3803,7 @@
         <p:spPr>
           <a:xfrm>
             <a:off x="3931920" y="2240279"/>
-            <a:ext cx="2377439" cy="891540"/>
+            <a:ext cx="2377440" cy="868680"/>
           </a:xfrm>
           <a:prstGeom prst="rect">
             <a:avLst/>
@@ -3824,7 +3824,7 @@
                 </a:solidFill>
                 <a:latin typeface="Calibri"/>
               </a:rPr>
-              <a:t>253</a:t>
+              <a:t>238</a:t>
             </a:r>
           </a:p>
         </p:txBody>
@@ -3837,8 +3837,8 @@
         </p:nvSpPr>
         <p:spPr>
           <a:xfrm>
-            <a:off x="3931920" y="3058668"/>
-            <a:ext cx="2377439" cy="548640"/>
+            <a:off x="3931920" y="3090672"/>
+            <a:ext cx="2377440" cy="411480"/>
           </a:xfrm>
           <a:prstGeom prst="rect">
             <a:avLst/>
@@ -3918,7 +3918,7 @@
         <p:spPr>
           <a:xfrm>
             <a:off x="6858000" y="2240279"/>
-            <a:ext cx="2377439" cy="891540"/>
+            <a:ext cx="2377440" cy="868680"/>
           </a:xfrm>
           <a:prstGeom prst="rect">
             <a:avLst/>
@@ -3939,7 +3939,7 @@
                 </a:solidFill>
                 <a:latin typeface="Calibri"/>
               </a:rPr>
-              <a:t>2</a:t>
+              <a:t>1</a:t>
             </a:r>
           </a:p>
         </p:txBody>
@@ -3952,8 +3952,8 @@
         </p:nvSpPr>
         <p:spPr>
           <a:xfrm>
-            <a:off x="6858000" y="3058668"/>
-            <a:ext cx="2377439" cy="548640"/>
+            <a:off x="6858000" y="3090672"/>
+            <a:ext cx="2377440" cy="411480"/>
           </a:xfrm>
           <a:prstGeom prst="rect">
             <a:avLst/>
@@ -4033,7 +4033,7 @@
         <p:spPr>
           <a:xfrm>
             <a:off x="9784080" y="2240279"/>
-            <a:ext cx="2377439" cy="891540"/>
+            <a:ext cx="2377440" cy="868680"/>
           </a:xfrm>
           <a:prstGeom prst="rect">
             <a:avLst/>
@@ -4054,7 +4054,7 @@
                 </a:solidFill>
                 <a:latin typeface="Calibri"/>
               </a:rPr>
-              <a:t>99.2%</a:t>
+              <a:t>99.6%</a:t>
             </a:r>
           </a:p>
         </p:txBody>
@@ -4067,8 +4067,8 @@
         </p:nvSpPr>
         <p:spPr>
           <a:xfrm>
-            <a:off x="9784080" y="3058668"/>
-            <a:ext cx="2377439" cy="548640"/>
+            <a:off x="9784080" y="3090672"/>
+            <a:ext cx="2377440" cy="411480"/>
           </a:xfrm>
           <a:prstGeom prst="rect">
             <a:avLst/>
@@ -4121,7 +4121,7 @@
               <a:tr h="475488">
                 <a:tc>
                   <a:txBody>
-                    <a:bodyPr wrap="square"/>
+                    <a:bodyPr/>
                     <a:lstStyle/>
                     <a:p>
                       <a:pPr algn="ctr"/>
@@ -4144,7 +4144,7 @@
                 </a:tc>
                 <a:tc>
                   <a:txBody>
-                    <a:bodyPr wrap="square"/>
+                    <a:bodyPr/>
                     <a:lstStyle/>
                     <a:p>
                       <a:pPr algn="ctr"/>
@@ -4167,7 +4167,7 @@
                 </a:tc>
                 <a:tc>
                   <a:txBody>
-                    <a:bodyPr wrap="square"/>
+                    <a:bodyPr/>
                     <a:lstStyle/>
                     <a:p>
                       <a:pPr algn="ctr"/>
@@ -4190,7 +4190,7 @@
                 </a:tc>
                 <a:tc>
                   <a:txBody>
-                    <a:bodyPr wrap="square"/>
+                    <a:bodyPr/>
                     <a:lstStyle/>
                     <a:p>
                       <a:pPr algn="ctr"/>
@@ -4215,18 +4215,18 @@
               <a:tr h="475488">
                 <a:tc>
                   <a:txBody>
-                    <a:bodyPr wrap="square"/>
-                    <a:lstStyle/>
-                    <a:p>
-                      <a:pPr algn="l"/>
-                      <a:r>
-                        <a:rPr sz="1000" b="0">
-                          <a:solidFill>
-                            <a:srgbClr val="1D1B43"/>
-                          </a:solidFill>
-                          <a:latin typeface="Calibri"/>
-                        </a:rPr>
-                        <a:t>Total Entregas</a:t>
+                    <a:bodyPr/>
+                    <a:lstStyle/>
+                    <a:p>
+                      <a:pPr algn="l"/>
+                      <a:r>
+                        <a:rPr sz="1000" b="0">
+                          <a:solidFill>
+                            <a:srgbClr val="1D1B43"/>
+                          </a:solidFill>
+                          <a:latin typeface="Calibri"/>
+                        </a:rPr>
+                        <a:t>Total</a:t>
                       </a:r>
                     </a:p>
                   </a:txBody>
@@ -4238,18 +4238,18 @@
                 </a:tc>
                 <a:tc>
                   <a:txBody>
-                    <a:bodyPr wrap="square"/>
-                    <a:lstStyle/>
-                    <a:p>
-                      <a:pPr algn="l"/>
-                      <a:r>
-                        <a:rPr sz="1000" b="0">
-                          <a:solidFill>
-                            <a:srgbClr val="1D1B43"/>
-                          </a:solidFill>
-                          <a:latin typeface="Calibri"/>
-                        </a:rPr>
-                        <a:t>250</a:t>
+                    <a:bodyPr/>
+                    <a:lstStyle/>
+                    <a:p>
+                      <a:pPr algn="l"/>
+                      <a:r>
+                        <a:rPr sz="1000" b="0">
+                          <a:solidFill>
+                            <a:srgbClr val="1D1B43"/>
+                          </a:solidFill>
+                          <a:latin typeface="Calibri"/>
+                        </a:rPr>
+                        <a:t>0</a:t>
                       </a:r>
                     </a:p>
                   </a:txBody>
@@ -4261,18 +4261,18 @@
                 </a:tc>
                 <a:tc>
                   <a:txBody>
-                    <a:bodyPr wrap="square"/>
-                    <a:lstStyle/>
-                    <a:p>
-                      <a:pPr algn="l"/>
-                      <a:r>
-                        <a:rPr sz="1000" b="0">
-                          <a:solidFill>
-                            <a:srgbClr val="1D1B43"/>
-                          </a:solidFill>
-                          <a:latin typeface="Calibri"/>
-                        </a:rPr>
-                        <a:t>255</a:t>
+                    <a:bodyPr/>
+                    <a:lstStyle/>
+                    <a:p>
+                      <a:pPr algn="l"/>
+                      <a:r>
+                        <a:rPr sz="1000" b="0">
+                          <a:solidFill>
+                            <a:srgbClr val="1D1B43"/>
+                          </a:solidFill>
+                          <a:latin typeface="Calibri"/>
+                        </a:rPr>
+                        <a:t>239</a:t>
                       </a:r>
                     </a:p>
                   </a:txBody>
@@ -4284,18 +4284,18 @@
                 </a:tc>
                 <a:tc>
                   <a:txBody>
-                    <a:bodyPr wrap="square"/>
-                    <a:lstStyle/>
-                    <a:p>
-                      <a:pPr algn="l"/>
-                      <a:r>
-                        <a:rPr sz="1000" b="0">
-                          <a:solidFill>
-                            <a:srgbClr val="1D1B43"/>
-                          </a:solidFill>
-                          <a:latin typeface="Calibri"/>
-                        </a:rPr>
-                        <a:t>+ 5</a:t>
+                    <a:bodyPr/>
+                    <a:lstStyle/>
+                    <a:p>
+                      <a:pPr algn="l"/>
+                      <a:r>
+                        <a:rPr sz="1000" b="0">
+                          <a:solidFill>
+                            <a:srgbClr val="1D1B43"/>
+                          </a:solidFill>
+                          <a:latin typeface="Calibri"/>
+                        </a:rPr>
+                        <a:t>+ 239</a:t>
                       </a:r>
                     </a:p>
                   </a:txBody>
@@ -4309,7 +4309,7 @@
               <a:tr h="475488">
                 <a:tc>
                   <a:txBody>
-                    <a:bodyPr wrap="square"/>
+                    <a:bodyPr/>
                     <a:lstStyle/>
                     <a:p>
                       <a:pPr algn="l"/>
@@ -4332,18 +4332,18 @@
                 </a:tc>
                 <a:tc>
                   <a:txBody>
-                    <a:bodyPr wrap="square"/>
-                    <a:lstStyle/>
-                    <a:p>
-                      <a:pPr algn="l"/>
-                      <a:r>
-                        <a:rPr sz="1000" b="0">
-                          <a:solidFill>
-                            <a:srgbClr val="1D1B43"/>
-                          </a:solidFill>
-                          <a:latin typeface="Calibri"/>
-                        </a:rPr>
-                        <a:t>248</a:t>
+                    <a:bodyPr/>
+                    <a:lstStyle/>
+                    <a:p>
+                      <a:pPr algn="l"/>
+                      <a:r>
+                        <a:rPr sz="1000" b="0">
+                          <a:solidFill>
+                            <a:srgbClr val="1D1B43"/>
+                          </a:solidFill>
+                          <a:latin typeface="Calibri"/>
+                        </a:rPr>
+                        <a:t>0</a:t>
                       </a:r>
                     </a:p>
                   </a:txBody>
@@ -4355,18 +4355,18 @@
                 </a:tc>
                 <a:tc>
                   <a:txBody>
-                    <a:bodyPr wrap="square"/>
-                    <a:lstStyle/>
-                    <a:p>
-                      <a:pPr algn="l"/>
-                      <a:r>
-                        <a:rPr sz="1000" b="0">
-                          <a:solidFill>
-                            <a:srgbClr val="1D1B43"/>
-                          </a:solidFill>
-                          <a:latin typeface="Calibri"/>
-                        </a:rPr>
-                        <a:t>253</a:t>
+                    <a:bodyPr/>
+                    <a:lstStyle/>
+                    <a:p>
+                      <a:pPr algn="l"/>
+                      <a:r>
+                        <a:rPr sz="1000" b="0">
+                          <a:solidFill>
+                            <a:srgbClr val="1D1B43"/>
+                          </a:solidFill>
+                          <a:latin typeface="Calibri"/>
+                        </a:rPr>
+                        <a:t>238</a:t>
                       </a:r>
                     </a:p>
                   </a:txBody>
@@ -4378,18 +4378,18 @@
                 </a:tc>
                 <a:tc>
                   <a:txBody>
-                    <a:bodyPr wrap="square"/>
-                    <a:lstStyle/>
-                    <a:p>
-                      <a:pPr algn="l"/>
-                      <a:r>
-                        <a:rPr sz="1000" b="0">
-                          <a:solidFill>
-                            <a:srgbClr val="1D1B43"/>
-                          </a:solidFill>
-                          <a:latin typeface="Calibri"/>
-                        </a:rPr>
-                        <a:t>+ 5</a:t>
+                    <a:bodyPr/>
+                    <a:lstStyle/>
+                    <a:p>
+                      <a:pPr algn="l"/>
+                      <a:r>
+                        <a:rPr sz="1000" b="0">
+                          <a:solidFill>
+                            <a:srgbClr val="1D1B43"/>
+                          </a:solidFill>
+                          <a:latin typeface="Calibri"/>
+                        </a:rPr>
+                        <a:t>+ 238</a:t>
                       </a:r>
                     </a:p>
                   </a:txBody>
@@ -4403,18 +4403,18 @@
               <a:tr h="475488">
                 <a:tc>
                   <a:txBody>
-                    <a:bodyPr wrap="square"/>
-                    <a:lstStyle/>
-                    <a:p>
-                      <a:pPr algn="l"/>
-                      <a:r>
-                        <a:rPr sz="1000" b="0">
-                          <a:solidFill>
-                            <a:srgbClr val="1D1B43"/>
-                          </a:solidFill>
-                          <a:latin typeface="Calibri"/>
-                        </a:rPr>
-                        <a:t>Fora do Prazo</a:t>
+                    <a:bodyPr/>
+                    <a:lstStyle/>
+                    <a:p>
+                      <a:pPr algn="l"/>
+                      <a:r>
+                        <a:rPr sz="1000" b="0">
+                          <a:solidFill>
+                            <a:srgbClr val="1D1B43"/>
+                          </a:solidFill>
+                          <a:latin typeface="Calibri"/>
+                        </a:rPr>
+                        <a:t>Fora Prazo</a:t>
                       </a:r>
                     </a:p>
                   </a:txBody>
@@ -4426,18 +4426,18 @@
                 </a:tc>
                 <a:tc>
                   <a:txBody>
-                    <a:bodyPr wrap="square"/>
-                    <a:lstStyle/>
-                    <a:p>
-                      <a:pPr algn="l"/>
-                      <a:r>
-                        <a:rPr sz="1000" b="0">
-                          <a:solidFill>
-                            <a:srgbClr val="1D1B43"/>
-                          </a:solidFill>
-                          <a:latin typeface="Calibri"/>
-                        </a:rPr>
-                        <a:t>2</a:t>
+                    <a:bodyPr/>
+                    <a:lstStyle/>
+                    <a:p>
+                      <a:pPr algn="l"/>
+                      <a:r>
+                        <a:rPr sz="1000" b="0">
+                          <a:solidFill>
+                            <a:srgbClr val="1D1B43"/>
+                          </a:solidFill>
+                          <a:latin typeface="Calibri"/>
+                        </a:rPr>
+                        <a:t>0</a:t>
                       </a:r>
                     </a:p>
                   </a:txBody>
@@ -4449,18 +4449,18 @@
                 </a:tc>
                 <a:tc>
                   <a:txBody>
-                    <a:bodyPr wrap="square"/>
-                    <a:lstStyle/>
-                    <a:p>
-                      <a:pPr algn="l"/>
-                      <a:r>
-                        <a:rPr sz="1000" b="0">
-                          <a:solidFill>
-                            <a:srgbClr val="1D1B43"/>
-                          </a:solidFill>
-                          <a:latin typeface="Calibri"/>
-                        </a:rPr>
-                        <a:t>2</a:t>
+                    <a:bodyPr/>
+                    <a:lstStyle/>
+                    <a:p>
+                      <a:pPr algn="l"/>
+                      <a:r>
+                        <a:rPr sz="1000" b="0">
+                          <a:solidFill>
+                            <a:srgbClr val="1D1B43"/>
+                          </a:solidFill>
+                          <a:latin typeface="Calibri"/>
+                        </a:rPr>
+                        <a:t>1</a:t>
                       </a:r>
                     </a:p>
                   </a:txBody>
@@ -4472,18 +4472,18 @@
                 </a:tc>
                 <a:tc>
                   <a:txBody>
-                    <a:bodyPr wrap="square"/>
-                    <a:lstStyle/>
-                    <a:p>
-                      <a:pPr algn="l"/>
-                      <a:r>
-                        <a:rPr sz="1000" b="0">
-                          <a:solidFill>
-                            <a:srgbClr val="1D1B43"/>
-                          </a:solidFill>
-                          <a:latin typeface="Calibri"/>
-                        </a:rPr>
-                        <a:t>- 0</a:t>
+                    <a:bodyPr/>
+                    <a:lstStyle/>
+                    <a:p>
+                      <a:pPr algn="l"/>
+                      <a:r>
+                        <a:rPr sz="1000" b="0">
+                          <a:solidFill>
+                            <a:srgbClr val="1D1B43"/>
+                          </a:solidFill>
+                          <a:latin typeface="Calibri"/>
+                        </a:rPr>
+                        <a:t>+ 1</a:t>
                       </a:r>
                     </a:p>
                   </a:txBody>
@@ -4497,7 +4497,7 @@
               <a:tr h="475488">
                 <a:tc>
                   <a:txBody>
-                    <a:bodyPr wrap="square"/>
+                    <a:bodyPr/>
                     <a:lstStyle/>
                     <a:p>
                       <a:pPr algn="l"/>
@@ -4520,18 +4520,18 @@
                 </a:tc>
                 <a:tc>
                   <a:txBody>
-                    <a:bodyPr wrap="square"/>
-                    <a:lstStyle/>
-                    <a:p>
-                      <a:pPr algn="l"/>
-                      <a:r>
-                        <a:rPr sz="1000" b="0">
-                          <a:solidFill>
-                            <a:srgbClr val="1D1B43"/>
-                          </a:solidFill>
-                          <a:latin typeface="Calibri"/>
-                        </a:rPr>
-                        <a:t>99.2%</a:t>
+                    <a:bodyPr/>
+                    <a:lstStyle/>
+                    <a:p>
+                      <a:pPr algn="l"/>
+                      <a:r>
+                        <a:rPr sz="1000" b="0">
+                          <a:solidFill>
+                            <a:srgbClr val="1D1B43"/>
+                          </a:solidFill>
+                          <a:latin typeface="Calibri"/>
+                        </a:rPr>
+                        <a:t>99.6%</a:t>
                       </a:r>
                     </a:p>
                   </a:txBody>
@@ -4543,18 +4543,18 @@
                 </a:tc>
                 <a:tc>
                   <a:txBody>
-                    <a:bodyPr wrap="square"/>
-                    <a:lstStyle/>
-                    <a:p>
-                      <a:pPr algn="l"/>
-                      <a:r>
-                        <a:rPr sz="1000" b="0">
-                          <a:solidFill>
-                            <a:srgbClr val="1D1B43"/>
-                          </a:solidFill>
-                          <a:latin typeface="Calibri"/>
-                        </a:rPr>
-                        <a:t>99.2%</a:t>
+                    <a:bodyPr/>
+                    <a:lstStyle/>
+                    <a:p>
+                      <a:pPr algn="l"/>
+                      <a:r>
+                        <a:rPr sz="1000" b="0">
+                          <a:solidFill>
+                            <a:srgbClr val="1D1B43"/>
+                          </a:solidFill>
+                          <a:latin typeface="Calibri"/>
+                        </a:rPr>
+                        <a:t>99.6%</a:t>
                       </a:r>
                     </a:p>
                   </a:txBody>
@@ -4566,7 +4566,7 @@
                 </a:tc>
                 <a:tc>
                   <a:txBody>
-                    <a:bodyPr wrap="square"/>
+                    <a:bodyPr/>
                     <a:lstStyle/>
                     <a:p>
                       <a:pPr algn="l"/>
@@ -4766,7 +4766,7 @@
               <a:tr h="438912">
                 <a:tc>
                   <a:txBody>
-                    <a:bodyPr wrap="square"/>
+                    <a:bodyPr/>
                     <a:lstStyle/>
                     <a:p>
                       <a:pPr algn="ctr"/>
@@ -4789,7 +4789,7 @@
                 </a:tc>
                 <a:tc>
                   <a:txBody>
-                    <a:bodyPr wrap="square"/>
+                    <a:bodyPr/>
                     <a:lstStyle/>
                     <a:p>
                       <a:pPr algn="ctr"/>
@@ -4812,7 +4812,7 @@
                 </a:tc>
                 <a:tc>
                   <a:txBody>
-                    <a:bodyPr wrap="square"/>
+                    <a:bodyPr/>
                     <a:lstStyle/>
                     <a:p>
                       <a:pPr algn="ctr"/>
@@ -4835,7 +4835,7 @@
                 </a:tc>
                 <a:tc>
                   <a:txBody>
-                    <a:bodyPr wrap="square"/>
+                    <a:bodyPr/>
                     <a:lstStyle/>
                     <a:p>
                       <a:pPr algn="ctr"/>
@@ -4858,7 +4858,7 @@
                 </a:tc>
                 <a:tc>
                   <a:txBody>
-                    <a:bodyPr wrap="square"/>
+                    <a:bodyPr/>
                     <a:lstStyle/>
                     <a:p>
                       <a:pPr algn="ctr"/>
@@ -4883,7 +4883,7 @@
               <a:tr h="438912">
                 <a:tc>
                   <a:txBody>
-                    <a:bodyPr wrap="square"/>
+                    <a:bodyPr/>
                     <a:lstStyle/>
                     <a:p>
                       <a:pPr algn="l"/>
@@ -4906,18 +4906,18 @@
                 </a:tc>
                 <a:tc>
                   <a:txBody>
-                    <a:bodyPr wrap="square"/>
-                    <a:lstStyle/>
-                    <a:p>
-                      <a:pPr algn="l"/>
-                      <a:r>
-                        <a:rPr sz="1000" b="0">
-                          <a:solidFill>
-                            <a:srgbClr val="1D1B43"/>
-                          </a:solidFill>
-                          <a:latin typeface="Calibri"/>
-                        </a:rPr>
-                        <a:t>250</a:t>
+                    <a:bodyPr/>
+                    <a:lstStyle/>
+                    <a:p>
+                      <a:pPr algn="l"/>
+                      <a:r>
+                        <a:rPr sz="1000" b="0">
+                          <a:solidFill>
+                            <a:srgbClr val="1D1B43"/>
+                          </a:solidFill>
+                          <a:latin typeface="Calibri"/>
+                        </a:rPr>
+                        <a:t>0</a:t>
                       </a:r>
                     </a:p>
                   </a:txBody>
@@ -4929,18 +4929,18 @@
                 </a:tc>
                 <a:tc>
                   <a:txBody>
-                    <a:bodyPr wrap="square"/>
-                    <a:lstStyle/>
-                    <a:p>
-                      <a:pPr algn="l"/>
-                      <a:r>
-                        <a:rPr sz="1000" b="0">
-                          <a:solidFill>
-                            <a:srgbClr val="1D1B43"/>
-                          </a:solidFill>
-                          <a:latin typeface="Calibri"/>
-                        </a:rPr>
-                        <a:t>248</a:t>
+                    <a:bodyPr/>
+                    <a:lstStyle/>
+                    <a:p>
+                      <a:pPr algn="l"/>
+                      <a:r>
+                        <a:rPr sz="1000" b="0">
+                          <a:solidFill>
+                            <a:srgbClr val="1D1B43"/>
+                          </a:solidFill>
+                          <a:latin typeface="Calibri"/>
+                        </a:rPr>
+                        <a:t>0</a:t>
                       </a:r>
                     </a:p>
                   </a:txBody>
@@ -4952,18 +4952,18 @@
                 </a:tc>
                 <a:tc>
                   <a:txBody>
-                    <a:bodyPr wrap="square"/>
-                    <a:lstStyle/>
-                    <a:p>
-                      <a:pPr algn="l"/>
-                      <a:r>
-                        <a:rPr sz="1000" b="0">
-                          <a:solidFill>
-                            <a:srgbClr val="1D1B43"/>
-                          </a:solidFill>
-                          <a:latin typeface="Calibri"/>
-                        </a:rPr>
-                        <a:t>2</a:t>
+                    <a:bodyPr/>
+                    <a:lstStyle/>
+                    <a:p>
+                      <a:pPr algn="l"/>
+                      <a:r>
+                        <a:rPr sz="1000" b="0">
+                          <a:solidFill>
+                            <a:srgbClr val="1D1B43"/>
+                          </a:solidFill>
+                          <a:latin typeface="Calibri"/>
+                        </a:rPr>
+                        <a:t>0</a:t>
                       </a:r>
                     </a:p>
                   </a:txBody>
@@ -4975,18 +4975,18 @@
                 </a:tc>
                 <a:tc>
                   <a:txBody>
-                    <a:bodyPr wrap="square"/>
-                    <a:lstStyle/>
-                    <a:p>
-                      <a:pPr algn="l"/>
-                      <a:r>
-                        <a:rPr sz="1000" b="0">
-                          <a:solidFill>
-                            <a:srgbClr val="1D1B43"/>
-                          </a:solidFill>
-                          <a:latin typeface="Calibri"/>
-                        </a:rPr>
-                        <a:t>99.2%</a:t>
+                    <a:bodyPr/>
+                    <a:lstStyle/>
+                    <a:p>
+                      <a:pPr algn="l"/>
+                      <a:r>
+                        <a:rPr sz="1000" b="0">
+                          <a:solidFill>
+                            <a:srgbClr val="1D1B43"/>
+                          </a:solidFill>
+                          <a:latin typeface="Calibri"/>
+                        </a:rPr>
+                        <a:t>99.6%</a:t>
                       </a:r>
                     </a:p>
                   </a:txBody>
@@ -5000,7 +5000,7 @@
               <a:tr h="438912">
                 <a:tc>
                   <a:txBody>
-                    <a:bodyPr wrap="square"/>
+                    <a:bodyPr/>
                     <a:lstStyle/>
                     <a:p>
                       <a:pPr algn="l"/>
@@ -5023,18 +5023,18 @@
                 </a:tc>
                 <a:tc>
                   <a:txBody>
-                    <a:bodyPr wrap="square"/>
-                    <a:lstStyle/>
-                    <a:p>
-                      <a:pPr algn="l"/>
-                      <a:r>
-                        <a:rPr sz="1000" b="0">
-                          <a:solidFill>
-                            <a:srgbClr val="1D1B43"/>
-                          </a:solidFill>
-                          <a:latin typeface="Calibri"/>
-                        </a:rPr>
-                        <a:t>255</a:t>
+                    <a:bodyPr/>
+                    <a:lstStyle/>
+                    <a:p>
+                      <a:pPr algn="l"/>
+                      <a:r>
+                        <a:rPr sz="1000" b="0">
+                          <a:solidFill>
+                            <a:srgbClr val="1D1B43"/>
+                          </a:solidFill>
+                          <a:latin typeface="Calibri"/>
+                        </a:rPr>
+                        <a:t>239</a:t>
                       </a:r>
                     </a:p>
                   </a:txBody>
@@ -5046,18 +5046,18 @@
                 </a:tc>
                 <a:tc>
                   <a:txBody>
-                    <a:bodyPr wrap="square"/>
-                    <a:lstStyle/>
-                    <a:p>
-                      <a:pPr algn="l"/>
-                      <a:r>
-                        <a:rPr sz="1000" b="0">
-                          <a:solidFill>
-                            <a:srgbClr val="1D1B43"/>
-                          </a:solidFill>
-                          <a:latin typeface="Calibri"/>
-                        </a:rPr>
-                        <a:t>253</a:t>
+                    <a:bodyPr/>
+                    <a:lstStyle/>
+                    <a:p>
+                      <a:pPr algn="l"/>
+                      <a:r>
+                        <a:rPr sz="1000" b="0">
+                          <a:solidFill>
+                            <a:srgbClr val="1D1B43"/>
+                          </a:solidFill>
+                          <a:latin typeface="Calibri"/>
+                        </a:rPr>
+                        <a:t>238</a:t>
                       </a:r>
                     </a:p>
                   </a:txBody>
@@ -5069,18 +5069,18 @@
                 </a:tc>
                 <a:tc>
                   <a:txBody>
-                    <a:bodyPr wrap="square"/>
-                    <a:lstStyle/>
-                    <a:p>
-                      <a:pPr algn="l"/>
-                      <a:r>
-                        <a:rPr sz="1000" b="0">
-                          <a:solidFill>
-                            <a:srgbClr val="1D1B43"/>
-                          </a:solidFill>
-                          <a:latin typeface="Calibri"/>
-                        </a:rPr>
-                        <a:t>2</a:t>
+                    <a:bodyPr/>
+                    <a:lstStyle/>
+                    <a:p>
+                      <a:pPr algn="l"/>
+                      <a:r>
+                        <a:rPr sz="1000" b="0">
+                          <a:solidFill>
+                            <a:srgbClr val="1D1B43"/>
+                          </a:solidFill>
+                          <a:latin typeface="Calibri"/>
+                        </a:rPr>
+                        <a:t>1</a:t>
                       </a:r>
                     </a:p>
                   </a:txBody>
@@ -5092,18 +5092,18 @@
                 </a:tc>
                 <a:tc>
                   <a:txBody>
-                    <a:bodyPr wrap="square"/>
-                    <a:lstStyle/>
-                    <a:p>
-                      <a:pPr algn="l"/>
-                      <a:r>
-                        <a:rPr sz="1000" b="0">
-                          <a:solidFill>
-                            <a:srgbClr val="1D1B43"/>
-                          </a:solidFill>
-                          <a:latin typeface="Calibri"/>
-                        </a:rPr>
-                        <a:t>99.2%</a:t>
+                    <a:bodyPr/>
+                    <a:lstStyle/>
+                    <a:p>
+                      <a:pPr algn="l"/>
+                      <a:r>
+                        <a:rPr sz="1000" b="0">
+                          <a:solidFill>
+                            <a:srgbClr val="1D1B43"/>
+                          </a:solidFill>
+                          <a:latin typeface="Calibri"/>
+                        </a:rPr>
+                        <a:t>99.6%</a:t>
                       </a:r>
                     </a:p>
                   </a:txBody>
@@ -5191,7 +5191,7 @@
                 </a:solidFill>
                 <a:latin typeface="Calibri"/>
               </a:rPr>
-              <a:t>PERFORMANCE: 99.2% - EXCELENTE</a:t>
+              <a:t>PERFORMANCE: 99.6% - EXCELENTE</a:t>
             </a:r>
           </a:p>
         </p:txBody>
@@ -5276,7 +5276,7 @@
                 </a:solidFill>
                 <a:latin typeface="Calibri"/>
               </a:rPr>
-              <a:t>OCORRENCIAS FORA DO PRAZO (2)</a:t>
+              <a:t>OCORRENCIAS FORA DO PRAZO (1)</a:t>
             </a:r>
           </a:p>
         </p:txBody>
@@ -5334,7 +5334,7 @@
         </p:nvGraphicFramePr>
         <p:xfrm>
           <a:off x="457200" y="1828800"/>
-          <a:ext cx="11429999" cy="1152144"/>
+          <a:ext cx="11429999" cy="768096"/>
         </p:xfrm>
         <a:graphic>
           <a:graphicData uri="http://schemas.openxmlformats.org/drawingml/2006/table">
@@ -5352,7 +5352,7 @@
               <a:tr h="384048">
                 <a:tc>
                   <a:txBody>
-                    <a:bodyPr wrap="square"/>
+                    <a:bodyPr/>
                     <a:lstStyle/>
                     <a:p>
                       <a:pPr algn="ctr"/>
@@ -5375,7 +5375,7 @@
                 </a:tc>
                 <a:tc>
                   <a:txBody>
-                    <a:bodyPr wrap="square"/>
+                    <a:bodyPr/>
                     <a:lstStyle/>
                     <a:p>
                       <a:pPr algn="ctr"/>
@@ -5398,7 +5398,7 @@
                 </a:tc>
                 <a:tc>
                   <a:txBody>
-                    <a:bodyPr wrap="square"/>
+                    <a:bodyPr/>
                     <a:lstStyle/>
                     <a:p>
                       <a:pPr algn="ctr"/>
@@ -5421,7 +5421,7 @@
                 </a:tc>
                 <a:tc>
                   <a:txBody>
-                    <a:bodyPr wrap="square"/>
+                    <a:bodyPr/>
                     <a:lstStyle/>
                     <a:p>
                       <a:pPr algn="ctr"/>
@@ -5444,7 +5444,7 @@
                 </a:tc>
                 <a:tc>
                   <a:txBody>
-                    <a:bodyPr wrap="square"/>
+                    <a:bodyPr/>
                     <a:lstStyle/>
                     <a:p>
                       <a:pPr algn="ctr"/>
@@ -5469,7 +5469,7 @@
               <a:tr h="384048">
                 <a:tc>
                   <a:txBody>
-                    <a:bodyPr wrap="square"/>
+                    <a:bodyPr/>
                     <a:lstStyle/>
                     <a:p>
                       <a:pPr algn="l"/>
@@ -5492,7 +5492,7 @@
                 </a:tc>
                 <a:tc>
                   <a:txBody>
-                    <a:bodyPr wrap="square"/>
+                    <a:bodyPr/>
                     <a:lstStyle/>
                     <a:p>
                       <a:pPr algn="l"/>
@@ -5515,7 +5515,7 @@
                 </a:tc>
                 <a:tc>
                   <a:txBody>
-                    <a:bodyPr wrap="square"/>
+                    <a:bodyPr/>
                     <a:lstStyle/>
                     <a:p>
                       <a:pPr algn="l"/>
@@ -5538,7 +5538,7 @@
                 </a:tc>
                 <a:tc>
                   <a:txBody>
-                    <a:bodyPr wrap="square"/>
+                    <a:bodyPr/>
                     <a:lstStyle/>
                     <a:p>
                       <a:pPr algn="l"/>
@@ -5561,141 +5561,24 @@
                 </a:tc>
                 <a:tc>
                   <a:txBody>
-                    <a:bodyPr wrap="square"/>
-                    <a:lstStyle/>
-                    <a:p>
-                      <a:pPr algn="l"/>
-                      <a:r>
-                        <a:rPr sz="1000" b="0">
-                          <a:solidFill>
-                            <a:srgbClr val="1D1B43"/>
-                          </a:solidFill>
-                          <a:latin typeface="Calibri"/>
-                        </a:rPr>
-                        <a:t>FORA DO PRAZO</a:t>
+                    <a:bodyPr/>
+                    <a:lstStyle/>
+                    <a:p>
+                      <a:pPr algn="l"/>
+                      <a:r>
+                        <a:rPr sz="1000" b="0">
+                          <a:solidFill>
+                            <a:srgbClr val="1D1B43"/>
+                          </a:solidFill>
+                          <a:latin typeface="Calibri"/>
+                        </a:rPr>
+                        <a:t>ENTREGUE FORA DO PRAZO</a:t>
                       </a:r>
                     </a:p>
                   </a:txBody>
                   <a:tcPr>
                     <a:solidFill>
                       <a:srgbClr val="FFFFFF"/>
-                    </a:solidFill>
-                  </a:tcPr>
-                </a:tc>
-              </a:tr>
-              <a:tr h="384048">
-                <a:tc>
-                  <a:txBody>
-                    <a:bodyPr wrap="square"/>
-                    <a:lstStyle/>
-                    <a:p>
-                      <a:pPr algn="l"/>
-                      <a:r>
-                        <a:rPr sz="1000" b="0">
-                          <a:solidFill>
-                            <a:srgbClr val="1D1B43"/>
-                          </a:solidFill>
-                          <a:latin typeface="Calibri"/>
-                        </a:rPr>
-                        <a:t>281070</a:t>
-                      </a:r>
-                    </a:p>
-                  </a:txBody>
-                  <a:tcPr>
-                    <a:solidFill>
-                      <a:srgbClr val="F2F2F2"/>
-                    </a:solidFill>
-                  </a:tcPr>
-                </a:tc>
-                <a:tc>
-                  <a:txBody>
-                    <a:bodyPr wrap="square"/>
-                    <a:lstStyle/>
-                    <a:p>
-                      <a:pPr algn="l"/>
-                      <a:r>
-                        <a:rPr sz="1000" b="0">
-                          <a:solidFill>
-                            <a:srgbClr val="1D1B43"/>
-                          </a:solidFill>
-                          <a:latin typeface="Calibri"/>
-                        </a:rPr>
-                        <a:t>SAMSONITE DO BRASIL - SAO PAULO / SP</a:t>
-                      </a:r>
-                    </a:p>
-                  </a:txBody>
-                  <a:tcPr>
-                    <a:solidFill>
-                      <a:srgbClr val="F2F2F2"/>
-                    </a:solidFill>
-                  </a:tcPr>
-                </a:tc>
-                <a:tc>
-                  <a:txBody>
-                    <a:bodyPr wrap="square"/>
-                    <a:lstStyle/>
-                    <a:p>
-                      <a:pPr algn="l"/>
-                      <a:r>
-                        <a:rPr sz="1000" b="0">
-                          <a:solidFill>
-                            <a:srgbClr val="1D1B43"/>
-                          </a:solidFill>
-                          <a:latin typeface="Calibri"/>
-                        </a:rPr>
-                        <a:t>SAO PAULO/SP</a:t>
-                      </a:r>
-                    </a:p>
-                  </a:txBody>
-                  <a:tcPr>
-                    <a:solidFill>
-                      <a:srgbClr val="F2F2F2"/>
-                    </a:solidFill>
-                  </a:tcPr>
-                </a:tc>
-                <a:tc>
-                  <a:txBody>
-                    <a:bodyPr wrap="square"/>
-                    <a:lstStyle/>
-                    <a:p>
-                      <a:pPr algn="l"/>
-                      <a:r>
-                        <a:rPr sz="1000" b="0">
-                          <a:solidFill>
-                            <a:srgbClr val="1D1B43"/>
-                          </a:solidFill>
-                          <a:latin typeface="Calibri"/>
-                        </a:rPr>
-                        <a:t>30/04/2026</a:t>
-                      </a:r>
-                    </a:p>
-                  </a:txBody>
-                  <a:tcPr>
-                    <a:solidFill>
-                      <a:srgbClr val="F2F2F2"/>
-                    </a:solidFill>
-                  </a:tcPr>
-                </a:tc>
-                <a:tc>
-                  <a:txBody>
-                    <a:bodyPr wrap="square"/>
-                    <a:lstStyle/>
-                    <a:p>
-                      <a:pPr algn="l"/>
-                      <a:r>
-                        <a:rPr sz="1000" b="0">
-                          <a:solidFill>
-                            <a:srgbClr val="1D1B43"/>
-                          </a:solidFill>
-                          <a:latin typeface="Calibri"/>
-                        </a:rPr>
-                        <a:t>ENTREGUE FORA DO PRAZO</a:t>
-                      </a:r>
-                    </a:p>
-                  </a:txBody>
-                  <a:tcPr>
-                    <a:solidFill>
-                      <a:srgbClr val="F2F2F2"/>
                     </a:solidFill>
                   </a:tcPr>
                 </a:tc>
@@ -5861,7 +5744,7 @@
               <a:tr h="457200">
                 <a:tc>
                   <a:txBody>
-                    <a:bodyPr wrap="square"/>
+                    <a:bodyPr/>
                     <a:lstStyle/>
                     <a:p>
                       <a:pPr algn="ctr"/>
@@ -5884,7 +5767,7 @@
                 </a:tc>
                 <a:tc>
                   <a:txBody>
-                    <a:bodyPr wrap="square"/>
+                    <a:bodyPr/>
                     <a:lstStyle/>
                     <a:p>
                       <a:pPr algn="ctr"/>
@@ -5907,7 +5790,7 @@
                 </a:tc>
                 <a:tc>
                   <a:txBody>
-                    <a:bodyPr wrap="square"/>
+                    <a:bodyPr/>
                     <a:lstStyle/>
                     <a:p>
                       <a:pPr algn="ctr"/>
@@ -5930,7 +5813,7 @@
                 </a:tc>
                 <a:tc>
                   <a:txBody>
-                    <a:bodyPr wrap="square"/>
+                    <a:bodyPr/>
                     <a:lstStyle/>
                     <a:p>
                       <a:pPr algn="ctr"/>
@@ -5953,7 +5836,7 @@
                 </a:tc>
                 <a:tc>
                   <a:txBody>
-                    <a:bodyPr wrap="square"/>
+                    <a:bodyPr/>
                     <a:lstStyle/>
                     <a:p>
                       <a:pPr algn="ctr"/>
@@ -5976,7 +5859,7 @@
                 </a:tc>
                 <a:tc>
                   <a:txBody>
-                    <a:bodyPr wrap="square"/>
+                    <a:bodyPr/>
                     <a:lstStyle/>
                     <a:p>
                       <a:pPr algn="ctr"/>
@@ -6001,7 +5884,7 @@
               <a:tr h="457200">
                 <a:tc>
                   <a:txBody>
-                    <a:bodyPr wrap="square"/>
+                    <a:bodyPr/>
                     <a:lstStyle/>
                     <a:p>
                       <a:pPr algn="l"/>
@@ -6024,18 +5907,18 @@
                 </a:tc>
                 <a:tc>
                   <a:txBody>
-                    <a:bodyPr wrap="square"/>
-                    <a:lstStyle/>
-                    <a:p>
-                      <a:pPr algn="l"/>
-                      <a:r>
-                        <a:rPr sz="1000" b="0">
-                          <a:solidFill>
-                            <a:srgbClr val="1D1B43"/>
-                          </a:solidFill>
-                          <a:latin typeface="Calibri"/>
-                        </a:rPr>
-                        <a:t>196</a:t>
+                    <a:bodyPr/>
+                    <a:lstStyle/>
+                    <a:p>
+                      <a:pPr algn="l"/>
+                      <a:r>
+                        <a:rPr sz="1000" b="0">
+                          <a:solidFill>
+                            <a:srgbClr val="1D1B43"/>
+                          </a:solidFill>
+                          <a:latin typeface="Calibri"/>
+                        </a:rPr>
+                        <a:t>182</a:t>
                       </a:r>
                     </a:p>
                   </a:txBody>
@@ -6047,18 +5930,18 @@
                 </a:tc>
                 <a:tc>
                   <a:txBody>
-                    <a:bodyPr wrap="square"/>
-                    <a:lstStyle/>
-                    <a:p>
-                      <a:pPr algn="l"/>
-                      <a:r>
-                        <a:rPr sz="1000" b="0">
-                          <a:solidFill>
-                            <a:srgbClr val="1D1B43"/>
-                          </a:solidFill>
-                          <a:latin typeface="Calibri"/>
-                        </a:rPr>
-                        <a:t>194</a:t>
+                    <a:bodyPr/>
+                    <a:lstStyle/>
+                    <a:p>
+                      <a:pPr algn="l"/>
+                      <a:r>
+                        <a:rPr sz="1000" b="0">
+                          <a:solidFill>
+                            <a:srgbClr val="1D1B43"/>
+                          </a:solidFill>
+                          <a:latin typeface="Calibri"/>
+                        </a:rPr>
+                        <a:t>181</a:t>
                       </a:r>
                     </a:p>
                   </a:txBody>
@@ -6070,18 +5953,18 @@
                 </a:tc>
                 <a:tc>
                   <a:txBody>
-                    <a:bodyPr wrap="square"/>
-                    <a:lstStyle/>
-                    <a:p>
-                      <a:pPr algn="l"/>
-                      <a:r>
-                        <a:rPr sz="1000" b="0">
-                          <a:solidFill>
-                            <a:srgbClr val="1D1B43"/>
-                          </a:solidFill>
-                          <a:latin typeface="Calibri"/>
-                        </a:rPr>
-                        <a:t>2</a:t>
+                    <a:bodyPr/>
+                    <a:lstStyle/>
+                    <a:p>
+                      <a:pPr algn="l"/>
+                      <a:r>
+                        <a:rPr sz="1000" b="0">
+                          <a:solidFill>
+                            <a:srgbClr val="1D1B43"/>
+                          </a:solidFill>
+                          <a:latin typeface="Calibri"/>
+                        </a:rPr>
+                        <a:t>1</a:t>
                       </a:r>
                     </a:p>
                   </a:txBody>
@@ -6093,18 +5976,18 @@
                 </a:tc>
                 <a:tc>
                   <a:txBody>
-                    <a:bodyPr wrap="square"/>
-                    <a:lstStyle/>
-                    <a:p>
-                      <a:pPr algn="l"/>
-                      <a:r>
-                        <a:rPr sz="1000" b="0">
-                          <a:solidFill>
-                            <a:srgbClr val="1D1B43"/>
-                          </a:solidFill>
-                          <a:latin typeface="Calibri"/>
-                        </a:rPr>
-                        <a:t>99.0%</a:t>
+                    <a:bodyPr/>
+                    <a:lstStyle/>
+                    <a:p>
+                      <a:pPr algn="l"/>
+                      <a:r>
+                        <a:rPr sz="1000" b="0">
+                          <a:solidFill>
+                            <a:srgbClr val="1D1B43"/>
+                          </a:solidFill>
+                          <a:latin typeface="Calibri"/>
+                        </a:rPr>
+                        <a:t>99.5%</a:t>
                       </a:r>
                     </a:p>
                   </a:txBody>
@@ -6116,7 +5999,7 @@
                 </a:tc>
                 <a:tc>
                   <a:txBody>
-                    <a:bodyPr wrap="square"/>
+                    <a:bodyPr/>
                     <a:lstStyle/>
                     <a:p>
                       <a:pPr algn="l"/>
@@ -6141,7 +6024,7 @@
               <a:tr h="457200">
                 <a:tc>
                   <a:txBody>
-                    <a:bodyPr wrap="square"/>
+                    <a:bodyPr/>
                     <a:lstStyle/>
                     <a:p>
                       <a:pPr algn="l"/>
@@ -6164,7 +6047,7 @@
                 </a:tc>
                 <a:tc>
                   <a:txBody>
-                    <a:bodyPr wrap="square"/>
+                    <a:bodyPr/>
                     <a:lstStyle/>
                     <a:p>
                       <a:pPr algn="l"/>
@@ -6187,7 +6070,7 @@
                 </a:tc>
                 <a:tc>
                   <a:txBody>
-                    <a:bodyPr wrap="square"/>
+                    <a:bodyPr/>
                     <a:lstStyle/>
                     <a:p>
                       <a:pPr algn="l"/>
@@ -6210,7 +6093,7 @@
                 </a:tc>
                 <a:tc>
                   <a:txBody>
-                    <a:bodyPr wrap="square"/>
+                    <a:bodyPr/>
                     <a:lstStyle/>
                     <a:p>
                       <a:pPr algn="l"/>
@@ -6233,7 +6116,7 @@
                 </a:tc>
                 <a:tc>
                   <a:txBody>
-                    <a:bodyPr wrap="square"/>
+                    <a:bodyPr/>
                     <a:lstStyle/>
                     <a:p>
                       <a:pPr algn="l"/>
@@ -6256,7 +6139,7 @@
                 </a:tc>
                 <a:tc>
                   <a:txBody>
-                    <a:bodyPr wrap="square"/>
+                    <a:bodyPr/>
                     <a:lstStyle/>
                     <a:p>
                       <a:pPr algn="l"/>
@@ -6281,7 +6164,7 @@
               <a:tr h="457200">
                 <a:tc>
                   <a:txBody>
-                    <a:bodyPr wrap="square"/>
+                    <a:bodyPr/>
                     <a:lstStyle/>
                     <a:p>
                       <a:pPr algn="l"/>
@@ -6304,7 +6187,7 @@
                 </a:tc>
                 <a:tc>
                   <a:txBody>
-                    <a:bodyPr wrap="square"/>
+                    <a:bodyPr/>
                     <a:lstStyle/>
                     <a:p>
                       <a:pPr algn="l"/>
@@ -6327,7 +6210,7 @@
                 </a:tc>
                 <a:tc>
                   <a:txBody>
-                    <a:bodyPr wrap="square"/>
+                    <a:bodyPr/>
                     <a:lstStyle/>
                     <a:p>
                       <a:pPr algn="l"/>
@@ -6350,7 +6233,7 @@
                 </a:tc>
                 <a:tc>
                   <a:txBody>
-                    <a:bodyPr wrap="square"/>
+                    <a:bodyPr/>
                     <a:lstStyle/>
                     <a:p>
                       <a:pPr algn="l"/>
@@ -6373,7 +6256,7 @@
                 </a:tc>
                 <a:tc>
                   <a:txBody>
-                    <a:bodyPr wrap="square"/>
+                    <a:bodyPr/>
                     <a:lstStyle/>
                     <a:p>
                       <a:pPr algn="l"/>
@@ -6396,7 +6279,7 @@
                 </a:tc>
                 <a:tc>
                   <a:txBody>
-                    <a:bodyPr wrap="square"/>
+                    <a:bodyPr/>
                     <a:lstStyle/>
                     <a:p>
                       <a:pPr algn="l"/>
@@ -6421,18 +6304,18 @@
               <a:tr h="457200">
                 <a:tc>
                   <a:txBody>
-                    <a:bodyPr wrap="square"/>
-                    <a:lstStyle/>
-                    <a:p>
-                      <a:pPr algn="l"/>
-                      <a:r>
-                        <a:rPr sz="1000" b="0">
-                          <a:solidFill>
-                            <a:srgbClr val="1D1B43"/>
-                          </a:solidFill>
-                          <a:latin typeface="Calibri"/>
-                        </a:rPr>
-                        <a:t>RS</a:t>
+                    <a:bodyPr/>
+                    <a:lstStyle/>
+                    <a:p>
+                      <a:pPr algn="l"/>
+                      <a:r>
+                        <a:rPr sz="1000" b="0">
+                          <a:solidFill>
+                            <a:srgbClr val="1D1B43"/>
+                          </a:solidFill>
+                          <a:latin typeface="Calibri"/>
+                        </a:rPr>
+                        <a:t>PR</a:t>
                       </a:r>
                     </a:p>
                   </a:txBody>
@@ -6444,18 +6327,18 @@
                 </a:tc>
                 <a:tc>
                   <a:txBody>
-                    <a:bodyPr wrap="square"/>
-                    <a:lstStyle/>
-                    <a:p>
-                      <a:pPr algn="l"/>
-                      <a:r>
-                        <a:rPr sz="1000" b="0">
-                          <a:solidFill>
-                            <a:srgbClr val="1D1B43"/>
-                          </a:solidFill>
-                          <a:latin typeface="Calibri"/>
-                        </a:rPr>
-                        <a:t>6</a:t>
+                    <a:bodyPr/>
+                    <a:lstStyle/>
+                    <a:p>
+                      <a:pPr algn="l"/>
+                      <a:r>
+                        <a:rPr sz="1000" b="0">
+                          <a:solidFill>
+                            <a:srgbClr val="1D1B43"/>
+                          </a:solidFill>
+                          <a:latin typeface="Calibri"/>
+                        </a:rPr>
+                        <a:t>4</a:t>
                       </a:r>
                     </a:p>
                   </a:txBody>
@@ -6467,18 +6350,18 @@
                 </a:tc>
                 <a:tc>
                   <a:txBody>
-                    <a:bodyPr wrap="square"/>
-                    <a:lstStyle/>
-                    <a:p>
-                      <a:pPr algn="l"/>
-                      <a:r>
-                        <a:rPr sz="1000" b="0">
-                          <a:solidFill>
-                            <a:srgbClr val="1D1B43"/>
-                          </a:solidFill>
-                          <a:latin typeface="Calibri"/>
-                        </a:rPr>
-                        <a:t>6</a:t>
+                    <a:bodyPr/>
+                    <a:lstStyle/>
+                    <a:p>
+                      <a:pPr algn="l"/>
+                      <a:r>
+                        <a:rPr sz="1000" b="0">
+                          <a:solidFill>
+                            <a:srgbClr val="1D1B43"/>
+                          </a:solidFill>
+                          <a:latin typeface="Calibri"/>
+                        </a:rPr>
+                        <a:t>4</a:t>
                       </a:r>
                     </a:p>
                   </a:txBody>
@@ -6490,7 +6373,7 @@
                 </a:tc>
                 <a:tc>
                   <a:txBody>
-                    <a:bodyPr wrap="square"/>
+                    <a:bodyPr/>
                     <a:lstStyle/>
                     <a:p>
                       <a:pPr algn="l"/>
@@ -6513,7 +6396,7 @@
                 </a:tc>
                 <a:tc>
                   <a:txBody>
-                    <a:bodyPr wrap="square"/>
+                    <a:bodyPr/>
                     <a:lstStyle/>
                     <a:p>
                       <a:pPr algn="l"/>
@@ -6536,7 +6419,7 @@
                 </a:tc>
                 <a:tc>
                   <a:txBody>
-                    <a:bodyPr wrap="square"/>
+                    <a:bodyPr/>
                     <a:lstStyle/>
                     <a:p>
                       <a:pPr algn="l"/>
@@ -6561,18 +6444,18 @@
               <a:tr h="457200">
                 <a:tc>
                   <a:txBody>
-                    <a:bodyPr wrap="square"/>
-                    <a:lstStyle/>
-                    <a:p>
-                      <a:pPr algn="l"/>
-                      <a:r>
-                        <a:rPr sz="1000" b="0">
-                          <a:solidFill>
-                            <a:srgbClr val="1D1B43"/>
-                          </a:solidFill>
-                          <a:latin typeface="Calibri"/>
-                        </a:rPr>
-                        <a:t>PR</a:t>
+                    <a:bodyPr/>
+                    <a:lstStyle/>
+                    <a:p>
+                      <a:pPr algn="l"/>
+                      <a:r>
+                        <a:rPr sz="1000" b="0">
+                          <a:solidFill>
+                            <a:srgbClr val="1D1B43"/>
+                          </a:solidFill>
+                          <a:latin typeface="Calibri"/>
+                        </a:rPr>
+                        <a:t>RS</a:t>
                       </a:r>
                     </a:p>
                   </a:txBody>
@@ -6584,7 +6467,7 @@
                 </a:tc>
                 <a:tc>
                   <a:txBody>
-                    <a:bodyPr wrap="square"/>
+                    <a:bodyPr/>
                     <a:lstStyle/>
                     <a:p>
                       <a:pPr algn="l"/>
@@ -6607,7 +6490,7 @@
                 </a:tc>
                 <a:tc>
                   <a:txBody>
-                    <a:bodyPr wrap="square"/>
+                    <a:bodyPr/>
                     <a:lstStyle/>
                     <a:p>
                       <a:pPr algn="l"/>
@@ -6630,7 +6513,7 @@
                 </a:tc>
                 <a:tc>
                   <a:txBody>
-                    <a:bodyPr wrap="square"/>
+                    <a:bodyPr/>
                     <a:lstStyle/>
                     <a:p>
                       <a:pPr algn="l"/>
@@ -6653,7 +6536,7 @@
                 </a:tc>
                 <a:tc>
                   <a:txBody>
-                    <a:bodyPr wrap="square"/>
+                    <a:bodyPr/>
                     <a:lstStyle/>
                     <a:p>
                       <a:pPr algn="l"/>
@@ -6676,7 +6559,7 @@
                 </a:tc>
                 <a:tc>
                   <a:txBody>
-                    <a:bodyPr wrap="square"/>
+                    <a:bodyPr/>
                     <a:lstStyle/>
                     <a:p>
                       <a:pPr algn="l"/>
@@ -6701,7 +6584,7 @@
               <a:tr h="457200">
                 <a:tc>
                   <a:txBody>
-                    <a:bodyPr wrap="square"/>
+                    <a:bodyPr/>
                     <a:lstStyle/>
                     <a:p>
                       <a:pPr algn="l"/>
@@ -6724,7 +6607,7 @@
                 </a:tc>
                 <a:tc>
                   <a:txBody>
-                    <a:bodyPr wrap="square"/>
+                    <a:bodyPr/>
                     <a:lstStyle/>
                     <a:p>
                       <a:pPr algn="l"/>
@@ -6747,7 +6630,7 @@
                 </a:tc>
                 <a:tc>
                   <a:txBody>
-                    <a:bodyPr wrap="square"/>
+                    <a:bodyPr/>
                     <a:lstStyle/>
                     <a:p>
                       <a:pPr algn="l"/>
@@ -6770,7 +6653,7 @@
                 </a:tc>
                 <a:tc>
                   <a:txBody>
-                    <a:bodyPr wrap="square"/>
+                    <a:bodyPr/>
                     <a:lstStyle/>
                     <a:p>
                       <a:pPr algn="l"/>
@@ -6793,7 +6676,7 @@
                 </a:tc>
                 <a:tc>
                   <a:txBody>
-                    <a:bodyPr wrap="square"/>
+                    <a:bodyPr/>
                     <a:lstStyle/>
                     <a:p>
                       <a:pPr algn="l"/>
@@ -6816,7 +6699,7 @@
                 </a:tc>
                 <a:tc>
                   <a:txBody>
-                    <a:bodyPr wrap="square"/>
+                    <a:bodyPr/>
                     <a:lstStyle/>
                     <a:p>
                       <a:pPr algn="l"/>
@@ -6922,7 +6805,7 @@
                 </a:solidFill>
                 <a:latin typeface="Calibri"/>
               </a:rPr>
-              <a:t>TOP DESTINATARIOS (92 pontos)</a:t>
+              <a:t>TOP DESTINATARIOS (90 pontos)</a:t>
             </a:r>
           </a:p>
         </p:txBody>
@@ -7000,7 +6883,7 @@
               <a:tr h="292608">
                 <a:tc>
                   <a:txBody>
-                    <a:bodyPr wrap="square"/>
+                    <a:bodyPr/>
                     <a:lstStyle/>
                     <a:p>
                       <a:pPr algn="ctr"/>
@@ -7023,7 +6906,7 @@
                 </a:tc>
                 <a:tc>
                   <a:txBody>
-                    <a:bodyPr wrap="square"/>
+                    <a:bodyPr/>
                     <a:lstStyle/>
                     <a:p>
                       <a:pPr algn="ctr"/>
@@ -7046,7 +6929,7 @@
                 </a:tc>
                 <a:tc>
                   <a:txBody>
-                    <a:bodyPr wrap="square"/>
+                    <a:bodyPr/>
                     <a:lstStyle/>
                     <a:p>
                       <a:pPr algn="ctr"/>
@@ -7069,7 +6952,7 @@
                 </a:tc>
                 <a:tc>
                   <a:txBody>
-                    <a:bodyPr wrap="square"/>
+                    <a:bodyPr/>
                     <a:lstStyle/>
                     <a:p>
                       <a:pPr algn="ctr"/>
@@ -7092,7 +6975,7 @@
                 </a:tc>
                 <a:tc>
                   <a:txBody>
-                    <a:bodyPr wrap="square"/>
+                    <a:bodyPr/>
                     <a:lstStyle/>
                     <a:p>
                       <a:pPr algn="ctr"/>
@@ -7115,7 +6998,7 @@
                 </a:tc>
                 <a:tc>
                   <a:txBody>
-                    <a:bodyPr wrap="square"/>
+                    <a:bodyPr/>
                     <a:lstStyle/>
                     <a:p>
                       <a:pPr algn="ctr"/>
@@ -7138,7 +7021,7 @@
                 </a:tc>
                 <a:tc>
                   <a:txBody>
-                    <a:bodyPr wrap="square"/>
+                    <a:bodyPr/>
                     <a:lstStyle/>
                     <a:p>
                       <a:pPr algn="ctr"/>
@@ -7163,7 +7046,7 @@
               <a:tr h="292608">
                 <a:tc>
                   <a:txBody>
-                    <a:bodyPr wrap="square"/>
+                    <a:bodyPr/>
                     <a:lstStyle/>
                     <a:p>
                       <a:pPr algn="l"/>
@@ -7186,7 +7069,7 @@
                 </a:tc>
                 <a:tc>
                   <a:txBody>
-                    <a:bodyPr wrap="square"/>
+                    <a:bodyPr/>
                     <a:lstStyle/>
                     <a:p>
                       <a:pPr algn="l"/>
@@ -7209,18 +7092,18 @@
                 </a:tc>
                 <a:tc>
                   <a:txBody>
-                    <a:bodyPr wrap="square"/>
-                    <a:lstStyle/>
-                    <a:p>
-                      <a:pPr algn="l"/>
-                      <a:r>
-                        <a:rPr sz="1000" b="0">
-                          <a:solidFill>
-                            <a:srgbClr val="1D1B43"/>
-                          </a:solidFill>
-                          <a:latin typeface="Calibri"/>
-                        </a:rPr>
-                        <a:t>45</a:t>
+                    <a:bodyPr/>
+                    <a:lstStyle/>
+                    <a:p>
+                      <a:pPr algn="l"/>
+                      <a:r>
+                        <a:rPr sz="1000" b="0">
+                          <a:solidFill>
+                            <a:srgbClr val="1D1B43"/>
+                          </a:solidFill>
+                          <a:latin typeface="Calibri"/>
+                        </a:rPr>
+                        <a:t>41</a:t>
                       </a:r>
                     </a:p>
                   </a:txBody>
@@ -7232,18 +7115,18 @@
                 </a:tc>
                 <a:tc>
                   <a:txBody>
-                    <a:bodyPr wrap="square"/>
-                    <a:lstStyle/>
-                    <a:p>
-                      <a:pPr algn="l"/>
-                      <a:r>
-                        <a:rPr sz="1000" b="0">
-                          <a:solidFill>
-                            <a:srgbClr val="1D1B43"/>
-                          </a:solidFill>
-                          <a:latin typeface="Calibri"/>
-                        </a:rPr>
-                        <a:t>45</a:t>
+                    <a:bodyPr/>
+                    <a:lstStyle/>
+                    <a:p>
+                      <a:pPr algn="l"/>
+                      <a:r>
+                        <a:rPr sz="1000" b="0">
+                          <a:solidFill>
+                            <a:srgbClr val="1D1B43"/>
+                          </a:solidFill>
+                          <a:latin typeface="Calibri"/>
+                        </a:rPr>
+                        <a:t>41</a:t>
                       </a:r>
                     </a:p>
                   </a:txBody>
@@ -7255,7 +7138,7 @@
                 </a:tc>
                 <a:tc>
                   <a:txBody>
-                    <a:bodyPr wrap="square"/>
+                    <a:bodyPr/>
                     <a:lstStyle/>
                     <a:p>
                       <a:pPr algn="l"/>
@@ -7278,7 +7161,7 @@
                 </a:tc>
                 <a:tc>
                   <a:txBody>
-                    <a:bodyPr wrap="square"/>
+                    <a:bodyPr/>
                     <a:lstStyle/>
                     <a:p>
                       <a:pPr algn="l"/>
@@ -7301,7 +7184,7 @@
                 </a:tc>
                 <a:tc>
                   <a:txBody>
-                    <a:bodyPr wrap="square"/>
+                    <a:bodyPr/>
                     <a:lstStyle/>
                     <a:p>
                       <a:pPr algn="l"/>
@@ -7326,7 +7209,7 @@
               <a:tr h="292608">
                 <a:tc>
                   <a:txBody>
-                    <a:bodyPr wrap="square"/>
+                    <a:bodyPr/>
                     <a:lstStyle/>
                     <a:p>
                       <a:pPr algn="l"/>
@@ -7349,7 +7232,7 @@
                 </a:tc>
                 <a:tc>
                   <a:txBody>
-                    <a:bodyPr wrap="square"/>
+                    <a:bodyPr/>
                     <a:lstStyle/>
                     <a:p>
                       <a:pPr algn="l"/>
@@ -7372,7 +7255,7 @@
                 </a:tc>
                 <a:tc>
                   <a:txBody>
-                    <a:bodyPr wrap="square"/>
+                    <a:bodyPr/>
                     <a:lstStyle/>
                     <a:p>
                       <a:pPr algn="l"/>
@@ -7395,7 +7278,7 @@
                 </a:tc>
                 <a:tc>
                   <a:txBody>
-                    <a:bodyPr wrap="square"/>
+                    <a:bodyPr/>
                     <a:lstStyle/>
                     <a:p>
                       <a:pPr algn="l"/>
@@ -7418,7 +7301,7 @@
                 </a:tc>
                 <a:tc>
                   <a:txBody>
-                    <a:bodyPr wrap="square"/>
+                    <a:bodyPr/>
                     <a:lstStyle/>
                     <a:p>
                       <a:pPr algn="l"/>
@@ -7441,7 +7324,7 @@
                 </a:tc>
                 <a:tc>
                   <a:txBody>
-                    <a:bodyPr wrap="square"/>
+                    <a:bodyPr/>
                     <a:lstStyle/>
                     <a:p>
                       <a:pPr algn="l"/>
@@ -7464,7 +7347,7 @@
                 </a:tc>
                 <a:tc>
                   <a:txBody>
-                    <a:bodyPr wrap="square"/>
+                    <a:bodyPr/>
                     <a:lstStyle/>
                     <a:p>
                       <a:pPr algn="l"/>
@@ -7489,7 +7372,7 @@
               <a:tr h="292608">
                 <a:tc>
                   <a:txBody>
-                    <a:bodyPr wrap="square"/>
+                    <a:bodyPr/>
                     <a:lstStyle/>
                     <a:p>
                       <a:pPr algn="l"/>
@@ -7512,7 +7395,7 @@
                 </a:tc>
                 <a:tc>
                   <a:txBody>
-                    <a:bodyPr wrap="square"/>
+                    <a:bodyPr/>
                     <a:lstStyle/>
                     <a:p>
                       <a:pPr algn="l"/>
@@ -7535,7 +7418,7 @@
                 </a:tc>
                 <a:tc>
                   <a:txBody>
-                    <a:bodyPr wrap="square"/>
+                    <a:bodyPr/>
                     <a:lstStyle/>
                     <a:p>
                       <a:pPr algn="l"/>
@@ -7558,7 +7441,7 @@
                 </a:tc>
                 <a:tc>
                   <a:txBody>
-                    <a:bodyPr wrap="square"/>
+                    <a:bodyPr/>
                     <a:lstStyle/>
                     <a:p>
                       <a:pPr algn="l"/>
@@ -7581,7 +7464,7 @@
                 </a:tc>
                 <a:tc>
                   <a:txBody>
-                    <a:bodyPr wrap="square"/>
+                    <a:bodyPr/>
                     <a:lstStyle/>
                     <a:p>
                       <a:pPr algn="l"/>
@@ -7604,7 +7487,7 @@
                 </a:tc>
                 <a:tc>
                   <a:txBody>
-                    <a:bodyPr wrap="square"/>
+                    <a:bodyPr/>
                     <a:lstStyle/>
                     <a:p>
                       <a:pPr algn="l"/>
@@ -7627,7 +7510,7 @@
                 </a:tc>
                 <a:tc>
                   <a:txBody>
-                    <a:bodyPr wrap="square"/>
+                    <a:bodyPr/>
                     <a:lstStyle/>
                     <a:p>
                       <a:pPr algn="l"/>
@@ -7652,7 +7535,7 @@
               <a:tr h="292608">
                 <a:tc>
                   <a:txBody>
-                    <a:bodyPr wrap="square"/>
+                    <a:bodyPr/>
                     <a:lstStyle/>
                     <a:p>
                       <a:pPr algn="l"/>
@@ -7675,7 +7558,7 @@
                 </a:tc>
                 <a:tc>
                   <a:txBody>
-                    <a:bodyPr wrap="square"/>
+                    <a:bodyPr/>
                     <a:lstStyle/>
                     <a:p>
                       <a:pPr algn="l"/>
@@ -7698,18 +7581,18 @@
                 </a:tc>
                 <a:tc>
                   <a:txBody>
-                    <a:bodyPr wrap="square"/>
-                    <a:lstStyle/>
-                    <a:p>
-                      <a:pPr algn="l"/>
-                      <a:r>
-                        <a:rPr sz="1000" b="0">
-                          <a:solidFill>
-                            <a:srgbClr val="1D1B43"/>
-                          </a:solidFill>
-                          <a:latin typeface="Calibri"/>
-                        </a:rPr>
-                        <a:t>11</a:t>
+                    <a:bodyPr/>
+                    <a:lstStyle/>
+                    <a:p>
+                      <a:pPr algn="l"/>
+                      <a:r>
+                        <a:rPr sz="1000" b="0">
+                          <a:solidFill>
+                            <a:srgbClr val="1D1B43"/>
+                          </a:solidFill>
+                          <a:latin typeface="Calibri"/>
+                        </a:rPr>
+                        <a:t>9</a:t>
                       </a:r>
                     </a:p>
                   </a:txBody>
@@ -7721,18 +7604,18 @@
                 </a:tc>
                 <a:tc>
                   <a:txBody>
-                    <a:bodyPr wrap="square"/>
-                    <a:lstStyle/>
-                    <a:p>
-                      <a:pPr algn="l"/>
-                      <a:r>
-                        <a:rPr sz="1000" b="0">
-                          <a:solidFill>
-                            <a:srgbClr val="1D1B43"/>
-                          </a:solidFill>
-                          <a:latin typeface="Calibri"/>
-                        </a:rPr>
-                        <a:t>10</a:t>
+                    <a:bodyPr/>
+                    <a:lstStyle/>
+                    <a:p>
+                      <a:pPr algn="l"/>
+                      <a:r>
+                        <a:rPr sz="1000" b="0">
+                          <a:solidFill>
+                            <a:srgbClr val="1D1B43"/>
+                          </a:solidFill>
+                          <a:latin typeface="Calibri"/>
+                        </a:rPr>
+                        <a:t>9</a:t>
                       </a:r>
                     </a:p>
                   </a:txBody>
@@ -7744,18 +7627,18 @@
                 </a:tc>
                 <a:tc>
                   <a:txBody>
-                    <a:bodyPr wrap="square"/>
-                    <a:lstStyle/>
-                    <a:p>
-                      <a:pPr algn="l"/>
-                      <a:r>
-                        <a:rPr sz="1000" b="0">
-                          <a:solidFill>
-                            <a:srgbClr val="1D1B43"/>
-                          </a:solidFill>
-                          <a:latin typeface="Calibri"/>
-                        </a:rPr>
-                        <a:t>1</a:t>
+                    <a:bodyPr/>
+                    <a:lstStyle/>
+                    <a:p>
+                      <a:pPr algn="l"/>
+                      <a:r>
+                        <a:rPr sz="1000" b="0">
+                          <a:solidFill>
+                            <a:srgbClr val="1D1B43"/>
+                          </a:solidFill>
+                          <a:latin typeface="Calibri"/>
+                        </a:rPr>
+                        <a:t>0</a:t>
                       </a:r>
                     </a:p>
                   </a:txBody>
@@ -7767,18 +7650,18 @@
                 </a:tc>
                 <a:tc>
                   <a:txBody>
-                    <a:bodyPr wrap="square"/>
-                    <a:lstStyle/>
-                    <a:p>
-                      <a:pPr algn="l"/>
-                      <a:r>
-                        <a:rPr sz="1000" b="0">
-                          <a:solidFill>
-                            <a:srgbClr val="1D1B43"/>
-                          </a:solidFill>
-                          <a:latin typeface="Calibri"/>
-                        </a:rPr>
-                        <a:t>90.9%</a:t>
+                    <a:bodyPr/>
+                    <a:lstStyle/>
+                    <a:p>
+                      <a:pPr algn="l"/>
+                      <a:r>
+                        <a:rPr sz="1000" b="0">
+                          <a:solidFill>
+                            <a:srgbClr val="1D1B43"/>
+                          </a:solidFill>
+                          <a:latin typeface="Calibri"/>
+                        </a:rPr>
+                        <a:t>100.0%</a:t>
                       </a:r>
                     </a:p>
                   </a:txBody>
@@ -7790,18 +7673,18 @@
                 </a:tc>
                 <a:tc>
                   <a:txBody>
-                    <a:bodyPr wrap="square"/>
-                    <a:lstStyle/>
-                    <a:p>
-                      <a:pPr algn="l"/>
-                      <a:r>
-                        <a:rPr sz="1000" b="0">
-                          <a:solidFill>
-                            <a:srgbClr val="1D1B43"/>
-                          </a:solidFill>
-                          <a:latin typeface="Calibri"/>
-                        </a:rPr>
-                        <a:t>Regular</a:t>
+                    <a:bodyPr/>
+                    <a:lstStyle/>
+                    <a:p>
+                      <a:pPr algn="l"/>
+                      <a:r>
+                        <a:rPr sz="1000" b="0">
+                          <a:solidFill>
+                            <a:srgbClr val="1D1B43"/>
+                          </a:solidFill>
+                          <a:latin typeface="Calibri"/>
+                        </a:rPr>
+                        <a:t>Excelente</a:t>
                       </a:r>
                     </a:p>
                   </a:txBody>
@@ -7815,7 +7698,7 @@
               <a:tr h="292608">
                 <a:tc>
                   <a:txBody>
-                    <a:bodyPr wrap="square"/>
+                    <a:bodyPr/>
                     <a:lstStyle/>
                     <a:p>
                       <a:pPr algn="l"/>
@@ -7838,7 +7721,7 @@
                 </a:tc>
                 <a:tc>
                   <a:txBody>
-                    <a:bodyPr wrap="square"/>
+                    <a:bodyPr/>
                     <a:lstStyle/>
                     <a:p>
                       <a:pPr algn="l"/>
@@ -7861,7 +7744,7 @@
                 </a:tc>
                 <a:tc>
                   <a:txBody>
-                    <a:bodyPr wrap="square"/>
+                    <a:bodyPr/>
                     <a:lstStyle/>
                     <a:p>
                       <a:pPr algn="l"/>
@@ -7884,7 +7767,7 @@
                 </a:tc>
                 <a:tc>
                   <a:txBody>
-                    <a:bodyPr wrap="square"/>
+                    <a:bodyPr/>
                     <a:lstStyle/>
                     <a:p>
                       <a:pPr algn="l"/>
@@ -7907,7 +7790,7 @@
                 </a:tc>
                 <a:tc>
                   <a:txBody>
-                    <a:bodyPr wrap="square"/>
+                    <a:bodyPr/>
                     <a:lstStyle/>
                     <a:p>
                       <a:pPr algn="l"/>
@@ -7930,7 +7813,7 @@
                 </a:tc>
                 <a:tc>
                   <a:txBody>
-                    <a:bodyPr wrap="square"/>
+                    <a:bodyPr/>
                     <a:lstStyle/>
                     <a:p>
                       <a:pPr algn="l"/>
@@ -7953,7 +7836,7 @@
                 </a:tc>
                 <a:tc>
                   <a:txBody>
-                    <a:bodyPr wrap="square"/>
+                    <a:bodyPr/>
                     <a:lstStyle/>
                     <a:p>
                       <a:pPr algn="l"/>
@@ -7978,7 +7861,7 @@
               <a:tr h="292608">
                 <a:tc>
                   <a:txBody>
-                    <a:bodyPr wrap="square"/>
+                    <a:bodyPr/>
                     <a:lstStyle/>
                     <a:p>
                       <a:pPr algn="l"/>
@@ -8001,18 +7884,18 @@
                 </a:tc>
                 <a:tc>
                   <a:txBody>
-                    <a:bodyPr wrap="square"/>
-                    <a:lstStyle/>
-                    <a:p>
-                      <a:pPr algn="l"/>
-                      <a:r>
-                        <a:rPr sz="1000" b="0">
-                          <a:solidFill>
-                            <a:srgbClr val="1D1B43"/>
-                          </a:solidFill>
-                          <a:latin typeface="Calibri"/>
-                        </a:rPr>
-                        <a:t>SAAM PAULISTA ARTIGO - SAO PAULO / SP</a:t>
+                    <a:bodyPr/>
+                    <a:lstStyle/>
+                    <a:p>
+                      <a:pPr algn="l"/>
+                      <a:r>
+                        <a:rPr sz="1000" b="0">
+                          <a:solidFill>
+                            <a:srgbClr val="1D1B43"/>
+                          </a:solidFill>
+                          <a:latin typeface="Calibri"/>
+                        </a:rPr>
+                        <a:t>SAMSONITE BRASIL LTD - SAO ROQUE / SP</a:t>
                       </a:r>
                     </a:p>
                   </a:txBody>
@@ -8024,7 +7907,7 @@
                 </a:tc>
                 <a:tc>
                   <a:txBody>
-                    <a:bodyPr wrap="square"/>
+                    <a:bodyPr/>
                     <a:lstStyle/>
                     <a:p>
                       <a:pPr algn="l"/>
@@ -8047,7 +7930,7 @@
                 </a:tc>
                 <a:tc>
                   <a:txBody>
-                    <a:bodyPr wrap="square"/>
+                    <a:bodyPr/>
                     <a:lstStyle/>
                     <a:p>
                       <a:pPr algn="l"/>
@@ -8070,7 +7953,7 @@
                 </a:tc>
                 <a:tc>
                   <a:txBody>
-                    <a:bodyPr wrap="square"/>
+                    <a:bodyPr/>
                     <a:lstStyle/>
                     <a:p>
                       <a:pPr algn="l"/>
@@ -8093,7 +7976,7 @@
                 </a:tc>
                 <a:tc>
                   <a:txBody>
-                    <a:bodyPr wrap="square"/>
+                    <a:bodyPr/>
                     <a:lstStyle/>
                     <a:p>
                       <a:pPr algn="l"/>
@@ -8116,7 +7999,7 @@
                 </a:tc>
                 <a:tc>
                   <a:txBody>
-                    <a:bodyPr wrap="square"/>
+                    <a:bodyPr/>
                     <a:lstStyle/>
                     <a:p>
                       <a:pPr algn="l"/>
@@ -8141,7 +8024,7 @@
               <a:tr h="292608">
                 <a:tc>
                   <a:txBody>
-                    <a:bodyPr wrap="square"/>
+                    <a:bodyPr/>
                     <a:lstStyle/>
                     <a:p>
                       <a:pPr algn="l"/>
@@ -8164,18 +8047,18 @@
                 </a:tc>
                 <a:tc>
                   <a:txBody>
-                    <a:bodyPr wrap="square"/>
-                    <a:lstStyle/>
-                    <a:p>
-                      <a:pPr algn="l"/>
-                      <a:r>
-                        <a:rPr sz="1000" b="0">
-                          <a:solidFill>
-                            <a:srgbClr val="1D1B43"/>
-                          </a:solidFill>
-                          <a:latin typeface="Calibri"/>
-                        </a:rPr>
-                        <a:t>SAMSONITE BRASIL LTD - ITUPEVA / SP</a:t>
+                    <a:bodyPr/>
+                    <a:lstStyle/>
+                    <a:p>
+                      <a:pPr algn="l"/>
+                      <a:r>
+                        <a:rPr sz="1000" b="0">
+                          <a:solidFill>
+                            <a:srgbClr val="1D1B43"/>
+                          </a:solidFill>
+                          <a:latin typeface="Calibri"/>
+                        </a:rPr>
+                        <a:t>INTERTRAVEL BRASIL C - SAO JOSE DO RIO PRETO / S</a:t>
                       </a:r>
                     </a:p>
                   </a:txBody>
@@ -8187,7 +8070,7 @@
                 </a:tc>
                 <a:tc>
                   <a:txBody>
-                    <a:bodyPr wrap="square"/>
+                    <a:bodyPr/>
                     <a:lstStyle/>
                     <a:p>
                       <a:pPr algn="l"/>
@@ -8210,7 +8093,7 @@
                 </a:tc>
                 <a:tc>
                   <a:txBody>
-                    <a:bodyPr wrap="square"/>
+                    <a:bodyPr/>
                     <a:lstStyle/>
                     <a:p>
                       <a:pPr algn="l"/>
@@ -8233,7 +8116,7 @@
                 </a:tc>
                 <a:tc>
                   <a:txBody>
-                    <a:bodyPr wrap="square"/>
+                    <a:bodyPr/>
                     <a:lstStyle/>
                     <a:p>
                       <a:pPr algn="l"/>
@@ -8256,7 +8139,7 @@
                 </a:tc>
                 <a:tc>
                   <a:txBody>
-                    <a:bodyPr wrap="square"/>
+                    <a:bodyPr/>
                     <a:lstStyle/>
                     <a:p>
                       <a:pPr algn="l"/>
@@ -8279,7 +8162,7 @@
                 </a:tc>
                 <a:tc>
                   <a:txBody>
-                    <a:bodyPr wrap="square"/>
+                    <a:bodyPr/>
                     <a:lstStyle/>
                     <a:p>
                       <a:pPr algn="l"/>
@@ -8304,7 +8187,7 @@
               <a:tr h="292608">
                 <a:tc>
                   <a:txBody>
-                    <a:bodyPr wrap="square"/>
+                    <a:bodyPr/>
                     <a:lstStyle/>
                     <a:p>
                       <a:pPr algn="l"/>
@@ -8327,18 +8210,18 @@
                 </a:tc>
                 <a:tc>
                   <a:txBody>
-                    <a:bodyPr wrap="square"/>
-                    <a:lstStyle/>
-                    <a:p>
-                      <a:pPr algn="l"/>
-                      <a:r>
-                        <a:rPr sz="1000" b="0">
-                          <a:solidFill>
-                            <a:srgbClr val="1D1B43"/>
-                          </a:solidFill>
-                          <a:latin typeface="Calibri"/>
-                        </a:rPr>
-                        <a:t>INTERTRAVEL BRASIL C - SAO JOSE DO RIO PRETO / S</a:t>
+                    <a:bodyPr/>
+                    <a:lstStyle/>
+                    <a:p>
+                      <a:pPr algn="l"/>
+                      <a:r>
+                        <a:rPr sz="1000" b="0">
+                          <a:solidFill>
+                            <a:srgbClr val="1D1B43"/>
+                          </a:solidFill>
+                          <a:latin typeface="Calibri"/>
+                        </a:rPr>
+                        <a:t>SAMSONITE BRASIL LTD - ITUPEVA / SP</a:t>
                       </a:r>
                     </a:p>
                   </a:txBody>
@@ -8350,18 +8233,18 @@
                 </a:tc>
                 <a:tc>
                   <a:txBody>
-                    <a:bodyPr wrap="square"/>
-                    <a:lstStyle/>
-                    <a:p>
-                      <a:pPr algn="l"/>
-                      <a:r>
-                        <a:rPr sz="1000" b="0">
-                          <a:solidFill>
-                            <a:srgbClr val="1D1B43"/>
-                          </a:solidFill>
-                          <a:latin typeface="Calibri"/>
-                        </a:rPr>
-                        <a:t>6</a:t>
+                    <a:bodyPr/>
+                    <a:lstStyle/>
+                    <a:p>
+                      <a:pPr algn="l"/>
+                      <a:r>
+                        <a:rPr sz="1000" b="0">
+                          <a:solidFill>
+                            <a:srgbClr val="1D1B43"/>
+                          </a:solidFill>
+                          <a:latin typeface="Calibri"/>
+                        </a:rPr>
+                        <a:t>5</a:t>
                       </a:r>
                     </a:p>
                   </a:txBody>
@@ -8373,18 +8256,18 @@
                 </a:tc>
                 <a:tc>
                   <a:txBody>
-                    <a:bodyPr wrap="square"/>
-                    <a:lstStyle/>
-                    <a:p>
-                      <a:pPr algn="l"/>
-                      <a:r>
-                        <a:rPr sz="1000" b="0">
-                          <a:solidFill>
-                            <a:srgbClr val="1D1B43"/>
-                          </a:solidFill>
-                          <a:latin typeface="Calibri"/>
-                        </a:rPr>
-                        <a:t>6</a:t>
+                    <a:bodyPr/>
+                    <a:lstStyle/>
+                    <a:p>
+                      <a:pPr algn="l"/>
+                      <a:r>
+                        <a:rPr sz="1000" b="0">
+                          <a:solidFill>
+                            <a:srgbClr val="1D1B43"/>
+                          </a:solidFill>
+                          <a:latin typeface="Calibri"/>
+                        </a:rPr>
+                        <a:t>5</a:t>
                       </a:r>
                     </a:p>
                   </a:txBody>
@@ -8396,7 +8279,7 @@
                 </a:tc>
                 <a:tc>
                   <a:txBody>
-                    <a:bodyPr wrap="square"/>
+                    <a:bodyPr/>
                     <a:lstStyle/>
                     <a:p>
                       <a:pPr algn="l"/>
@@ -8419,7 +8302,7 @@
                 </a:tc>
                 <a:tc>
                   <a:txBody>
-                    <a:bodyPr wrap="square"/>
+                    <a:bodyPr/>
                     <a:lstStyle/>
                     <a:p>
                       <a:pPr algn="l"/>
@@ -8442,7 +8325,7 @@
                 </a:tc>
                 <a:tc>
                   <a:txBody>
-                    <a:bodyPr wrap="square"/>
+                    <a:bodyPr/>
                     <a:lstStyle/>
                     <a:p>
                       <a:pPr algn="l"/>
@@ -8467,7 +8350,7 @@
               <a:tr h="292608">
                 <a:tc>
                   <a:txBody>
-                    <a:bodyPr wrap="square"/>
+                    <a:bodyPr/>
                     <a:lstStyle/>
                     <a:p>
                       <a:pPr algn="l"/>
@@ -8490,7 +8373,7 @@
                 </a:tc>
                 <a:tc>
                   <a:txBody>
-                    <a:bodyPr wrap="square"/>
+                    <a:bodyPr/>
                     <a:lstStyle/>
                     <a:p>
                       <a:pPr algn="l"/>
@@ -8513,18 +8396,18 @@
                 </a:tc>
                 <a:tc>
                   <a:txBody>
-                    <a:bodyPr wrap="square"/>
-                    <a:lstStyle/>
-                    <a:p>
-                      <a:pPr algn="l"/>
-                      <a:r>
-                        <a:rPr sz="1000" b="0">
-                          <a:solidFill>
-                            <a:srgbClr val="1D1B43"/>
-                          </a:solidFill>
-                          <a:latin typeface="Calibri"/>
-                        </a:rPr>
-                        <a:t>6</a:t>
+                    <a:bodyPr/>
+                    <a:lstStyle/>
+                    <a:p>
+                      <a:pPr algn="l"/>
+                      <a:r>
+                        <a:rPr sz="1000" b="0">
+                          <a:solidFill>
+                            <a:srgbClr val="1D1B43"/>
+                          </a:solidFill>
+                          <a:latin typeface="Calibri"/>
+                        </a:rPr>
+                        <a:t>5</a:t>
                       </a:r>
                     </a:p>
                   </a:txBody>
@@ -8536,18 +8419,18 @@
                 </a:tc>
                 <a:tc>
                   <a:txBody>
-                    <a:bodyPr wrap="square"/>
-                    <a:lstStyle/>
-                    <a:p>
-                      <a:pPr algn="l"/>
-                      <a:r>
-                        <a:rPr sz="1000" b="0">
-                          <a:solidFill>
-                            <a:srgbClr val="1D1B43"/>
-                          </a:solidFill>
-                          <a:latin typeface="Calibri"/>
-                        </a:rPr>
-                        <a:t>6</a:t>
+                    <a:bodyPr/>
+                    <a:lstStyle/>
+                    <a:p>
+                      <a:pPr algn="l"/>
+                      <a:r>
+                        <a:rPr sz="1000" b="0">
+                          <a:solidFill>
+                            <a:srgbClr val="1D1B43"/>
+                          </a:solidFill>
+                          <a:latin typeface="Calibri"/>
+                        </a:rPr>
+                        <a:t>5</a:t>
                       </a:r>
                     </a:p>
                   </a:txBody>
@@ -8559,7 +8442,7 @@
                 </a:tc>
                 <a:tc>
                   <a:txBody>
-                    <a:bodyPr wrap="square"/>
+                    <a:bodyPr/>
                     <a:lstStyle/>
                     <a:p>
                       <a:pPr algn="l"/>
@@ -8582,7 +8465,7 @@
                 </a:tc>
                 <a:tc>
                   <a:txBody>
-                    <a:bodyPr wrap="square"/>
+                    <a:bodyPr/>
                     <a:lstStyle/>
                     <a:p>
                       <a:pPr algn="l"/>
@@ -8605,7 +8488,7 @@
                 </a:tc>
                 <a:tc>
                   <a:txBody>
-                    <a:bodyPr wrap="square"/>
+                    <a:bodyPr/>
                     <a:lstStyle/>
                     <a:p>
                       <a:pPr algn="l"/>
@@ -8630,7 +8513,7 @@
               <a:tr h="292608">
                 <a:tc>
                   <a:txBody>
-                    <a:bodyPr wrap="square"/>
+                    <a:bodyPr/>
                     <a:lstStyle/>
                     <a:p>
                       <a:pPr algn="l"/>
@@ -8653,18 +8536,18 @@
                 </a:tc>
                 <a:tc>
                   <a:txBody>
-                    <a:bodyPr wrap="square"/>
-                    <a:lstStyle/>
-                    <a:p>
-                      <a:pPr algn="l"/>
-                      <a:r>
-                        <a:rPr sz="1000" b="0">
-                          <a:solidFill>
-                            <a:srgbClr val="1D1B43"/>
-                          </a:solidFill>
-                          <a:latin typeface="Calibri"/>
-                        </a:rPr>
-                        <a:t>SAMSONITE BRASIL LTD - SAO ROQUE / SP</a:t>
+                    <a:bodyPr/>
+                    <a:lstStyle/>
+                    <a:p>
+                      <a:pPr algn="l"/>
+                      <a:r>
+                        <a:rPr sz="1000" b="0">
+                          <a:solidFill>
+                            <a:srgbClr val="1D1B43"/>
+                          </a:solidFill>
+                          <a:latin typeface="Calibri"/>
+                        </a:rPr>
+                        <a:t>SAMITT JARDIM ARTIGO - SAO PAULO / SP</a:t>
                       </a:r>
                     </a:p>
                   </a:txBody>
@@ -8676,18 +8559,18 @@
                 </a:tc>
                 <a:tc>
                   <a:txBody>
-                    <a:bodyPr wrap="square"/>
-                    <a:lstStyle/>
-                    <a:p>
-                      <a:pPr algn="l"/>
-                      <a:r>
-                        <a:rPr sz="1000" b="0">
-                          <a:solidFill>
-                            <a:srgbClr val="1D1B43"/>
-                          </a:solidFill>
-                          <a:latin typeface="Calibri"/>
-                        </a:rPr>
-                        <a:t>6</a:t>
+                    <a:bodyPr/>
+                    <a:lstStyle/>
+                    <a:p>
+                      <a:pPr algn="l"/>
+                      <a:r>
+                        <a:rPr sz="1000" b="0">
+                          <a:solidFill>
+                            <a:srgbClr val="1D1B43"/>
+                          </a:solidFill>
+                          <a:latin typeface="Calibri"/>
+                        </a:rPr>
+                        <a:t>5</a:t>
                       </a:r>
                     </a:p>
                   </a:txBody>
@@ -8699,18 +8582,18 @@
                 </a:tc>
                 <a:tc>
                   <a:txBody>
-                    <a:bodyPr wrap="square"/>
-                    <a:lstStyle/>
-                    <a:p>
-                      <a:pPr algn="l"/>
-                      <a:r>
-                        <a:rPr sz="1000" b="0">
-                          <a:solidFill>
-                            <a:srgbClr val="1D1B43"/>
-                          </a:solidFill>
-                          <a:latin typeface="Calibri"/>
-                        </a:rPr>
-                        <a:t>6</a:t>
+                    <a:bodyPr/>
+                    <a:lstStyle/>
+                    <a:p>
+                      <a:pPr algn="l"/>
+                      <a:r>
+                        <a:rPr sz="1000" b="0">
+                          <a:solidFill>
+                            <a:srgbClr val="1D1B43"/>
+                          </a:solidFill>
+                          <a:latin typeface="Calibri"/>
+                        </a:rPr>
+                        <a:t>5</a:t>
                       </a:r>
                     </a:p>
                   </a:txBody>
@@ -8722,7 +8605,7 @@
                 </a:tc>
                 <a:tc>
                   <a:txBody>
-                    <a:bodyPr wrap="square"/>
+                    <a:bodyPr/>
                     <a:lstStyle/>
                     <a:p>
                       <a:pPr algn="l"/>
@@ -8745,7 +8628,7 @@
                 </a:tc>
                 <a:tc>
                   <a:txBody>
-                    <a:bodyPr wrap="square"/>
+                    <a:bodyPr/>
                     <a:lstStyle/>
                     <a:p>
                       <a:pPr algn="l"/>
@@ -8768,7 +8651,7 @@
                 </a:tc>
                 <a:tc>
                   <a:txBody>
-                    <a:bodyPr wrap="square"/>
+                    <a:bodyPr/>
                     <a:lstStyle/>
                     <a:p>
                       <a:pPr algn="l"/>
@@ -8793,7 +8676,7 @@
               <a:tr h="292608">
                 <a:tc>
                   <a:txBody>
-                    <a:bodyPr wrap="square"/>
+                    <a:bodyPr/>
                     <a:lstStyle/>
                     <a:p>
                       <a:pPr algn="l"/>
@@ -8816,18 +8699,18 @@
                 </a:tc>
                 <a:tc>
                   <a:txBody>
-                    <a:bodyPr wrap="square"/>
-                    <a:lstStyle/>
-                    <a:p>
-                      <a:pPr algn="l"/>
-                      <a:r>
-                        <a:rPr sz="1000" b="0">
-                          <a:solidFill>
-                            <a:srgbClr val="1D1B43"/>
-                          </a:solidFill>
-                          <a:latin typeface="Calibri"/>
-                        </a:rPr>
-                        <a:t>SAMITT JARDIM ARTIGO - SAO PAULO / SP</a:t>
+                    <a:bodyPr/>
+                    <a:lstStyle/>
+                    <a:p>
+                      <a:pPr algn="l"/>
+                      <a:r>
+                        <a:rPr sz="1000" b="0">
+                          <a:solidFill>
+                            <a:srgbClr val="1D1B43"/>
+                          </a:solidFill>
+                          <a:latin typeface="Calibri"/>
+                        </a:rPr>
+                        <a:t>SAS NORTE ARTIGOS DE - SAO PAULO / SP</a:t>
                       </a:r>
                     </a:p>
                   </a:txBody>
@@ -8839,18 +8722,18 @@
                 </a:tc>
                 <a:tc>
                   <a:txBody>
-                    <a:bodyPr wrap="square"/>
-                    <a:lstStyle/>
-                    <a:p>
-                      <a:pPr algn="l"/>
-                      <a:r>
-                        <a:rPr sz="1000" b="0">
-                          <a:solidFill>
-                            <a:srgbClr val="1D1B43"/>
-                          </a:solidFill>
-                          <a:latin typeface="Calibri"/>
-                        </a:rPr>
-                        <a:t>6</a:t>
+                    <a:bodyPr/>
+                    <a:lstStyle/>
+                    <a:p>
+                      <a:pPr algn="l"/>
+                      <a:r>
+                        <a:rPr sz="1000" b="0">
+                          <a:solidFill>
+                            <a:srgbClr val="1D1B43"/>
+                          </a:solidFill>
+                          <a:latin typeface="Calibri"/>
+                        </a:rPr>
+                        <a:t>5</a:t>
                       </a:r>
                     </a:p>
                   </a:txBody>
@@ -8862,18 +8745,18 @@
                 </a:tc>
                 <a:tc>
                   <a:txBody>
-                    <a:bodyPr wrap="square"/>
-                    <a:lstStyle/>
-                    <a:p>
-                      <a:pPr algn="l"/>
-                      <a:r>
-                        <a:rPr sz="1000" b="0">
-                          <a:solidFill>
-                            <a:srgbClr val="1D1B43"/>
-                          </a:solidFill>
-                          <a:latin typeface="Calibri"/>
-                        </a:rPr>
-                        <a:t>6</a:t>
+                    <a:bodyPr/>
+                    <a:lstStyle/>
+                    <a:p>
+                      <a:pPr algn="l"/>
+                      <a:r>
+                        <a:rPr sz="1000" b="0">
+                          <a:solidFill>
+                            <a:srgbClr val="1D1B43"/>
+                          </a:solidFill>
+                          <a:latin typeface="Calibri"/>
+                        </a:rPr>
+                        <a:t>5</a:t>
                       </a:r>
                     </a:p>
                   </a:txBody>
@@ -8885,7 +8768,7 @@
                 </a:tc>
                 <a:tc>
                   <a:txBody>
-                    <a:bodyPr wrap="square"/>
+                    <a:bodyPr/>
                     <a:lstStyle/>
                     <a:p>
                       <a:pPr algn="l"/>
@@ -8908,7 +8791,7 @@
                 </a:tc>
                 <a:tc>
                   <a:txBody>
-                    <a:bodyPr wrap="square"/>
+                    <a:bodyPr/>
                     <a:lstStyle/>
                     <a:p>
                       <a:pPr algn="l"/>
@@ -8931,7 +8814,7 @@
                 </a:tc>
                 <a:tc>
                   <a:txBody>
-                    <a:bodyPr wrap="square"/>
+                    <a:bodyPr/>
                     <a:lstStyle/>
                     <a:p>
                       <a:pPr algn="l"/>
@@ -8956,7 +8839,7 @@
               <a:tr h="292608">
                 <a:tc>
                   <a:txBody>
-                    <a:bodyPr wrap="square"/>
+                    <a:bodyPr/>
                     <a:lstStyle/>
                     <a:p>
                       <a:pPr algn="l"/>
@@ -8979,7 +8862,7 @@
                 </a:tc>
                 <a:tc>
                   <a:txBody>
-                    <a:bodyPr wrap="square"/>
+                    <a:bodyPr/>
                     <a:lstStyle/>
                     <a:p>
                       <a:pPr algn="l"/>
@@ -9002,7 +8885,7 @@
                 </a:tc>
                 <a:tc>
                   <a:txBody>
-                    <a:bodyPr wrap="square"/>
+                    <a:bodyPr/>
                     <a:lstStyle/>
                     <a:p>
                       <a:pPr algn="l"/>
@@ -9025,7 +8908,7 @@
                 </a:tc>
                 <a:tc>
                   <a:txBody>
-                    <a:bodyPr wrap="square"/>
+                    <a:bodyPr/>
                     <a:lstStyle/>
                     <a:p>
                       <a:pPr algn="l"/>
@@ -9048,7 +8931,7 @@
                 </a:tc>
                 <a:tc>
                   <a:txBody>
-                    <a:bodyPr wrap="square"/>
+                    <a:bodyPr/>
                     <a:lstStyle/>
                     <a:p>
                       <a:pPr algn="l"/>
@@ -9071,7 +8954,7 @@
                 </a:tc>
                 <a:tc>
                   <a:txBody>
-                    <a:bodyPr wrap="square"/>
+                    <a:bodyPr/>
                     <a:lstStyle/>
                     <a:p>
                       <a:pPr algn="l"/>
@@ -9094,7 +8977,7 @@
                 </a:tc>
                 <a:tc>
                   <a:txBody>
-                    <a:bodyPr wrap="square"/>
+                    <a:bodyPr/>
                     <a:lstStyle/>
                     <a:p>
                       <a:pPr algn="l"/>
@@ -9119,7 +9002,7 @@
               <a:tr h="292608">
                 <a:tc>
                   <a:txBody>
-                    <a:bodyPr wrap="square"/>
+                    <a:bodyPr/>
                     <a:lstStyle/>
                     <a:p>
                       <a:pPr algn="l"/>
@@ -9142,18 +9025,18 @@
                 </a:tc>
                 <a:tc>
                   <a:txBody>
-                    <a:bodyPr wrap="square"/>
-                    <a:lstStyle/>
-                    <a:p>
-                      <a:pPr algn="l"/>
-                      <a:r>
-                        <a:rPr sz="1000" b="0">
-                          <a:solidFill>
-                            <a:srgbClr val="1D1B43"/>
-                          </a:solidFill>
-                          <a:latin typeface="Calibri"/>
-                        </a:rPr>
-                        <a:t>SAS NORTE ARTIGOS DE - SAO PAULO / SP</a:t>
+                    <a:bodyPr/>
+                    <a:lstStyle/>
+                    <a:p>
+                      <a:pPr algn="l"/>
+                      <a:r>
+                        <a:rPr sz="1000" b="0">
+                          <a:solidFill>
+                            <a:srgbClr val="1D1B43"/>
+                          </a:solidFill>
+                          <a:latin typeface="Calibri"/>
+                        </a:rPr>
+                        <a:t>SAAM PAULISTA ARTIGO - SAO PAULO / SP</a:t>
                       </a:r>
                     </a:p>
                   </a:txBody>
@@ -9165,7 +9048,7 @@
                 </a:tc>
                 <a:tc>
                   <a:txBody>
-                    <a:bodyPr wrap="square"/>
+                    <a:bodyPr/>
                     <a:lstStyle/>
                     <a:p>
                       <a:pPr algn="l"/>
@@ -9188,7 +9071,7 @@
                 </a:tc>
                 <a:tc>
                   <a:txBody>
-                    <a:bodyPr wrap="square"/>
+                    <a:bodyPr/>
                     <a:lstStyle/>
                     <a:p>
                       <a:pPr algn="l"/>
@@ -9211,7 +9094,7 @@
                 </a:tc>
                 <a:tc>
                   <a:txBody>
-                    <a:bodyPr wrap="square"/>
+                    <a:bodyPr/>
                     <a:lstStyle/>
                     <a:p>
                       <a:pPr algn="l"/>
@@ -9234,7 +9117,7 @@
                 </a:tc>
                 <a:tc>
                   <a:txBody>
-                    <a:bodyPr wrap="square"/>
+                    <a:bodyPr/>
                     <a:lstStyle/>
                     <a:p>
                       <a:pPr algn="l"/>
@@ -9257,7 +9140,7 @@
                 </a:tc>
                 <a:tc>
                   <a:txBody>
-                    <a:bodyPr wrap="square"/>
+                    <a:bodyPr/>
                     <a:lstStyle/>
                     <a:p>
                       <a:pPr algn="l"/>
@@ -9282,7 +9165,7 @@
               <a:tr h="292608">
                 <a:tc>
                   <a:txBody>
-                    <a:bodyPr wrap="square"/>
+                    <a:bodyPr/>
                     <a:lstStyle/>
                     <a:p>
                       <a:pPr algn="l"/>
@@ -9305,7 +9188,7 @@
                 </a:tc>
                 <a:tc>
                   <a:txBody>
-                    <a:bodyPr wrap="square"/>
+                    <a:bodyPr/>
                     <a:lstStyle/>
                     <a:p>
                       <a:pPr algn="l"/>
@@ -9328,7 +9211,7 @@
                 </a:tc>
                 <a:tc>
                   <a:txBody>
-                    <a:bodyPr wrap="square"/>
+                    <a:bodyPr/>
                     <a:lstStyle/>
                     <a:p>
                       <a:pPr algn="l"/>
@@ -9351,7 +9234,7 @@
                 </a:tc>
                 <a:tc>
                   <a:txBody>
-                    <a:bodyPr wrap="square"/>
+                    <a:bodyPr/>
                     <a:lstStyle/>
                     <a:p>
                       <a:pPr algn="l"/>
@@ -9374,7 +9257,7 @@
                 </a:tc>
                 <a:tc>
                   <a:txBody>
-                    <a:bodyPr wrap="square"/>
+                    <a:bodyPr/>
                     <a:lstStyle/>
                     <a:p>
                       <a:pPr algn="l"/>
@@ -9397,7 +9280,7 @@
                 </a:tc>
                 <a:tc>
                   <a:txBody>
-                    <a:bodyPr wrap="square"/>
+                    <a:bodyPr/>
                     <a:lstStyle/>
                     <a:p>
                       <a:pPr algn="l"/>
@@ -9420,7 +9303,7 @@
                 </a:tc>
                 <a:tc>
                   <a:txBody>
-                    <a:bodyPr wrap="square"/>
+                    <a:bodyPr/>
                     <a:lstStyle/>
                     <a:p>
                       <a:pPr algn="l"/>

--- a/SAMSONITE_BRASIL_LTDA.pptx
+++ b/SAMSONITE_BRASIL_LTDA.pptx
@@ -147,10 +147,10 @@
               <c:strCache>
                 <c:ptCount val="2"/>
                 <c:pt idx="0">
-                  <c:v>Marco 2026</c:v>
+                  <c:v>Abril 2026</c:v>
                 </c:pt>
                 <c:pt idx="1">
-                  <c:v>Abril 2026</c:v>
+                  <c:v>Maio 2026</c:v>
                 </c:pt>
               </c:strCache>
             </c:strRef>
@@ -162,10 +162,10 @@
                 <c:formatCode>General</c:formatCode>
                 <c:ptCount val="2"/>
                 <c:pt idx="0">
-                  <c:v>0</c:v>
+                  <c:v>243</c:v>
                 </c:pt>
                 <c:pt idx="1">
-                  <c:v>238</c:v>
+                  <c:v>185</c:v>
                 </c:pt>
               </c:numCache>
             </c:numRef>
@@ -196,10 +196,10 @@
               <c:strCache>
                 <c:ptCount val="2"/>
                 <c:pt idx="0">
-                  <c:v>Marco 2026</c:v>
+                  <c:v>Abril 2026</c:v>
                 </c:pt>
                 <c:pt idx="1">
-                  <c:v>Abril 2026</c:v>
+                  <c:v>Maio 2026</c:v>
                 </c:pt>
               </c:strCache>
             </c:strRef>
@@ -211,10 +211,10 @@
                 <c:formatCode>General</c:formatCode>
                 <c:ptCount val="2"/>
                 <c:pt idx="0">
-                  <c:v>0</c:v>
+                  <c:v>3</c:v>
                 </c:pt>
                 <c:pt idx="1">
-                  <c:v>1</c:v>
+                  <c:v>4</c:v>
                 </c:pt>
               </c:numCache>
             </c:numRef>
@@ -3387,7 +3387,7 @@
                 </a:solidFill>
                 <a:latin typeface="Calibri"/>
               </a:rPr>
-              <a:t>INDICADORES ABRIL 2026</a:t>
+              <a:t>INDICADORES MAIO 2026</a:t>
             </a:r>
           </a:p>
         </p:txBody>
@@ -3709,7 +3709,7 @@
                 </a:solidFill>
                 <a:latin typeface="Calibri"/>
               </a:rPr>
-              <a:t>239</a:t>
+              <a:t>189</a:t>
             </a:r>
           </a:p>
         </p:txBody>
@@ -3824,7 +3824,7 @@
                 </a:solidFill>
                 <a:latin typeface="Calibri"/>
               </a:rPr>
-              <a:t>238</a:t>
+              <a:t>185</a:t>
             </a:r>
           </a:p>
         </p:txBody>
@@ -3939,7 +3939,7 @@
                 </a:solidFill>
                 <a:latin typeface="Calibri"/>
               </a:rPr>
-              <a:t>1</a:t>
+              <a:t>4</a:t>
             </a:r>
           </a:p>
         </p:txBody>
@@ -4054,7 +4054,7 @@
                 </a:solidFill>
                 <a:latin typeface="Calibri"/>
               </a:rPr>
-              <a:t>99.6%</a:t>
+              <a:t>97.9%</a:t>
             </a:r>
           </a:p>
         </p:txBody>
@@ -4155,7 +4155,7 @@
                           </a:solidFill>
                           <a:latin typeface="Calibri"/>
                         </a:rPr>
-                        <a:t>Marco 2026</a:t>
+                        <a:t>Abril 2026</a:t>
                       </a:r>
                     </a:p>
                   </a:txBody>
@@ -4178,7 +4178,7 @@
                           </a:solidFill>
                           <a:latin typeface="Calibri"/>
                         </a:rPr>
-                        <a:t>Abril 2026</a:t>
+                        <a:t>Maio 2026</a:t>
                       </a:r>
                     </a:p>
                   </a:txBody>
@@ -4249,7 +4249,7 @@
                           </a:solidFill>
                           <a:latin typeface="Calibri"/>
                         </a:rPr>
-                        <a:t>0</a:t>
+                        <a:t>246</a:t>
                       </a:r>
                     </a:p>
                   </a:txBody>
@@ -4272,7 +4272,7 @@
                           </a:solidFill>
                           <a:latin typeface="Calibri"/>
                         </a:rPr>
-                        <a:t>239</a:t>
+                        <a:t>189</a:t>
                       </a:r>
                     </a:p>
                   </a:txBody>
@@ -4295,7 +4295,7 @@
                           </a:solidFill>
                           <a:latin typeface="Calibri"/>
                         </a:rPr>
-                        <a:t>+ 239</a:t>
+                        <a:t>- 57</a:t>
                       </a:r>
                     </a:p>
                   </a:txBody>
@@ -4343,7 +4343,7 @@
                           </a:solidFill>
                           <a:latin typeface="Calibri"/>
                         </a:rPr>
-                        <a:t>0</a:t>
+                        <a:t>243</a:t>
                       </a:r>
                     </a:p>
                   </a:txBody>
@@ -4366,7 +4366,7 @@
                           </a:solidFill>
                           <a:latin typeface="Calibri"/>
                         </a:rPr>
-                        <a:t>238</a:t>
+                        <a:t>185</a:t>
                       </a:r>
                     </a:p>
                   </a:txBody>
@@ -4389,7 +4389,7 @@
                           </a:solidFill>
                           <a:latin typeface="Calibri"/>
                         </a:rPr>
-                        <a:t>+ 238</a:t>
+                        <a:t>- 58</a:t>
                       </a:r>
                     </a:p>
                   </a:txBody>
@@ -4437,7 +4437,7 @@
                           </a:solidFill>
                           <a:latin typeface="Calibri"/>
                         </a:rPr>
-                        <a:t>0</a:t>
+                        <a:t>3</a:t>
                       </a:r>
                     </a:p>
                   </a:txBody>
@@ -4460,7 +4460,7 @@
                           </a:solidFill>
                           <a:latin typeface="Calibri"/>
                         </a:rPr>
-                        <a:t>1</a:t>
+                        <a:t>4</a:t>
                       </a:r>
                     </a:p>
                   </a:txBody>
@@ -4531,7 +4531,7 @@
                           </a:solidFill>
                           <a:latin typeface="Calibri"/>
                         </a:rPr>
-                        <a:t>99.6%</a:t>
+                        <a:t>98.8%</a:t>
                       </a:r>
                     </a:p>
                   </a:txBody>
@@ -4554,7 +4554,7 @@
                           </a:solidFill>
                           <a:latin typeface="Calibri"/>
                         </a:rPr>
-                        <a:t>99.6%</a:t>
+                        <a:t>97.9%</a:t>
                       </a:r>
                     </a:p>
                   </a:txBody>
@@ -4577,7 +4577,7 @@
                           </a:solidFill>
                           <a:latin typeface="Calibri"/>
                         </a:rPr>
-                        <a:t>+ 0.0pp</a:t>
+                        <a:t>- 0.9pp</a:t>
                       </a:r>
                     </a:p>
                   </a:txBody>
@@ -4894,7 +4894,7 @@
                           </a:solidFill>
                           <a:latin typeface="Calibri"/>
                         </a:rPr>
-                        <a:t>Marco 2026</a:t>
+                        <a:t>Abril 2026</a:t>
                       </a:r>
                     </a:p>
                   </a:txBody>
@@ -4917,7 +4917,7 @@
                           </a:solidFill>
                           <a:latin typeface="Calibri"/>
                         </a:rPr>
-                        <a:t>0</a:t>
+                        <a:t>246</a:t>
                       </a:r>
                     </a:p>
                   </a:txBody>
@@ -4940,7 +4940,7 @@
                           </a:solidFill>
                           <a:latin typeface="Calibri"/>
                         </a:rPr>
-                        <a:t>0</a:t>
+                        <a:t>243</a:t>
                       </a:r>
                     </a:p>
                   </a:txBody>
@@ -4963,7 +4963,7 @@
                           </a:solidFill>
                           <a:latin typeface="Calibri"/>
                         </a:rPr>
-                        <a:t>0</a:t>
+                        <a:t>3</a:t>
                       </a:r>
                     </a:p>
                   </a:txBody>
@@ -4986,7 +4986,7 @@
                           </a:solidFill>
                           <a:latin typeface="Calibri"/>
                         </a:rPr>
-                        <a:t>99.6%</a:t>
+                        <a:t>98.8%</a:t>
                       </a:r>
                     </a:p>
                   </a:txBody>
@@ -5011,7 +5011,7 @@
                           </a:solidFill>
                           <a:latin typeface="Calibri"/>
                         </a:rPr>
-                        <a:t>Abril 2026</a:t>
+                        <a:t>Maio 2026</a:t>
                       </a:r>
                     </a:p>
                   </a:txBody>
@@ -5034,7 +5034,7 @@
                           </a:solidFill>
                           <a:latin typeface="Calibri"/>
                         </a:rPr>
-                        <a:t>239</a:t>
+                        <a:t>189</a:t>
                       </a:r>
                     </a:p>
                   </a:txBody>
@@ -5057,7 +5057,7 @@
                           </a:solidFill>
                           <a:latin typeface="Calibri"/>
                         </a:rPr>
-                        <a:t>238</a:t>
+                        <a:t>185</a:t>
                       </a:r>
                     </a:p>
                   </a:txBody>
@@ -5080,7 +5080,7 @@
                           </a:solidFill>
                           <a:latin typeface="Calibri"/>
                         </a:rPr>
-                        <a:t>1</a:t>
+                        <a:t>4</a:t>
                       </a:r>
                     </a:p>
                   </a:txBody>
@@ -5103,7 +5103,7 @@
                           </a:solidFill>
                           <a:latin typeface="Calibri"/>
                         </a:rPr>
-                        <a:t>99.6%</a:t>
+                        <a:t>97.9%</a:t>
                       </a:r>
                     </a:p>
                   </a:txBody>
@@ -5191,7 +5191,7 @@
                 </a:solidFill>
                 <a:latin typeface="Calibri"/>
               </a:rPr>
-              <a:t>PERFORMANCE: 99.6% - EXCELENTE</a:t>
+              <a:t>PERFORMANCE: 97.9% - EXCELENTE</a:t>
             </a:r>
           </a:p>
         </p:txBody>
@@ -5276,7 +5276,7 @@
                 </a:solidFill>
                 <a:latin typeface="Calibri"/>
               </a:rPr>
-              <a:t>OCORRENCIAS FORA DO PRAZO (1)</a:t>
+              <a:t>OCORRENCIAS FORA DO PRAZO (4)</a:t>
             </a:r>
           </a:p>
         </p:txBody>
@@ -5334,7 +5334,7 @@
         </p:nvGraphicFramePr>
         <p:xfrm>
           <a:off x="457200" y="1828800"/>
-          <a:ext cx="11429999" cy="768096"/>
+          <a:ext cx="11429999" cy="1920240"/>
         </p:xfrm>
         <a:graphic>
           <a:graphicData uri="http://schemas.openxmlformats.org/drawingml/2006/table">
@@ -5480,7 +5480,7 @@
                           </a:solidFill>
                           <a:latin typeface="Calibri"/>
                         </a:rPr>
-                        <a:t>281066</a:t>
+                        <a:t>281740</a:t>
                       </a:r>
                     </a:p>
                   </a:txBody>
@@ -5503,7 +5503,7 @@
                           </a:solidFill>
                           <a:latin typeface="Calibri"/>
                         </a:rPr>
-                        <a:t>EBAZAR.COM.BR. LTDA - CAJAMAR / SP</a:t>
+                        <a:t>RMS SOLUTIONS LTDA R - OSASCO / SP</a:t>
                       </a:r>
                     </a:p>
                   </a:txBody>
@@ -5526,7 +5526,7 @@
                           </a:solidFill>
                           <a:latin typeface="Calibri"/>
                         </a:rPr>
-                        <a:t>CAJAMAR/SP</a:t>
+                        <a:t>OSASCO/SP</a:t>
                       </a:r>
                     </a:p>
                   </a:txBody>
@@ -5549,7 +5549,7 @@
                           </a:solidFill>
                           <a:latin typeface="Calibri"/>
                         </a:rPr>
-                        <a:t>30/04/2026</a:t>
+                        <a:t>07/05/2026</a:t>
                       </a:r>
                     </a:p>
                   </a:txBody>
@@ -5579,6 +5579,357 @@
                   <a:tcPr>
                     <a:solidFill>
                       <a:srgbClr val="FFFFFF"/>
+                    </a:solidFill>
+                  </a:tcPr>
+                </a:tc>
+              </a:tr>
+              <a:tr h="384048">
+                <a:tc>
+                  <a:txBody>
+                    <a:bodyPr/>
+                    <a:lstStyle/>
+                    <a:p>
+                      <a:pPr algn="l"/>
+                      <a:r>
+                        <a:rPr sz="1000" b="0">
+                          <a:solidFill>
+                            <a:srgbClr val="1D1B43"/>
+                          </a:solidFill>
+                          <a:latin typeface="Calibri"/>
+                        </a:rPr>
+                        <a:t>281959</a:t>
+                      </a:r>
+                    </a:p>
+                  </a:txBody>
+                  <a:tcPr>
+                    <a:solidFill>
+                      <a:srgbClr val="F2F2F2"/>
+                    </a:solidFill>
+                  </a:tcPr>
+                </a:tc>
+                <a:tc>
+                  <a:txBody>
+                    <a:bodyPr/>
+                    <a:lstStyle/>
+                    <a:p>
+                      <a:pPr algn="l"/>
+                      <a:r>
+                        <a:rPr sz="1000" b="0">
+                          <a:solidFill>
+                            <a:srgbClr val="1D1B43"/>
+                          </a:solidFill>
+                          <a:latin typeface="Calibri"/>
+                        </a:rPr>
+                        <a:t>SAMSONITE BRASIL LTD - SAO PAULO / SP</a:t>
+                      </a:r>
+                    </a:p>
+                  </a:txBody>
+                  <a:tcPr>
+                    <a:solidFill>
+                      <a:srgbClr val="F2F2F2"/>
+                    </a:solidFill>
+                  </a:tcPr>
+                </a:tc>
+                <a:tc>
+                  <a:txBody>
+                    <a:bodyPr/>
+                    <a:lstStyle/>
+                    <a:p>
+                      <a:pPr algn="l"/>
+                      <a:r>
+                        <a:rPr sz="1000" b="0">
+                          <a:solidFill>
+                            <a:srgbClr val="1D1B43"/>
+                          </a:solidFill>
+                          <a:latin typeface="Calibri"/>
+                        </a:rPr>
+                        <a:t>SAO PAULO/SP</a:t>
+                      </a:r>
+                    </a:p>
+                  </a:txBody>
+                  <a:tcPr>
+                    <a:solidFill>
+                      <a:srgbClr val="F2F2F2"/>
+                    </a:solidFill>
+                  </a:tcPr>
+                </a:tc>
+                <a:tc>
+                  <a:txBody>
+                    <a:bodyPr/>
+                    <a:lstStyle/>
+                    <a:p>
+                      <a:pPr algn="l"/>
+                      <a:r>
+                        <a:rPr sz="1000" b="0">
+                          <a:solidFill>
+                            <a:srgbClr val="1D1B43"/>
+                          </a:solidFill>
+                          <a:latin typeface="Calibri"/>
+                        </a:rPr>
+                        <a:t>09/05/2026</a:t>
+                      </a:r>
+                    </a:p>
+                  </a:txBody>
+                  <a:tcPr>
+                    <a:solidFill>
+                      <a:srgbClr val="F2F2F2"/>
+                    </a:solidFill>
+                  </a:tcPr>
+                </a:tc>
+                <a:tc>
+                  <a:txBody>
+                    <a:bodyPr/>
+                    <a:lstStyle/>
+                    <a:p>
+                      <a:pPr algn="l"/>
+                      <a:r>
+                        <a:rPr sz="1000" b="0">
+                          <a:solidFill>
+                            <a:srgbClr val="1D1B43"/>
+                          </a:solidFill>
+                          <a:latin typeface="Calibri"/>
+                        </a:rPr>
+                        <a:t>ENTREGUE FORA DO PRAZO</a:t>
+                      </a:r>
+                    </a:p>
+                  </a:txBody>
+                  <a:tcPr>
+                    <a:solidFill>
+                      <a:srgbClr val="F2F2F2"/>
+                    </a:solidFill>
+                  </a:tcPr>
+                </a:tc>
+              </a:tr>
+              <a:tr h="384048">
+                <a:tc>
+                  <a:txBody>
+                    <a:bodyPr/>
+                    <a:lstStyle/>
+                    <a:p>
+                      <a:pPr algn="l"/>
+                      <a:r>
+                        <a:rPr sz="1000" b="0">
+                          <a:solidFill>
+                            <a:srgbClr val="1D1B43"/>
+                          </a:solidFill>
+                          <a:latin typeface="Calibri"/>
+                        </a:rPr>
+                        <a:t>282630</a:t>
+                      </a:r>
+                    </a:p>
+                  </a:txBody>
+                  <a:tcPr>
+                    <a:solidFill>
+                      <a:srgbClr val="FFFFFF"/>
+                    </a:solidFill>
+                  </a:tcPr>
+                </a:tc>
+                <a:tc>
+                  <a:txBody>
+                    <a:bodyPr/>
+                    <a:lstStyle/>
+                    <a:p>
+                      <a:pPr algn="l"/>
+                      <a:r>
+                        <a:rPr sz="1000" b="0">
+                          <a:solidFill>
+                            <a:srgbClr val="1D1B43"/>
+                          </a:solidFill>
+                          <a:latin typeface="Calibri"/>
+                        </a:rPr>
+                        <a:t>SAMSONITE BRASIL LTD - SAO PAULO / SP</a:t>
+                      </a:r>
+                    </a:p>
+                  </a:txBody>
+                  <a:tcPr>
+                    <a:solidFill>
+                      <a:srgbClr val="FFFFFF"/>
+                    </a:solidFill>
+                  </a:tcPr>
+                </a:tc>
+                <a:tc>
+                  <a:txBody>
+                    <a:bodyPr/>
+                    <a:lstStyle/>
+                    <a:p>
+                      <a:pPr algn="l"/>
+                      <a:r>
+                        <a:rPr sz="1000" b="0">
+                          <a:solidFill>
+                            <a:srgbClr val="1D1B43"/>
+                          </a:solidFill>
+                          <a:latin typeface="Calibri"/>
+                        </a:rPr>
+                        <a:t>SAO PAULO/SP</a:t>
+                      </a:r>
+                    </a:p>
+                  </a:txBody>
+                  <a:tcPr>
+                    <a:solidFill>
+                      <a:srgbClr val="FFFFFF"/>
+                    </a:solidFill>
+                  </a:tcPr>
+                </a:tc>
+                <a:tc>
+                  <a:txBody>
+                    <a:bodyPr/>
+                    <a:lstStyle/>
+                    <a:p>
+                      <a:pPr algn="l"/>
+                      <a:r>
+                        <a:rPr sz="1000" b="0">
+                          <a:solidFill>
+                            <a:srgbClr val="1D1B43"/>
+                          </a:solidFill>
+                          <a:latin typeface="Calibri"/>
+                        </a:rPr>
+                        <a:t>14/05/2026</a:t>
+                      </a:r>
+                    </a:p>
+                  </a:txBody>
+                  <a:tcPr>
+                    <a:solidFill>
+                      <a:srgbClr val="FFFFFF"/>
+                    </a:solidFill>
+                  </a:tcPr>
+                </a:tc>
+                <a:tc>
+                  <a:txBody>
+                    <a:bodyPr/>
+                    <a:lstStyle/>
+                    <a:p>
+                      <a:pPr algn="l"/>
+                      <a:r>
+                        <a:rPr sz="1000" b="0">
+                          <a:solidFill>
+                            <a:srgbClr val="1D1B43"/>
+                          </a:solidFill>
+                          <a:latin typeface="Calibri"/>
+                        </a:rPr>
+                        <a:t>ENTREGUE FORA DO PRAZO</a:t>
+                      </a:r>
+                    </a:p>
+                  </a:txBody>
+                  <a:tcPr>
+                    <a:solidFill>
+                      <a:srgbClr val="FFFFFF"/>
+                    </a:solidFill>
+                  </a:tcPr>
+                </a:tc>
+              </a:tr>
+              <a:tr h="384048">
+                <a:tc>
+                  <a:txBody>
+                    <a:bodyPr/>
+                    <a:lstStyle/>
+                    <a:p>
+                      <a:pPr algn="l"/>
+                      <a:r>
+                        <a:rPr sz="1000" b="0">
+                          <a:solidFill>
+                            <a:srgbClr val="1D1B43"/>
+                          </a:solidFill>
+                          <a:latin typeface="Calibri"/>
+                        </a:rPr>
+                        <a:t>282635</a:t>
+                      </a:r>
+                    </a:p>
+                  </a:txBody>
+                  <a:tcPr>
+                    <a:solidFill>
+                      <a:srgbClr val="F2F2F2"/>
+                    </a:solidFill>
+                  </a:tcPr>
+                </a:tc>
+                <a:tc>
+                  <a:txBody>
+                    <a:bodyPr/>
+                    <a:lstStyle/>
+                    <a:p>
+                      <a:pPr algn="l"/>
+                      <a:r>
+                        <a:rPr sz="1000" b="0">
+                          <a:solidFill>
+                            <a:srgbClr val="1D1B43"/>
+                          </a:solidFill>
+                          <a:latin typeface="Calibri"/>
+                        </a:rPr>
+                        <a:t>SAMSONITE BRASIL LTD - SAO PAULO / SP</a:t>
+                      </a:r>
+                    </a:p>
+                  </a:txBody>
+                  <a:tcPr>
+                    <a:solidFill>
+                      <a:srgbClr val="F2F2F2"/>
+                    </a:solidFill>
+                  </a:tcPr>
+                </a:tc>
+                <a:tc>
+                  <a:txBody>
+                    <a:bodyPr/>
+                    <a:lstStyle/>
+                    <a:p>
+                      <a:pPr algn="l"/>
+                      <a:r>
+                        <a:rPr sz="1000" b="0">
+                          <a:solidFill>
+                            <a:srgbClr val="1D1B43"/>
+                          </a:solidFill>
+                          <a:latin typeface="Calibri"/>
+                        </a:rPr>
+                        <a:t>SAO PAULO/SP</a:t>
+                      </a:r>
+                    </a:p>
+                  </a:txBody>
+                  <a:tcPr>
+                    <a:solidFill>
+                      <a:srgbClr val="F2F2F2"/>
+                    </a:solidFill>
+                  </a:tcPr>
+                </a:tc>
+                <a:tc>
+                  <a:txBody>
+                    <a:bodyPr/>
+                    <a:lstStyle/>
+                    <a:p>
+                      <a:pPr algn="l"/>
+                      <a:r>
+                        <a:rPr sz="1000" b="0">
+                          <a:solidFill>
+                            <a:srgbClr val="1D1B43"/>
+                          </a:solidFill>
+                          <a:latin typeface="Calibri"/>
+                        </a:rPr>
+                        <a:t>15/05/2026</a:t>
+                      </a:r>
+                    </a:p>
+                  </a:txBody>
+                  <a:tcPr>
+                    <a:solidFill>
+                      <a:srgbClr val="F2F2F2"/>
+                    </a:solidFill>
+                  </a:tcPr>
+                </a:tc>
+                <a:tc>
+                  <a:txBody>
+                    <a:bodyPr/>
+                    <a:lstStyle/>
+                    <a:p>
+                      <a:pPr algn="l"/>
+                      <a:r>
+                        <a:rPr sz="1000" b="0">
+                          <a:solidFill>
+                            <a:srgbClr val="1D1B43"/>
+                          </a:solidFill>
+                          <a:latin typeface="Calibri"/>
+                        </a:rPr>
+                        <a:t>ENTREGUE FORA DO PRAZO</a:t>
+                      </a:r>
+                    </a:p>
+                  </a:txBody>
+                  <a:tcPr>
+                    <a:solidFill>
+                      <a:srgbClr val="F2F2F2"/>
                     </a:solidFill>
                   </a:tcPr>
                 </a:tc>
@@ -5725,7 +6076,7 @@
         </p:nvGraphicFramePr>
         <p:xfrm>
           <a:off x="731520" y="1920240"/>
-          <a:ext cx="10698480" cy="3200400"/>
+          <a:ext cx="10698480" cy="1828800"/>
         </p:xfrm>
         <a:graphic>
           <a:graphicData uri="http://schemas.openxmlformats.org/drawingml/2006/table">
@@ -5918,7 +6269,7 @@
                           </a:solidFill>
                           <a:latin typeface="Calibri"/>
                         </a:rPr>
-                        <a:t>182</a:t>
+                        <a:t>173</a:t>
                       </a:r>
                     </a:p>
                   </a:txBody>
@@ -5941,7 +6292,7 @@
                           </a:solidFill>
                           <a:latin typeface="Calibri"/>
                         </a:rPr>
-                        <a:t>181</a:t>
+                        <a:t>169</a:t>
                       </a:r>
                     </a:p>
                   </a:txBody>
@@ -5964,7 +6315,7 @@
                           </a:solidFill>
                           <a:latin typeface="Calibri"/>
                         </a:rPr>
-                        <a:t>1</a:t>
+                        <a:t>4</a:t>
                       </a:r>
                     </a:p>
                   </a:txBody>
@@ -5987,7 +6338,7 @@
                           </a:solidFill>
                           <a:latin typeface="Calibri"/>
                         </a:rPr>
-                        <a:t>99.5%</a:t>
+                        <a:t>97.7%</a:t>
                       </a:r>
                     </a:p>
                   </a:txBody>
@@ -6058,7 +6409,7 @@
                           </a:solidFill>
                           <a:latin typeface="Calibri"/>
                         </a:rPr>
-                        <a:t>40</a:t>
+                        <a:t>15</a:t>
                       </a:r>
                     </a:p>
                   </a:txBody>
@@ -6081,7 +6432,7 @@
                           </a:solidFill>
                           <a:latin typeface="Calibri"/>
                         </a:rPr>
-                        <a:t>40</a:t>
+                        <a:t>15</a:t>
                       </a:r>
                     </a:p>
                   </a:txBody>
@@ -6175,7 +6526,7 @@
                           </a:solidFill>
                           <a:latin typeface="Calibri"/>
                         </a:rPr>
-                        <a:t>RJ</a:t>
+                        <a:t>GO</a:t>
                       </a:r>
                     </a:p>
                   </a:txBody>
@@ -6198,7 +6549,7 @@
                           </a:solidFill>
                           <a:latin typeface="Calibri"/>
                         </a:rPr>
-                        <a:t>8</a:t>
+                        <a:t>1</a:t>
                       </a:r>
                     </a:p>
                   </a:txBody>
@@ -6221,7 +6572,7 @@
                           </a:solidFill>
                           <a:latin typeface="Calibri"/>
                         </a:rPr>
-                        <a:t>8</a:t>
+                        <a:t>1</a:t>
                       </a:r>
                     </a:p>
                   </a:txBody>
@@ -6297,426 +6648,6 @@
                   <a:tcPr>
                     <a:solidFill>
                       <a:srgbClr val="FFFFFF"/>
-                    </a:solidFill>
-                  </a:tcPr>
-                </a:tc>
-              </a:tr>
-              <a:tr h="457200">
-                <a:tc>
-                  <a:txBody>
-                    <a:bodyPr/>
-                    <a:lstStyle/>
-                    <a:p>
-                      <a:pPr algn="l"/>
-                      <a:r>
-                        <a:rPr sz="1000" b="0">
-                          <a:solidFill>
-                            <a:srgbClr val="1D1B43"/>
-                          </a:solidFill>
-                          <a:latin typeface="Calibri"/>
-                        </a:rPr>
-                        <a:t>PR</a:t>
-                      </a:r>
-                    </a:p>
-                  </a:txBody>
-                  <a:tcPr>
-                    <a:solidFill>
-                      <a:srgbClr val="F2F2F2"/>
-                    </a:solidFill>
-                  </a:tcPr>
-                </a:tc>
-                <a:tc>
-                  <a:txBody>
-                    <a:bodyPr/>
-                    <a:lstStyle/>
-                    <a:p>
-                      <a:pPr algn="l"/>
-                      <a:r>
-                        <a:rPr sz="1000" b="0">
-                          <a:solidFill>
-                            <a:srgbClr val="1D1B43"/>
-                          </a:solidFill>
-                          <a:latin typeface="Calibri"/>
-                        </a:rPr>
-                        <a:t>4</a:t>
-                      </a:r>
-                    </a:p>
-                  </a:txBody>
-                  <a:tcPr>
-                    <a:solidFill>
-                      <a:srgbClr val="F2F2F2"/>
-                    </a:solidFill>
-                  </a:tcPr>
-                </a:tc>
-                <a:tc>
-                  <a:txBody>
-                    <a:bodyPr/>
-                    <a:lstStyle/>
-                    <a:p>
-                      <a:pPr algn="l"/>
-                      <a:r>
-                        <a:rPr sz="1000" b="0">
-                          <a:solidFill>
-                            <a:srgbClr val="1D1B43"/>
-                          </a:solidFill>
-                          <a:latin typeface="Calibri"/>
-                        </a:rPr>
-                        <a:t>4</a:t>
-                      </a:r>
-                    </a:p>
-                  </a:txBody>
-                  <a:tcPr>
-                    <a:solidFill>
-                      <a:srgbClr val="F2F2F2"/>
-                    </a:solidFill>
-                  </a:tcPr>
-                </a:tc>
-                <a:tc>
-                  <a:txBody>
-                    <a:bodyPr/>
-                    <a:lstStyle/>
-                    <a:p>
-                      <a:pPr algn="l"/>
-                      <a:r>
-                        <a:rPr sz="1000" b="0">
-                          <a:solidFill>
-                            <a:srgbClr val="1D1B43"/>
-                          </a:solidFill>
-                          <a:latin typeface="Calibri"/>
-                        </a:rPr>
-                        <a:t>0</a:t>
-                      </a:r>
-                    </a:p>
-                  </a:txBody>
-                  <a:tcPr>
-                    <a:solidFill>
-                      <a:srgbClr val="F2F2F2"/>
-                    </a:solidFill>
-                  </a:tcPr>
-                </a:tc>
-                <a:tc>
-                  <a:txBody>
-                    <a:bodyPr/>
-                    <a:lstStyle/>
-                    <a:p>
-                      <a:pPr algn="l"/>
-                      <a:r>
-                        <a:rPr sz="1000" b="0">
-                          <a:solidFill>
-                            <a:srgbClr val="1D1B43"/>
-                          </a:solidFill>
-                          <a:latin typeface="Calibri"/>
-                        </a:rPr>
-                        <a:t>100.0%</a:t>
-                      </a:r>
-                    </a:p>
-                  </a:txBody>
-                  <a:tcPr>
-                    <a:solidFill>
-                      <a:srgbClr val="F2F2F2"/>
-                    </a:solidFill>
-                  </a:tcPr>
-                </a:tc>
-                <a:tc>
-                  <a:txBody>
-                    <a:bodyPr/>
-                    <a:lstStyle/>
-                    <a:p>
-                      <a:pPr algn="l"/>
-                      <a:r>
-                        <a:rPr sz="1000" b="0">
-                          <a:solidFill>
-                            <a:srgbClr val="1D1B43"/>
-                          </a:solidFill>
-                          <a:latin typeface="Calibri"/>
-                        </a:rPr>
-                        <a:t>Excelente</a:t>
-                      </a:r>
-                    </a:p>
-                  </a:txBody>
-                  <a:tcPr>
-                    <a:solidFill>
-                      <a:srgbClr val="F2F2F2"/>
-                    </a:solidFill>
-                  </a:tcPr>
-                </a:tc>
-              </a:tr>
-              <a:tr h="457200">
-                <a:tc>
-                  <a:txBody>
-                    <a:bodyPr/>
-                    <a:lstStyle/>
-                    <a:p>
-                      <a:pPr algn="l"/>
-                      <a:r>
-                        <a:rPr sz="1000" b="0">
-                          <a:solidFill>
-                            <a:srgbClr val="1D1B43"/>
-                          </a:solidFill>
-                          <a:latin typeface="Calibri"/>
-                        </a:rPr>
-                        <a:t>RS</a:t>
-                      </a:r>
-                    </a:p>
-                  </a:txBody>
-                  <a:tcPr>
-                    <a:solidFill>
-                      <a:srgbClr val="FFFFFF"/>
-                    </a:solidFill>
-                  </a:tcPr>
-                </a:tc>
-                <a:tc>
-                  <a:txBody>
-                    <a:bodyPr/>
-                    <a:lstStyle/>
-                    <a:p>
-                      <a:pPr algn="l"/>
-                      <a:r>
-                        <a:rPr sz="1000" b="0">
-                          <a:solidFill>
-                            <a:srgbClr val="1D1B43"/>
-                          </a:solidFill>
-                          <a:latin typeface="Calibri"/>
-                        </a:rPr>
-                        <a:t>4</a:t>
-                      </a:r>
-                    </a:p>
-                  </a:txBody>
-                  <a:tcPr>
-                    <a:solidFill>
-                      <a:srgbClr val="FFFFFF"/>
-                    </a:solidFill>
-                  </a:tcPr>
-                </a:tc>
-                <a:tc>
-                  <a:txBody>
-                    <a:bodyPr/>
-                    <a:lstStyle/>
-                    <a:p>
-                      <a:pPr algn="l"/>
-                      <a:r>
-                        <a:rPr sz="1000" b="0">
-                          <a:solidFill>
-                            <a:srgbClr val="1D1B43"/>
-                          </a:solidFill>
-                          <a:latin typeface="Calibri"/>
-                        </a:rPr>
-                        <a:t>4</a:t>
-                      </a:r>
-                    </a:p>
-                  </a:txBody>
-                  <a:tcPr>
-                    <a:solidFill>
-                      <a:srgbClr val="FFFFFF"/>
-                    </a:solidFill>
-                  </a:tcPr>
-                </a:tc>
-                <a:tc>
-                  <a:txBody>
-                    <a:bodyPr/>
-                    <a:lstStyle/>
-                    <a:p>
-                      <a:pPr algn="l"/>
-                      <a:r>
-                        <a:rPr sz="1000" b="0">
-                          <a:solidFill>
-                            <a:srgbClr val="1D1B43"/>
-                          </a:solidFill>
-                          <a:latin typeface="Calibri"/>
-                        </a:rPr>
-                        <a:t>0</a:t>
-                      </a:r>
-                    </a:p>
-                  </a:txBody>
-                  <a:tcPr>
-                    <a:solidFill>
-                      <a:srgbClr val="FFFFFF"/>
-                    </a:solidFill>
-                  </a:tcPr>
-                </a:tc>
-                <a:tc>
-                  <a:txBody>
-                    <a:bodyPr/>
-                    <a:lstStyle/>
-                    <a:p>
-                      <a:pPr algn="l"/>
-                      <a:r>
-                        <a:rPr sz="1000" b="0">
-                          <a:solidFill>
-                            <a:srgbClr val="1D1B43"/>
-                          </a:solidFill>
-                          <a:latin typeface="Calibri"/>
-                        </a:rPr>
-                        <a:t>100.0%</a:t>
-                      </a:r>
-                    </a:p>
-                  </a:txBody>
-                  <a:tcPr>
-                    <a:solidFill>
-                      <a:srgbClr val="FFFFFF"/>
-                    </a:solidFill>
-                  </a:tcPr>
-                </a:tc>
-                <a:tc>
-                  <a:txBody>
-                    <a:bodyPr/>
-                    <a:lstStyle/>
-                    <a:p>
-                      <a:pPr algn="l"/>
-                      <a:r>
-                        <a:rPr sz="1000" b="0">
-                          <a:solidFill>
-                            <a:srgbClr val="1D1B43"/>
-                          </a:solidFill>
-                          <a:latin typeface="Calibri"/>
-                        </a:rPr>
-                        <a:t>Excelente</a:t>
-                      </a:r>
-                    </a:p>
-                  </a:txBody>
-                  <a:tcPr>
-                    <a:solidFill>
-                      <a:srgbClr val="FFFFFF"/>
-                    </a:solidFill>
-                  </a:tcPr>
-                </a:tc>
-              </a:tr>
-              <a:tr h="457200">
-                <a:tc>
-                  <a:txBody>
-                    <a:bodyPr/>
-                    <a:lstStyle/>
-                    <a:p>
-                      <a:pPr algn="l"/>
-                      <a:r>
-                        <a:rPr sz="1000" b="0">
-                          <a:solidFill>
-                            <a:srgbClr val="1D1B43"/>
-                          </a:solidFill>
-                          <a:latin typeface="Calibri"/>
-                        </a:rPr>
-                        <a:t>MT</a:t>
-                      </a:r>
-                    </a:p>
-                  </a:txBody>
-                  <a:tcPr>
-                    <a:solidFill>
-                      <a:srgbClr val="F2F2F2"/>
-                    </a:solidFill>
-                  </a:tcPr>
-                </a:tc>
-                <a:tc>
-                  <a:txBody>
-                    <a:bodyPr/>
-                    <a:lstStyle/>
-                    <a:p>
-                      <a:pPr algn="l"/>
-                      <a:r>
-                        <a:rPr sz="1000" b="0">
-                          <a:solidFill>
-                            <a:srgbClr val="1D1B43"/>
-                          </a:solidFill>
-                          <a:latin typeface="Calibri"/>
-                        </a:rPr>
-                        <a:t>1</a:t>
-                      </a:r>
-                    </a:p>
-                  </a:txBody>
-                  <a:tcPr>
-                    <a:solidFill>
-                      <a:srgbClr val="F2F2F2"/>
-                    </a:solidFill>
-                  </a:tcPr>
-                </a:tc>
-                <a:tc>
-                  <a:txBody>
-                    <a:bodyPr/>
-                    <a:lstStyle/>
-                    <a:p>
-                      <a:pPr algn="l"/>
-                      <a:r>
-                        <a:rPr sz="1000" b="0">
-                          <a:solidFill>
-                            <a:srgbClr val="1D1B43"/>
-                          </a:solidFill>
-                          <a:latin typeface="Calibri"/>
-                        </a:rPr>
-                        <a:t>1</a:t>
-                      </a:r>
-                    </a:p>
-                  </a:txBody>
-                  <a:tcPr>
-                    <a:solidFill>
-                      <a:srgbClr val="F2F2F2"/>
-                    </a:solidFill>
-                  </a:tcPr>
-                </a:tc>
-                <a:tc>
-                  <a:txBody>
-                    <a:bodyPr/>
-                    <a:lstStyle/>
-                    <a:p>
-                      <a:pPr algn="l"/>
-                      <a:r>
-                        <a:rPr sz="1000" b="0">
-                          <a:solidFill>
-                            <a:srgbClr val="1D1B43"/>
-                          </a:solidFill>
-                          <a:latin typeface="Calibri"/>
-                        </a:rPr>
-                        <a:t>0</a:t>
-                      </a:r>
-                    </a:p>
-                  </a:txBody>
-                  <a:tcPr>
-                    <a:solidFill>
-                      <a:srgbClr val="F2F2F2"/>
-                    </a:solidFill>
-                  </a:tcPr>
-                </a:tc>
-                <a:tc>
-                  <a:txBody>
-                    <a:bodyPr/>
-                    <a:lstStyle/>
-                    <a:p>
-                      <a:pPr algn="l"/>
-                      <a:r>
-                        <a:rPr sz="1000" b="0">
-                          <a:solidFill>
-                            <a:srgbClr val="1D1B43"/>
-                          </a:solidFill>
-                          <a:latin typeface="Calibri"/>
-                        </a:rPr>
-                        <a:t>100.0%</a:t>
-                      </a:r>
-                    </a:p>
-                  </a:txBody>
-                  <a:tcPr>
-                    <a:solidFill>
-                      <a:srgbClr val="F2F2F2"/>
-                    </a:solidFill>
-                  </a:tcPr>
-                </a:tc>
-                <a:tc>
-                  <a:txBody>
-                    <a:bodyPr/>
-                    <a:lstStyle/>
-                    <a:p>
-                      <a:pPr algn="l"/>
-                      <a:r>
-                        <a:rPr sz="1000" b="0">
-                          <a:solidFill>
-                            <a:srgbClr val="1D1B43"/>
-                          </a:solidFill>
-                          <a:latin typeface="Calibri"/>
-                        </a:rPr>
-                        <a:t>Excelente</a:t>
-                      </a:r>
-                    </a:p>
-                  </a:txBody>
-                  <a:tcPr>
-                    <a:solidFill>
-                      <a:srgbClr val="F2F2F2"/>
                     </a:solidFill>
                   </a:tcPr>
                 </a:tc>
@@ -6805,7 +6736,7 @@
                 </a:solidFill>
                 <a:latin typeface="Calibri"/>
               </a:rPr>
-              <a:t>TOP DESTINATARIOS (90 pontos)</a:t>
+              <a:t>TOP DESTINATARIOS (79 pontos)</a:t>
             </a:r>
           </a:p>
         </p:txBody>
@@ -7103,7 +7034,7 @@
                           </a:solidFill>
                           <a:latin typeface="Calibri"/>
                         </a:rPr>
-                        <a:t>41</a:t>
+                        <a:t>36</a:t>
                       </a:r>
                     </a:p>
                   </a:txBody>
@@ -7126,7 +7057,7 @@
                           </a:solidFill>
                           <a:latin typeface="Calibri"/>
                         </a:rPr>
-                        <a:t>41</a:t>
+                        <a:t>33</a:t>
                       </a:r>
                     </a:p>
                   </a:txBody>
@@ -7149,7 +7080,7 @@
                           </a:solidFill>
                           <a:latin typeface="Calibri"/>
                         </a:rPr>
-                        <a:t>0</a:t>
+                        <a:t>3</a:t>
                       </a:r>
                     </a:p>
                   </a:txBody>
@@ -7172,7 +7103,7 @@
                           </a:solidFill>
                           <a:latin typeface="Calibri"/>
                         </a:rPr>
-                        <a:t>100.0%</a:t>
+                        <a:t>91.7%</a:t>
                       </a:r>
                     </a:p>
                   </a:txBody>
@@ -7195,7 +7126,7 @@
                           </a:solidFill>
                           <a:latin typeface="Calibri"/>
                         </a:rPr>
-                        <a:t>Excelente</a:t>
+                        <a:t>Regular</a:t>
                       </a:r>
                     </a:p>
                   </a:txBody>
@@ -7243,7 +7174,7 @@
                           </a:solidFill>
                           <a:latin typeface="Calibri"/>
                         </a:rPr>
-                        <a:t>SAMSONITE BRASIL LTD - NAVEGANTES / SC</a:t>
+                        <a:t>NAMASTE SERVICOS LTD - SAO PAULO / SP</a:t>
                       </a:r>
                     </a:p>
                   </a:txBody>
@@ -7266,7 +7197,7 @@
                           </a:solidFill>
                           <a:latin typeface="Calibri"/>
                         </a:rPr>
-                        <a:t>19</a:t>
+                        <a:t>16</a:t>
                       </a:r>
                     </a:p>
                   </a:txBody>
@@ -7289,7 +7220,7 @@
                           </a:solidFill>
                           <a:latin typeface="Calibri"/>
                         </a:rPr>
-                        <a:t>19</a:t>
+                        <a:t>16</a:t>
                       </a:r>
                     </a:p>
                   </a:txBody>
@@ -7406,7 +7337,7 @@
                           </a:solidFill>
                           <a:latin typeface="Calibri"/>
                         </a:rPr>
-                        <a:t>NAMASTE SERVICOS LTD - SAO PAULO / SP</a:t>
+                        <a:t>SAMSONITE DO BRASIL - SAO PAULO / SP</a:t>
                       </a:r>
                     </a:p>
                   </a:txBody>
@@ -7429,7 +7360,7 @@
                           </a:solidFill>
                           <a:latin typeface="Calibri"/>
                         </a:rPr>
-                        <a:t>15</a:t>
+                        <a:t>8</a:t>
                       </a:r>
                     </a:p>
                   </a:txBody>
@@ -7452,7 +7383,7 @@
                           </a:solidFill>
                           <a:latin typeface="Calibri"/>
                         </a:rPr>
-                        <a:t>15</a:t>
+                        <a:t>8</a:t>
                       </a:r>
                     </a:p>
                   </a:txBody>
@@ -7569,7 +7500,7 @@
                           </a:solidFill>
                           <a:latin typeface="Calibri"/>
                         </a:rPr>
-                        <a:t>SAMSONITE DO BRASIL - SAO PAULO / SP</a:t>
+                        <a:t>GIOVANA S. VIEIRA CO - CAMPINAS / SP</a:t>
                       </a:r>
                     </a:p>
                   </a:txBody>
@@ -7592,7 +7523,7 @@
                           </a:solidFill>
                           <a:latin typeface="Calibri"/>
                         </a:rPr>
-                        <a:t>9</a:t>
+                        <a:t>5</a:t>
                       </a:r>
                     </a:p>
                   </a:txBody>
@@ -7615,7 +7546,7 @@
                           </a:solidFill>
                           <a:latin typeface="Calibri"/>
                         </a:rPr>
-                        <a:t>9</a:t>
+                        <a:t>5</a:t>
                       </a:r>
                     </a:p>
                   </a:txBody>
@@ -7755,7 +7686,7 @@
                           </a:solidFill>
                           <a:latin typeface="Calibri"/>
                         </a:rPr>
-                        <a:t>7</a:t>
+                        <a:t>5</a:t>
                       </a:r>
                     </a:p>
                   </a:txBody>
@@ -7778,7 +7709,7 @@
                           </a:solidFill>
                           <a:latin typeface="Calibri"/>
                         </a:rPr>
-                        <a:t>7</a:t>
+                        <a:t>5</a:t>
                       </a:r>
                     </a:p>
                   </a:txBody>
@@ -7895,7 +7826,7 @@
                           </a:solidFill>
                           <a:latin typeface="Calibri"/>
                         </a:rPr>
-                        <a:t>SAMSONITE BRASIL LTD - SAO ROQUE / SP</a:t>
+                        <a:t>SAM PRAIA ARTIGOS DE - SANTOS / SP</a:t>
                       </a:r>
                     </a:p>
                   </a:txBody>
@@ -7918,7 +7849,7 @@
                           </a:solidFill>
                           <a:latin typeface="Calibri"/>
                         </a:rPr>
-                        <a:t>6</a:t>
+                        <a:t>5</a:t>
                       </a:r>
                     </a:p>
                   </a:txBody>
@@ -7941,7 +7872,7 @@
                           </a:solidFill>
                           <a:latin typeface="Calibri"/>
                         </a:rPr>
-                        <a:t>6</a:t>
+                        <a:t>5</a:t>
                       </a:r>
                     </a:p>
                   </a:txBody>
@@ -8058,7 +7989,7 @@
                           </a:solidFill>
                           <a:latin typeface="Calibri"/>
                         </a:rPr>
-                        <a:t>INTERTRAVEL BRASIL C - SAO JOSE DO RIO PRETO / S</a:t>
+                        <a:t>SATE BALNEA ARTIGOS - BALNEARIO CAMBORIU / SC</a:t>
                       </a:r>
                     </a:p>
                   </a:txBody>
@@ -8081,7 +8012,7 @@
                           </a:solidFill>
                           <a:latin typeface="Calibri"/>
                         </a:rPr>
-                        <a:t>6</a:t>
+                        <a:t>5</a:t>
                       </a:r>
                     </a:p>
                   </a:txBody>
@@ -8104,7 +8035,7 @@
                           </a:solidFill>
                           <a:latin typeface="Calibri"/>
                         </a:rPr>
-                        <a:t>6</a:t>
+                        <a:t>5</a:t>
                       </a:r>
                     </a:p>
                   </a:txBody>
@@ -8221,7 +8152,7 @@
                           </a:solidFill>
                           <a:latin typeface="Calibri"/>
                         </a:rPr>
-                        <a:t>SAMSONITE BRASIL LTD - ITUPEVA / SP</a:t>
+                        <a:t>SAMSONITE BRASIL LTD - NAVEGANTES / SC</a:t>
                       </a:r>
                     </a:p>
                   </a:txBody>
@@ -8244,7 +8175,7 @@
                           </a:solidFill>
                           <a:latin typeface="Calibri"/>
                         </a:rPr>
-                        <a:t>5</a:t>
+                        <a:t>4</a:t>
                       </a:r>
                     </a:p>
                   </a:txBody>
@@ -8267,7 +8198,7 @@
                           </a:solidFill>
                           <a:latin typeface="Calibri"/>
                         </a:rPr>
-                        <a:t>5</a:t>
+                        <a:t>4</a:t>
                       </a:r>
                     </a:p>
                   </a:txBody>
@@ -8384,7 +8315,7 @@
                           </a:solidFill>
                           <a:latin typeface="Calibri"/>
                         </a:rPr>
-                        <a:t>GIOVANA S. VIEIRA CO - CAMPINAS / SP</a:t>
+                        <a:t>DUFRY DO BRASIL DUTY - GUARULHOS / SP</a:t>
                       </a:r>
                     </a:p>
                   </a:txBody>
@@ -8407,7 +8338,7 @@
                           </a:solidFill>
                           <a:latin typeface="Calibri"/>
                         </a:rPr>
-                        <a:t>5</a:t>
+                        <a:t>4</a:t>
                       </a:r>
                     </a:p>
                   </a:txBody>
@@ -8430,7 +8361,7 @@
                           </a:solidFill>
                           <a:latin typeface="Calibri"/>
                         </a:rPr>
-                        <a:t>5</a:t>
+                        <a:t>4</a:t>
                       </a:r>
                     </a:p>
                   </a:txBody>
@@ -8547,7 +8478,7 @@
                           </a:solidFill>
                           <a:latin typeface="Calibri"/>
                         </a:rPr>
-                        <a:t>SAMITT JARDIM ARTIGO - SAO PAULO / SP</a:t>
+                        <a:t>SAL PIRACICABA ARTIG - PIRACICABA / SP</a:t>
                       </a:r>
                     </a:p>
                   </a:txBody>
@@ -8570,7 +8501,7 @@
                           </a:solidFill>
                           <a:latin typeface="Calibri"/>
                         </a:rPr>
-                        <a:t>5</a:t>
+                        <a:t>4</a:t>
                       </a:r>
                     </a:p>
                   </a:txBody>
@@ -8593,7 +8524,7 @@
                           </a:solidFill>
                           <a:latin typeface="Calibri"/>
                         </a:rPr>
-                        <a:t>5</a:t>
+                        <a:t>4</a:t>
                       </a:r>
                     </a:p>
                   </a:txBody>
@@ -8710,7 +8641,7 @@
                           </a:solidFill>
                           <a:latin typeface="Calibri"/>
                         </a:rPr>
-                        <a:t>SAS NORTE ARTIGOS DE - SAO PAULO / SP</a:t>
+                        <a:t>STE TAMBORE ARTIGOS - BARUERI / SP</a:t>
                       </a:r>
                     </a:p>
                   </a:txBody>
@@ -8733,7 +8664,7 @@
                           </a:solidFill>
                           <a:latin typeface="Calibri"/>
                         </a:rPr>
-                        <a:t>5</a:t>
+                        <a:t>4</a:t>
                       </a:r>
                     </a:p>
                   </a:txBody>
@@ -8756,7 +8687,7 @@
                           </a:solidFill>
                           <a:latin typeface="Calibri"/>
                         </a:rPr>
-                        <a:t>5</a:t>
+                        <a:t>4</a:t>
                       </a:r>
                     </a:p>
                   </a:txBody>
@@ -8873,7 +8804,7 @@
                           </a:solidFill>
                           <a:latin typeface="Calibri"/>
                         </a:rPr>
-                        <a:t>NOVA TK CENTER COURO - SAO PAULO / SP</a:t>
+                        <a:t>SAS NORTE ARTIGOS DE - SAO PAULO / SP</a:t>
                       </a:r>
                     </a:p>
                   </a:txBody>
@@ -8896,7 +8827,7 @@
                           </a:solidFill>
                           <a:latin typeface="Calibri"/>
                         </a:rPr>
-                        <a:t>5</a:t>
+                        <a:t>4</a:t>
                       </a:r>
                     </a:p>
                   </a:txBody>
@@ -8919,7 +8850,7 @@
                           </a:solidFill>
                           <a:latin typeface="Calibri"/>
                         </a:rPr>
-                        <a:t>5</a:t>
+                        <a:t>4</a:t>
                       </a:r>
                     </a:p>
                   </a:txBody>
@@ -9059,7 +8990,7 @@
                           </a:solidFill>
                           <a:latin typeface="Calibri"/>
                         </a:rPr>
-                        <a:t>5</a:t>
+                        <a:t>4</a:t>
                       </a:r>
                     </a:p>
                   </a:txBody>
@@ -9082,7 +9013,7 @@
                           </a:solidFill>
                           <a:latin typeface="Calibri"/>
                         </a:rPr>
-                        <a:t>5</a:t>
+                        <a:t>4</a:t>
                       </a:r>
                     </a:p>
                   </a:txBody>
@@ -9199,7 +9130,7 @@
                           </a:solidFill>
                           <a:latin typeface="Calibri"/>
                         </a:rPr>
-                        <a:t>TRIESTE COMERCIO DE - FLORIANOPOLIS / SC</a:t>
+                        <a:t>SAMITT JARDIM ARTIGO - SAO PAULO / SP</a:t>
                       </a:r>
                     </a:p>
                   </a:txBody>
@@ -9222,7 +9153,7 @@
                           </a:solidFill>
                           <a:latin typeface="Calibri"/>
                         </a:rPr>
-                        <a:t>5</a:t>
+                        <a:t>4</a:t>
                       </a:r>
                     </a:p>
                   </a:txBody>
@@ -9245,7 +9176,7 @@
                           </a:solidFill>
                           <a:latin typeface="Calibri"/>
                         </a:rPr>
-                        <a:t>5</a:t>
+                        <a:t>4</a:t>
                       </a:r>
                     </a:p>
                   </a:txBody>

--- a/SAMSONITE_BRASIL_LTDA.pptx
+++ b/SAMSONITE_BRASIL_LTDA.pptx
@@ -143,29 +143,23 @@
           </c:spPr>
           <c:cat>
             <c:strRef>
-              <c:f>Sheet1!$A$2:$A$3</c:f>
+              <c:f>Sheet1!$A$2:$A$2</c:f>
               <c:strCache>
-                <c:ptCount val="2"/>
+                <c:ptCount val="1"/>
                 <c:pt idx="0">
                   <c:v>Abril 2026</c:v>
-                </c:pt>
-                <c:pt idx="1">
-                  <c:v>Maio 2026</c:v>
                 </c:pt>
               </c:strCache>
             </c:strRef>
           </c:cat>
           <c:val>
             <c:numRef>
-              <c:f>Sheet1!$B$2:$B$3</c:f>
+              <c:f>Sheet1!$B$2:$B$2</c:f>
               <c:numCache>
                 <c:formatCode>General</c:formatCode>
-                <c:ptCount val="2"/>
+                <c:ptCount val="1"/>
                 <c:pt idx="0">
-                  <c:v>243</c:v>
-                </c:pt>
-                <c:pt idx="1">
-                  <c:v>185</c:v>
+                  <c:v>244</c:v>
                 </c:pt>
               </c:numCache>
             </c:numRef>
@@ -192,29 +186,23 @@
           </c:spPr>
           <c:cat>
             <c:strRef>
-              <c:f>Sheet1!$A$2:$A$3</c:f>
+              <c:f>Sheet1!$A$2:$A$2</c:f>
               <c:strCache>
-                <c:ptCount val="2"/>
+                <c:ptCount val="1"/>
                 <c:pt idx="0">
                   <c:v>Abril 2026</c:v>
-                </c:pt>
-                <c:pt idx="1">
-                  <c:v>Maio 2026</c:v>
                 </c:pt>
               </c:strCache>
             </c:strRef>
           </c:cat>
           <c:val>
             <c:numRef>
-              <c:f>Sheet1!$C$2:$C$3</c:f>
+              <c:f>Sheet1!$C$2:$C$2</c:f>
               <c:numCache>
                 <c:formatCode>General</c:formatCode>
-                <c:ptCount val="2"/>
+                <c:ptCount val="1"/>
                 <c:pt idx="0">
-                  <c:v>3</c:v>
-                </c:pt>
-                <c:pt idx="1">
-                  <c:v>4</c:v>
+                  <c:v>1</c:v>
                 </c:pt>
               </c:numCache>
             </c:numRef>
@@ -3387,7 +3375,7 @@
                 </a:solidFill>
                 <a:latin typeface="Calibri"/>
               </a:rPr>
-              <a:t>INDICADORES MAIO 2026</a:t>
+              <a:t>INDICADORES ABRIL 2026</a:t>
             </a:r>
           </a:p>
         </p:txBody>
@@ -3494,14 +3482,13 @@
           <a:p>
             <a:pPr algn="ctr"/>
             <a:r>
-              <a:rPr sz="1600" b="1">
+              <a:rPr sz="1400" b="1">
                 <a:solidFill>
                   <a:srgbClr val="FFFFFF"/>
                 </a:solidFill>
                 <a:latin typeface="Calibri"/>
               </a:rPr>
-              <a:t>Nossa rota e ir alem das
-entregas!</a:t>
+              <a:t>Nossa rota e ir alem das entregas!</a:t>
             </a:r>
           </a:p>
         </p:txBody>
@@ -3709,7 +3696,7 @@
                 </a:solidFill>
                 <a:latin typeface="Calibri"/>
               </a:rPr>
-              <a:t>189</a:t>
+              <a:t>245</a:t>
             </a:r>
           </a:p>
         </p:txBody>
@@ -3824,7 +3811,7 @@
                 </a:solidFill>
                 <a:latin typeface="Calibri"/>
               </a:rPr>
-              <a:t>185</a:t>
+              <a:t>244</a:t>
             </a:r>
           </a:p>
         </p:txBody>
@@ -3939,7 +3926,7 @@
                 </a:solidFill>
                 <a:latin typeface="Calibri"/>
               </a:rPr>
-              <a:t>4</a:t>
+              <a:t>1</a:t>
             </a:r>
           </a:p>
         </p:txBody>
@@ -4054,7 +4041,7 @@
                 </a:solidFill>
                 <a:latin typeface="Calibri"/>
               </a:rPr>
-              <a:t>97.9%</a:t>
+              <a:t>99.6%</a:t>
             </a:r>
           </a:p>
         </p:txBody>
@@ -4155,30 +4142,30 @@
                           </a:solidFill>
                           <a:latin typeface="Calibri"/>
                         </a:rPr>
+                        <a:t>Marco 2026</a:t>
+                      </a:r>
+                    </a:p>
+                  </a:txBody>
+                  <a:tcPr>
+                    <a:solidFill>
+                      <a:srgbClr val="1D1B43"/>
+                    </a:solidFill>
+                  </a:tcPr>
+                </a:tc>
+                <a:tc>
+                  <a:txBody>
+                    <a:bodyPr/>
+                    <a:lstStyle/>
+                    <a:p>
+                      <a:pPr algn="ctr"/>
+                      <a:r>
+                        <a:rPr sz="1100" b="1">
+                          <a:solidFill>
+                            <a:srgbClr val="FFFFFF"/>
+                          </a:solidFill>
+                          <a:latin typeface="Calibri"/>
+                        </a:rPr>
                         <a:t>Abril 2026</a:t>
-                      </a:r>
-                    </a:p>
-                  </a:txBody>
-                  <a:tcPr>
-                    <a:solidFill>
-                      <a:srgbClr val="1D1B43"/>
-                    </a:solidFill>
-                  </a:tcPr>
-                </a:tc>
-                <a:tc>
-                  <a:txBody>
-                    <a:bodyPr/>
-                    <a:lstStyle/>
-                    <a:p>
-                      <a:pPr algn="ctr"/>
-                      <a:r>
-                        <a:rPr sz="1100" b="1">
-                          <a:solidFill>
-                            <a:srgbClr val="FFFFFF"/>
-                          </a:solidFill>
-                          <a:latin typeface="Calibri"/>
-                        </a:rPr>
-                        <a:t>Maio 2026</a:t>
                       </a:r>
                     </a:p>
                   </a:txBody>
@@ -4249,7 +4236,7 @@
                           </a:solidFill>
                           <a:latin typeface="Calibri"/>
                         </a:rPr>
-                        <a:t>246</a:t>
+                        <a:t>-</a:t>
                       </a:r>
                     </a:p>
                   </a:txBody>
@@ -4272,7 +4259,7 @@
                           </a:solidFill>
                           <a:latin typeface="Calibri"/>
                         </a:rPr>
-                        <a:t>189</a:t>
+                        <a:t>245</a:t>
                       </a:r>
                     </a:p>
                   </a:txBody>
@@ -4295,7 +4282,7 @@
                           </a:solidFill>
                           <a:latin typeface="Calibri"/>
                         </a:rPr>
-                        <a:t>- 57</a:t>
+                        <a:t>-</a:t>
                       </a:r>
                     </a:p>
                   </a:txBody>
@@ -4343,7 +4330,7 @@
                           </a:solidFill>
                           <a:latin typeface="Calibri"/>
                         </a:rPr>
-                        <a:t>243</a:t>
+                        <a:t>-</a:t>
                       </a:r>
                     </a:p>
                   </a:txBody>
@@ -4366,7 +4353,7 @@
                           </a:solidFill>
                           <a:latin typeface="Calibri"/>
                         </a:rPr>
-                        <a:t>185</a:t>
+                        <a:t>244</a:t>
                       </a:r>
                     </a:p>
                   </a:txBody>
@@ -4389,7 +4376,7 @@
                           </a:solidFill>
                           <a:latin typeface="Calibri"/>
                         </a:rPr>
-                        <a:t>- 58</a:t>
+                        <a:t>-</a:t>
                       </a:r>
                     </a:p>
                   </a:txBody>
@@ -4437,7 +4424,7 @@
                           </a:solidFill>
                           <a:latin typeface="Calibri"/>
                         </a:rPr>
-                        <a:t>3</a:t>
+                        <a:t>-</a:t>
                       </a:r>
                     </a:p>
                   </a:txBody>
@@ -4460,7 +4447,7 @@
                           </a:solidFill>
                           <a:latin typeface="Calibri"/>
                         </a:rPr>
-                        <a:t>4</a:t>
+                        <a:t>1</a:t>
                       </a:r>
                     </a:p>
                   </a:txBody>
@@ -4483,7 +4470,7 @@
                           </a:solidFill>
                           <a:latin typeface="Calibri"/>
                         </a:rPr>
-                        <a:t>+ 1</a:t>
+                        <a:t>-</a:t>
                       </a:r>
                     </a:p>
                   </a:txBody>
@@ -4531,7 +4518,7 @@
                           </a:solidFill>
                           <a:latin typeface="Calibri"/>
                         </a:rPr>
-                        <a:t>98.8%</a:t>
+                        <a:t>-</a:t>
                       </a:r>
                     </a:p>
                   </a:txBody>
@@ -4554,7 +4541,7 @@
                           </a:solidFill>
                           <a:latin typeface="Calibri"/>
                         </a:rPr>
-                        <a:t>97.9%</a:t>
+                        <a:t>99.6%</a:t>
                       </a:r>
                     </a:p>
                   </a:txBody>
@@ -4577,7 +4564,7 @@
                           </a:solidFill>
                           <a:latin typeface="Calibri"/>
                         </a:rPr>
-                        <a:t>- 0.9pp</a:t>
+                        <a:t>-</a:t>
                       </a:r>
                     </a:p>
                   </a:txBody>
@@ -4748,7 +4735,7 @@
         </p:nvGraphicFramePr>
         <p:xfrm>
           <a:off x="7955279" y="2286000"/>
-          <a:ext cx="4480560" cy="1316736"/>
+          <a:ext cx="4480560" cy="877824"/>
         </p:xfrm>
         <a:graphic>
           <a:graphicData uri="http://schemas.openxmlformats.org/drawingml/2006/table">
@@ -4917,7 +4904,7 @@
                           </a:solidFill>
                           <a:latin typeface="Calibri"/>
                         </a:rPr>
-                        <a:t>246</a:t>
+                        <a:t>245</a:t>
                       </a:r>
                     </a:p>
                   </a:txBody>
@@ -4940,7 +4927,7 @@
                           </a:solidFill>
                           <a:latin typeface="Calibri"/>
                         </a:rPr>
-                        <a:t>243</a:t>
+                        <a:t>244</a:t>
                       </a:r>
                     </a:p>
                   </a:txBody>
@@ -4963,7 +4950,7 @@
                           </a:solidFill>
                           <a:latin typeface="Calibri"/>
                         </a:rPr>
-                        <a:t>3</a:t>
+                        <a:t>1</a:t>
                       </a:r>
                     </a:p>
                   </a:txBody>
@@ -4986,130 +4973,13 @@
                           </a:solidFill>
                           <a:latin typeface="Calibri"/>
                         </a:rPr>
-                        <a:t>98.8%</a:t>
+                        <a:t>99.6%</a:t>
                       </a:r>
                     </a:p>
                   </a:txBody>
                   <a:tcPr>
                     <a:solidFill>
                       <a:srgbClr val="FFFFFF"/>
-                    </a:solidFill>
-                  </a:tcPr>
-                </a:tc>
-              </a:tr>
-              <a:tr h="438912">
-                <a:tc>
-                  <a:txBody>
-                    <a:bodyPr/>
-                    <a:lstStyle/>
-                    <a:p>
-                      <a:pPr algn="l"/>
-                      <a:r>
-                        <a:rPr sz="1000" b="0">
-                          <a:solidFill>
-                            <a:srgbClr val="1D1B43"/>
-                          </a:solidFill>
-                          <a:latin typeface="Calibri"/>
-                        </a:rPr>
-                        <a:t>Maio 2026</a:t>
-                      </a:r>
-                    </a:p>
-                  </a:txBody>
-                  <a:tcPr>
-                    <a:solidFill>
-                      <a:srgbClr val="F2F2F2"/>
-                    </a:solidFill>
-                  </a:tcPr>
-                </a:tc>
-                <a:tc>
-                  <a:txBody>
-                    <a:bodyPr/>
-                    <a:lstStyle/>
-                    <a:p>
-                      <a:pPr algn="l"/>
-                      <a:r>
-                        <a:rPr sz="1000" b="0">
-                          <a:solidFill>
-                            <a:srgbClr val="1D1B43"/>
-                          </a:solidFill>
-                          <a:latin typeface="Calibri"/>
-                        </a:rPr>
-                        <a:t>189</a:t>
-                      </a:r>
-                    </a:p>
-                  </a:txBody>
-                  <a:tcPr>
-                    <a:solidFill>
-                      <a:srgbClr val="F2F2F2"/>
-                    </a:solidFill>
-                  </a:tcPr>
-                </a:tc>
-                <a:tc>
-                  <a:txBody>
-                    <a:bodyPr/>
-                    <a:lstStyle/>
-                    <a:p>
-                      <a:pPr algn="l"/>
-                      <a:r>
-                        <a:rPr sz="1000" b="0">
-                          <a:solidFill>
-                            <a:srgbClr val="1D1B43"/>
-                          </a:solidFill>
-                          <a:latin typeface="Calibri"/>
-                        </a:rPr>
-                        <a:t>185</a:t>
-                      </a:r>
-                    </a:p>
-                  </a:txBody>
-                  <a:tcPr>
-                    <a:solidFill>
-                      <a:srgbClr val="F2F2F2"/>
-                    </a:solidFill>
-                  </a:tcPr>
-                </a:tc>
-                <a:tc>
-                  <a:txBody>
-                    <a:bodyPr/>
-                    <a:lstStyle/>
-                    <a:p>
-                      <a:pPr algn="l"/>
-                      <a:r>
-                        <a:rPr sz="1000" b="0">
-                          <a:solidFill>
-                            <a:srgbClr val="1D1B43"/>
-                          </a:solidFill>
-                          <a:latin typeface="Calibri"/>
-                        </a:rPr>
-                        <a:t>4</a:t>
-                      </a:r>
-                    </a:p>
-                  </a:txBody>
-                  <a:tcPr>
-                    <a:solidFill>
-                      <a:srgbClr val="F2F2F2"/>
-                    </a:solidFill>
-                  </a:tcPr>
-                </a:tc>
-                <a:tc>
-                  <a:txBody>
-                    <a:bodyPr/>
-                    <a:lstStyle/>
-                    <a:p>
-                      <a:pPr algn="l"/>
-                      <a:r>
-                        <a:rPr sz="1000" b="0">
-                          <a:solidFill>
-                            <a:srgbClr val="1D1B43"/>
-                          </a:solidFill>
-                          <a:latin typeface="Calibri"/>
-                        </a:rPr>
-                        <a:t>97.9%</a:t>
-                      </a:r>
-                    </a:p>
-                  </a:txBody>
-                  <a:tcPr>
-                    <a:solidFill>
-                      <a:srgbClr val="F2F2F2"/>
                     </a:solidFill>
                   </a:tcPr>
                 </a:tc>
@@ -5191,7 +5061,7 @@
                 </a:solidFill>
                 <a:latin typeface="Calibri"/>
               </a:rPr>
-              <a:t>PERFORMANCE: 97.9% - EXCELENTE</a:t>
+              <a:t>PERFORMANCE: 99.6% - EXCELENTE</a:t>
             </a:r>
           </a:p>
         </p:txBody>
@@ -5276,7 +5146,7 @@
                 </a:solidFill>
                 <a:latin typeface="Calibri"/>
               </a:rPr>
-              <a:t>OCORRENCIAS FORA DO PRAZO (4)</a:t>
+              <a:t>OCORRENCIAS FORA DO PRAZO (1)</a:t>
             </a:r>
           </a:p>
         </p:txBody>
@@ -5334,7 +5204,7 @@
         </p:nvGraphicFramePr>
         <p:xfrm>
           <a:off x="457200" y="1828800"/>
-          <a:ext cx="11429999" cy="1920240"/>
+          <a:ext cx="11429999" cy="768096"/>
         </p:xfrm>
         <a:graphic>
           <a:graphicData uri="http://schemas.openxmlformats.org/drawingml/2006/table">
@@ -5480,7 +5350,7 @@
                           </a:solidFill>
                           <a:latin typeface="Calibri"/>
                         </a:rPr>
-                        <a:t>281740</a:t>
+                        <a:t>281066</a:t>
                       </a:r>
                     </a:p>
                   </a:txBody>
@@ -5503,7 +5373,7 @@
                           </a:solidFill>
                           <a:latin typeface="Calibri"/>
                         </a:rPr>
-                        <a:t>RMS SOLUTIONS LTDA R - OSASCO / SP</a:t>
+                        <a:t>EBAZAR.COM.BR. LTDA - CAJAMAR / SP</a:t>
                       </a:r>
                     </a:p>
                   </a:txBody>
@@ -5526,7 +5396,7 @@
                           </a:solidFill>
                           <a:latin typeface="Calibri"/>
                         </a:rPr>
-                        <a:t>OSASCO/SP</a:t>
+                        <a:t>CAJAMAR/SP</a:t>
                       </a:r>
                     </a:p>
                   </a:txBody>
@@ -5549,7 +5419,7 @@
                           </a:solidFill>
                           <a:latin typeface="Calibri"/>
                         </a:rPr>
-                        <a:t>07/05/2026</a:t>
+                        <a:t>30/04/2026</a:t>
                       </a:r>
                     </a:p>
                   </a:txBody>
@@ -5579,357 +5449,6 @@
                   <a:tcPr>
                     <a:solidFill>
                       <a:srgbClr val="FFFFFF"/>
-                    </a:solidFill>
-                  </a:tcPr>
-                </a:tc>
-              </a:tr>
-              <a:tr h="384048">
-                <a:tc>
-                  <a:txBody>
-                    <a:bodyPr/>
-                    <a:lstStyle/>
-                    <a:p>
-                      <a:pPr algn="l"/>
-                      <a:r>
-                        <a:rPr sz="1000" b="0">
-                          <a:solidFill>
-                            <a:srgbClr val="1D1B43"/>
-                          </a:solidFill>
-                          <a:latin typeface="Calibri"/>
-                        </a:rPr>
-                        <a:t>281959</a:t>
-                      </a:r>
-                    </a:p>
-                  </a:txBody>
-                  <a:tcPr>
-                    <a:solidFill>
-                      <a:srgbClr val="F2F2F2"/>
-                    </a:solidFill>
-                  </a:tcPr>
-                </a:tc>
-                <a:tc>
-                  <a:txBody>
-                    <a:bodyPr/>
-                    <a:lstStyle/>
-                    <a:p>
-                      <a:pPr algn="l"/>
-                      <a:r>
-                        <a:rPr sz="1000" b="0">
-                          <a:solidFill>
-                            <a:srgbClr val="1D1B43"/>
-                          </a:solidFill>
-                          <a:latin typeface="Calibri"/>
-                        </a:rPr>
-                        <a:t>SAMSONITE BRASIL LTD - SAO PAULO / SP</a:t>
-                      </a:r>
-                    </a:p>
-                  </a:txBody>
-                  <a:tcPr>
-                    <a:solidFill>
-                      <a:srgbClr val="F2F2F2"/>
-                    </a:solidFill>
-                  </a:tcPr>
-                </a:tc>
-                <a:tc>
-                  <a:txBody>
-                    <a:bodyPr/>
-                    <a:lstStyle/>
-                    <a:p>
-                      <a:pPr algn="l"/>
-                      <a:r>
-                        <a:rPr sz="1000" b="0">
-                          <a:solidFill>
-                            <a:srgbClr val="1D1B43"/>
-                          </a:solidFill>
-                          <a:latin typeface="Calibri"/>
-                        </a:rPr>
-                        <a:t>SAO PAULO/SP</a:t>
-                      </a:r>
-                    </a:p>
-                  </a:txBody>
-                  <a:tcPr>
-                    <a:solidFill>
-                      <a:srgbClr val="F2F2F2"/>
-                    </a:solidFill>
-                  </a:tcPr>
-                </a:tc>
-                <a:tc>
-                  <a:txBody>
-                    <a:bodyPr/>
-                    <a:lstStyle/>
-                    <a:p>
-                      <a:pPr algn="l"/>
-                      <a:r>
-                        <a:rPr sz="1000" b="0">
-                          <a:solidFill>
-                            <a:srgbClr val="1D1B43"/>
-                          </a:solidFill>
-                          <a:latin typeface="Calibri"/>
-                        </a:rPr>
-                        <a:t>09/05/2026</a:t>
-                      </a:r>
-                    </a:p>
-                  </a:txBody>
-                  <a:tcPr>
-                    <a:solidFill>
-                      <a:srgbClr val="F2F2F2"/>
-                    </a:solidFill>
-                  </a:tcPr>
-                </a:tc>
-                <a:tc>
-                  <a:txBody>
-                    <a:bodyPr/>
-                    <a:lstStyle/>
-                    <a:p>
-                      <a:pPr algn="l"/>
-                      <a:r>
-                        <a:rPr sz="1000" b="0">
-                          <a:solidFill>
-                            <a:srgbClr val="1D1B43"/>
-                          </a:solidFill>
-                          <a:latin typeface="Calibri"/>
-                        </a:rPr>
-                        <a:t>ENTREGUE FORA DO PRAZO</a:t>
-                      </a:r>
-                    </a:p>
-                  </a:txBody>
-                  <a:tcPr>
-                    <a:solidFill>
-                      <a:srgbClr val="F2F2F2"/>
-                    </a:solidFill>
-                  </a:tcPr>
-                </a:tc>
-              </a:tr>
-              <a:tr h="384048">
-                <a:tc>
-                  <a:txBody>
-                    <a:bodyPr/>
-                    <a:lstStyle/>
-                    <a:p>
-                      <a:pPr algn="l"/>
-                      <a:r>
-                        <a:rPr sz="1000" b="0">
-                          <a:solidFill>
-                            <a:srgbClr val="1D1B43"/>
-                          </a:solidFill>
-                          <a:latin typeface="Calibri"/>
-                        </a:rPr>
-                        <a:t>282630</a:t>
-                      </a:r>
-                    </a:p>
-                  </a:txBody>
-                  <a:tcPr>
-                    <a:solidFill>
-                      <a:srgbClr val="FFFFFF"/>
-                    </a:solidFill>
-                  </a:tcPr>
-                </a:tc>
-                <a:tc>
-                  <a:txBody>
-                    <a:bodyPr/>
-                    <a:lstStyle/>
-                    <a:p>
-                      <a:pPr algn="l"/>
-                      <a:r>
-                        <a:rPr sz="1000" b="0">
-                          <a:solidFill>
-                            <a:srgbClr val="1D1B43"/>
-                          </a:solidFill>
-                          <a:latin typeface="Calibri"/>
-                        </a:rPr>
-                        <a:t>SAMSONITE BRASIL LTD - SAO PAULO / SP</a:t>
-                      </a:r>
-                    </a:p>
-                  </a:txBody>
-                  <a:tcPr>
-                    <a:solidFill>
-                      <a:srgbClr val="FFFFFF"/>
-                    </a:solidFill>
-                  </a:tcPr>
-                </a:tc>
-                <a:tc>
-                  <a:txBody>
-                    <a:bodyPr/>
-                    <a:lstStyle/>
-                    <a:p>
-                      <a:pPr algn="l"/>
-                      <a:r>
-                        <a:rPr sz="1000" b="0">
-                          <a:solidFill>
-                            <a:srgbClr val="1D1B43"/>
-                          </a:solidFill>
-                          <a:latin typeface="Calibri"/>
-                        </a:rPr>
-                        <a:t>SAO PAULO/SP</a:t>
-                      </a:r>
-                    </a:p>
-                  </a:txBody>
-                  <a:tcPr>
-                    <a:solidFill>
-                      <a:srgbClr val="FFFFFF"/>
-                    </a:solidFill>
-                  </a:tcPr>
-                </a:tc>
-                <a:tc>
-                  <a:txBody>
-                    <a:bodyPr/>
-                    <a:lstStyle/>
-                    <a:p>
-                      <a:pPr algn="l"/>
-                      <a:r>
-                        <a:rPr sz="1000" b="0">
-                          <a:solidFill>
-                            <a:srgbClr val="1D1B43"/>
-                          </a:solidFill>
-                          <a:latin typeface="Calibri"/>
-                        </a:rPr>
-                        <a:t>14/05/2026</a:t>
-                      </a:r>
-                    </a:p>
-                  </a:txBody>
-                  <a:tcPr>
-                    <a:solidFill>
-                      <a:srgbClr val="FFFFFF"/>
-                    </a:solidFill>
-                  </a:tcPr>
-                </a:tc>
-                <a:tc>
-                  <a:txBody>
-                    <a:bodyPr/>
-                    <a:lstStyle/>
-                    <a:p>
-                      <a:pPr algn="l"/>
-                      <a:r>
-                        <a:rPr sz="1000" b="0">
-                          <a:solidFill>
-                            <a:srgbClr val="1D1B43"/>
-                          </a:solidFill>
-                          <a:latin typeface="Calibri"/>
-                        </a:rPr>
-                        <a:t>ENTREGUE FORA DO PRAZO</a:t>
-                      </a:r>
-                    </a:p>
-                  </a:txBody>
-                  <a:tcPr>
-                    <a:solidFill>
-                      <a:srgbClr val="FFFFFF"/>
-                    </a:solidFill>
-                  </a:tcPr>
-                </a:tc>
-              </a:tr>
-              <a:tr h="384048">
-                <a:tc>
-                  <a:txBody>
-                    <a:bodyPr/>
-                    <a:lstStyle/>
-                    <a:p>
-                      <a:pPr algn="l"/>
-                      <a:r>
-                        <a:rPr sz="1000" b="0">
-                          <a:solidFill>
-                            <a:srgbClr val="1D1B43"/>
-                          </a:solidFill>
-                          <a:latin typeface="Calibri"/>
-                        </a:rPr>
-                        <a:t>282635</a:t>
-                      </a:r>
-                    </a:p>
-                  </a:txBody>
-                  <a:tcPr>
-                    <a:solidFill>
-                      <a:srgbClr val="F2F2F2"/>
-                    </a:solidFill>
-                  </a:tcPr>
-                </a:tc>
-                <a:tc>
-                  <a:txBody>
-                    <a:bodyPr/>
-                    <a:lstStyle/>
-                    <a:p>
-                      <a:pPr algn="l"/>
-                      <a:r>
-                        <a:rPr sz="1000" b="0">
-                          <a:solidFill>
-                            <a:srgbClr val="1D1B43"/>
-                          </a:solidFill>
-                          <a:latin typeface="Calibri"/>
-                        </a:rPr>
-                        <a:t>SAMSONITE BRASIL LTD - SAO PAULO / SP</a:t>
-                      </a:r>
-                    </a:p>
-                  </a:txBody>
-                  <a:tcPr>
-                    <a:solidFill>
-                      <a:srgbClr val="F2F2F2"/>
-                    </a:solidFill>
-                  </a:tcPr>
-                </a:tc>
-                <a:tc>
-                  <a:txBody>
-                    <a:bodyPr/>
-                    <a:lstStyle/>
-                    <a:p>
-                      <a:pPr algn="l"/>
-                      <a:r>
-                        <a:rPr sz="1000" b="0">
-                          <a:solidFill>
-                            <a:srgbClr val="1D1B43"/>
-                          </a:solidFill>
-                          <a:latin typeface="Calibri"/>
-                        </a:rPr>
-                        <a:t>SAO PAULO/SP</a:t>
-                      </a:r>
-                    </a:p>
-                  </a:txBody>
-                  <a:tcPr>
-                    <a:solidFill>
-                      <a:srgbClr val="F2F2F2"/>
-                    </a:solidFill>
-                  </a:tcPr>
-                </a:tc>
-                <a:tc>
-                  <a:txBody>
-                    <a:bodyPr/>
-                    <a:lstStyle/>
-                    <a:p>
-                      <a:pPr algn="l"/>
-                      <a:r>
-                        <a:rPr sz="1000" b="0">
-                          <a:solidFill>
-                            <a:srgbClr val="1D1B43"/>
-                          </a:solidFill>
-                          <a:latin typeface="Calibri"/>
-                        </a:rPr>
-                        <a:t>15/05/2026</a:t>
-                      </a:r>
-                    </a:p>
-                  </a:txBody>
-                  <a:tcPr>
-                    <a:solidFill>
-                      <a:srgbClr val="F2F2F2"/>
-                    </a:solidFill>
-                  </a:tcPr>
-                </a:tc>
-                <a:tc>
-                  <a:txBody>
-                    <a:bodyPr/>
-                    <a:lstStyle/>
-                    <a:p>
-                      <a:pPr algn="l"/>
-                      <a:r>
-                        <a:rPr sz="1000" b="0">
-                          <a:solidFill>
-                            <a:srgbClr val="1D1B43"/>
-                          </a:solidFill>
-                          <a:latin typeface="Calibri"/>
-                        </a:rPr>
-                        <a:t>ENTREGUE FORA DO PRAZO</a:t>
-                      </a:r>
-                    </a:p>
-                  </a:txBody>
-                  <a:tcPr>
-                    <a:solidFill>
-                      <a:srgbClr val="F2F2F2"/>
                     </a:solidFill>
                   </a:tcPr>
                 </a:tc>
@@ -6076,7 +5595,7 @@
         </p:nvGraphicFramePr>
         <p:xfrm>
           <a:off x="731520" y="1920240"/>
-          <a:ext cx="10698480" cy="1828800"/>
+          <a:ext cx="10698480" cy="3200400"/>
         </p:xfrm>
         <a:graphic>
           <a:graphicData uri="http://schemas.openxmlformats.org/drawingml/2006/table">
@@ -6269,7 +5788,7 @@
                           </a:solidFill>
                           <a:latin typeface="Calibri"/>
                         </a:rPr>
-                        <a:t>173</a:t>
+                        <a:t>188</a:t>
                       </a:r>
                     </a:p>
                   </a:txBody>
@@ -6292,7 +5811,7 @@
                           </a:solidFill>
                           <a:latin typeface="Calibri"/>
                         </a:rPr>
-                        <a:t>169</a:t>
+                        <a:t>187</a:t>
                       </a:r>
                     </a:p>
                   </a:txBody>
@@ -6315,7 +5834,7 @@
                           </a:solidFill>
                           <a:latin typeface="Calibri"/>
                         </a:rPr>
-                        <a:t>4</a:t>
+                        <a:t>1</a:t>
                       </a:r>
                     </a:p>
                   </a:txBody>
@@ -6338,7 +5857,7 @@
                           </a:solidFill>
                           <a:latin typeface="Calibri"/>
                         </a:rPr>
-                        <a:t>97.7%</a:t>
+                        <a:t>99.5%</a:t>
                       </a:r>
                     </a:p>
                   </a:txBody>
@@ -6409,7 +5928,7 @@
                           </a:solidFill>
                           <a:latin typeface="Calibri"/>
                         </a:rPr>
-                        <a:t>15</a:t>
+                        <a:t>40</a:t>
                       </a:r>
                     </a:p>
                   </a:txBody>
@@ -6432,7 +5951,7 @@
                           </a:solidFill>
                           <a:latin typeface="Calibri"/>
                         </a:rPr>
-                        <a:t>15</a:t>
+                        <a:t>40</a:t>
                       </a:r>
                     </a:p>
                   </a:txBody>
@@ -6526,7 +6045,7 @@
                           </a:solidFill>
                           <a:latin typeface="Calibri"/>
                         </a:rPr>
-                        <a:t>GO</a:t>
+                        <a:t>RJ</a:t>
                       </a:r>
                     </a:p>
                   </a:txBody>
@@ -6549,13 +6068,433 @@
                           </a:solidFill>
                           <a:latin typeface="Calibri"/>
                         </a:rPr>
+                        <a:t>8</a:t>
+                      </a:r>
+                    </a:p>
+                  </a:txBody>
+                  <a:tcPr>
+                    <a:solidFill>
+                      <a:srgbClr val="FFFFFF"/>
+                    </a:solidFill>
+                  </a:tcPr>
+                </a:tc>
+                <a:tc>
+                  <a:txBody>
+                    <a:bodyPr/>
+                    <a:lstStyle/>
+                    <a:p>
+                      <a:pPr algn="l"/>
+                      <a:r>
+                        <a:rPr sz="1000" b="0">
+                          <a:solidFill>
+                            <a:srgbClr val="1D1B43"/>
+                          </a:solidFill>
+                          <a:latin typeface="Calibri"/>
+                        </a:rPr>
+                        <a:t>8</a:t>
+                      </a:r>
+                    </a:p>
+                  </a:txBody>
+                  <a:tcPr>
+                    <a:solidFill>
+                      <a:srgbClr val="FFFFFF"/>
+                    </a:solidFill>
+                  </a:tcPr>
+                </a:tc>
+                <a:tc>
+                  <a:txBody>
+                    <a:bodyPr/>
+                    <a:lstStyle/>
+                    <a:p>
+                      <a:pPr algn="l"/>
+                      <a:r>
+                        <a:rPr sz="1000" b="0">
+                          <a:solidFill>
+                            <a:srgbClr val="1D1B43"/>
+                          </a:solidFill>
+                          <a:latin typeface="Calibri"/>
+                        </a:rPr>
+                        <a:t>0</a:t>
+                      </a:r>
+                    </a:p>
+                  </a:txBody>
+                  <a:tcPr>
+                    <a:solidFill>
+                      <a:srgbClr val="FFFFFF"/>
+                    </a:solidFill>
+                  </a:tcPr>
+                </a:tc>
+                <a:tc>
+                  <a:txBody>
+                    <a:bodyPr/>
+                    <a:lstStyle/>
+                    <a:p>
+                      <a:pPr algn="l"/>
+                      <a:r>
+                        <a:rPr sz="1000" b="0">
+                          <a:solidFill>
+                            <a:srgbClr val="1D1B43"/>
+                          </a:solidFill>
+                          <a:latin typeface="Calibri"/>
+                        </a:rPr>
+                        <a:t>100.0%</a:t>
+                      </a:r>
+                    </a:p>
+                  </a:txBody>
+                  <a:tcPr>
+                    <a:solidFill>
+                      <a:srgbClr val="FFFFFF"/>
+                    </a:solidFill>
+                  </a:tcPr>
+                </a:tc>
+                <a:tc>
+                  <a:txBody>
+                    <a:bodyPr/>
+                    <a:lstStyle/>
+                    <a:p>
+                      <a:pPr algn="l"/>
+                      <a:r>
+                        <a:rPr sz="1000" b="0">
+                          <a:solidFill>
+                            <a:srgbClr val="1D1B43"/>
+                          </a:solidFill>
+                          <a:latin typeface="Calibri"/>
+                        </a:rPr>
+                        <a:t>Excelente</a:t>
+                      </a:r>
+                    </a:p>
+                  </a:txBody>
+                  <a:tcPr>
+                    <a:solidFill>
+                      <a:srgbClr val="FFFFFF"/>
+                    </a:solidFill>
+                  </a:tcPr>
+                </a:tc>
+              </a:tr>
+              <a:tr h="457200">
+                <a:tc>
+                  <a:txBody>
+                    <a:bodyPr/>
+                    <a:lstStyle/>
+                    <a:p>
+                      <a:pPr algn="l"/>
+                      <a:r>
+                        <a:rPr sz="1000" b="0">
+                          <a:solidFill>
+                            <a:srgbClr val="1D1B43"/>
+                          </a:solidFill>
+                          <a:latin typeface="Calibri"/>
+                        </a:rPr>
+                        <a:t>PR</a:t>
+                      </a:r>
+                    </a:p>
+                  </a:txBody>
+                  <a:tcPr>
+                    <a:solidFill>
+                      <a:srgbClr val="F2F2F2"/>
+                    </a:solidFill>
+                  </a:tcPr>
+                </a:tc>
+                <a:tc>
+                  <a:txBody>
+                    <a:bodyPr/>
+                    <a:lstStyle/>
+                    <a:p>
+                      <a:pPr algn="l"/>
+                      <a:r>
+                        <a:rPr sz="1000" b="0">
+                          <a:solidFill>
+                            <a:srgbClr val="1D1B43"/>
+                          </a:solidFill>
+                          <a:latin typeface="Calibri"/>
+                        </a:rPr>
+                        <a:t>4</a:t>
+                      </a:r>
+                    </a:p>
+                  </a:txBody>
+                  <a:tcPr>
+                    <a:solidFill>
+                      <a:srgbClr val="F2F2F2"/>
+                    </a:solidFill>
+                  </a:tcPr>
+                </a:tc>
+                <a:tc>
+                  <a:txBody>
+                    <a:bodyPr/>
+                    <a:lstStyle/>
+                    <a:p>
+                      <a:pPr algn="l"/>
+                      <a:r>
+                        <a:rPr sz="1000" b="0">
+                          <a:solidFill>
+                            <a:srgbClr val="1D1B43"/>
+                          </a:solidFill>
+                          <a:latin typeface="Calibri"/>
+                        </a:rPr>
+                        <a:t>4</a:t>
+                      </a:r>
+                    </a:p>
+                  </a:txBody>
+                  <a:tcPr>
+                    <a:solidFill>
+                      <a:srgbClr val="F2F2F2"/>
+                    </a:solidFill>
+                  </a:tcPr>
+                </a:tc>
+                <a:tc>
+                  <a:txBody>
+                    <a:bodyPr/>
+                    <a:lstStyle/>
+                    <a:p>
+                      <a:pPr algn="l"/>
+                      <a:r>
+                        <a:rPr sz="1000" b="0">
+                          <a:solidFill>
+                            <a:srgbClr val="1D1B43"/>
+                          </a:solidFill>
+                          <a:latin typeface="Calibri"/>
+                        </a:rPr>
+                        <a:t>0</a:t>
+                      </a:r>
+                    </a:p>
+                  </a:txBody>
+                  <a:tcPr>
+                    <a:solidFill>
+                      <a:srgbClr val="F2F2F2"/>
+                    </a:solidFill>
+                  </a:tcPr>
+                </a:tc>
+                <a:tc>
+                  <a:txBody>
+                    <a:bodyPr/>
+                    <a:lstStyle/>
+                    <a:p>
+                      <a:pPr algn="l"/>
+                      <a:r>
+                        <a:rPr sz="1000" b="0">
+                          <a:solidFill>
+                            <a:srgbClr val="1D1B43"/>
+                          </a:solidFill>
+                          <a:latin typeface="Calibri"/>
+                        </a:rPr>
+                        <a:t>100.0%</a:t>
+                      </a:r>
+                    </a:p>
+                  </a:txBody>
+                  <a:tcPr>
+                    <a:solidFill>
+                      <a:srgbClr val="F2F2F2"/>
+                    </a:solidFill>
+                  </a:tcPr>
+                </a:tc>
+                <a:tc>
+                  <a:txBody>
+                    <a:bodyPr/>
+                    <a:lstStyle/>
+                    <a:p>
+                      <a:pPr algn="l"/>
+                      <a:r>
+                        <a:rPr sz="1000" b="0">
+                          <a:solidFill>
+                            <a:srgbClr val="1D1B43"/>
+                          </a:solidFill>
+                          <a:latin typeface="Calibri"/>
+                        </a:rPr>
+                        <a:t>Excelente</a:t>
+                      </a:r>
+                    </a:p>
+                  </a:txBody>
+                  <a:tcPr>
+                    <a:solidFill>
+                      <a:srgbClr val="F2F2F2"/>
+                    </a:solidFill>
+                  </a:tcPr>
+                </a:tc>
+              </a:tr>
+              <a:tr h="457200">
+                <a:tc>
+                  <a:txBody>
+                    <a:bodyPr/>
+                    <a:lstStyle/>
+                    <a:p>
+                      <a:pPr algn="l"/>
+                      <a:r>
+                        <a:rPr sz="1000" b="0">
+                          <a:solidFill>
+                            <a:srgbClr val="1D1B43"/>
+                          </a:solidFill>
+                          <a:latin typeface="Calibri"/>
+                        </a:rPr>
+                        <a:t>RS</a:t>
+                      </a:r>
+                    </a:p>
+                  </a:txBody>
+                  <a:tcPr>
+                    <a:solidFill>
+                      <a:srgbClr val="FFFFFF"/>
+                    </a:solidFill>
+                  </a:tcPr>
+                </a:tc>
+                <a:tc>
+                  <a:txBody>
+                    <a:bodyPr/>
+                    <a:lstStyle/>
+                    <a:p>
+                      <a:pPr algn="l"/>
+                      <a:r>
+                        <a:rPr sz="1000" b="0">
+                          <a:solidFill>
+                            <a:srgbClr val="1D1B43"/>
+                          </a:solidFill>
+                          <a:latin typeface="Calibri"/>
+                        </a:rPr>
+                        <a:t>4</a:t>
+                      </a:r>
+                    </a:p>
+                  </a:txBody>
+                  <a:tcPr>
+                    <a:solidFill>
+                      <a:srgbClr val="FFFFFF"/>
+                    </a:solidFill>
+                  </a:tcPr>
+                </a:tc>
+                <a:tc>
+                  <a:txBody>
+                    <a:bodyPr/>
+                    <a:lstStyle/>
+                    <a:p>
+                      <a:pPr algn="l"/>
+                      <a:r>
+                        <a:rPr sz="1000" b="0">
+                          <a:solidFill>
+                            <a:srgbClr val="1D1B43"/>
+                          </a:solidFill>
+                          <a:latin typeface="Calibri"/>
+                        </a:rPr>
+                        <a:t>4</a:t>
+                      </a:r>
+                    </a:p>
+                  </a:txBody>
+                  <a:tcPr>
+                    <a:solidFill>
+                      <a:srgbClr val="FFFFFF"/>
+                    </a:solidFill>
+                  </a:tcPr>
+                </a:tc>
+                <a:tc>
+                  <a:txBody>
+                    <a:bodyPr/>
+                    <a:lstStyle/>
+                    <a:p>
+                      <a:pPr algn="l"/>
+                      <a:r>
+                        <a:rPr sz="1000" b="0">
+                          <a:solidFill>
+                            <a:srgbClr val="1D1B43"/>
+                          </a:solidFill>
+                          <a:latin typeface="Calibri"/>
+                        </a:rPr>
+                        <a:t>0</a:t>
+                      </a:r>
+                    </a:p>
+                  </a:txBody>
+                  <a:tcPr>
+                    <a:solidFill>
+                      <a:srgbClr val="FFFFFF"/>
+                    </a:solidFill>
+                  </a:tcPr>
+                </a:tc>
+                <a:tc>
+                  <a:txBody>
+                    <a:bodyPr/>
+                    <a:lstStyle/>
+                    <a:p>
+                      <a:pPr algn="l"/>
+                      <a:r>
+                        <a:rPr sz="1000" b="0">
+                          <a:solidFill>
+                            <a:srgbClr val="1D1B43"/>
+                          </a:solidFill>
+                          <a:latin typeface="Calibri"/>
+                        </a:rPr>
+                        <a:t>100.0%</a:t>
+                      </a:r>
+                    </a:p>
+                  </a:txBody>
+                  <a:tcPr>
+                    <a:solidFill>
+                      <a:srgbClr val="FFFFFF"/>
+                    </a:solidFill>
+                  </a:tcPr>
+                </a:tc>
+                <a:tc>
+                  <a:txBody>
+                    <a:bodyPr/>
+                    <a:lstStyle/>
+                    <a:p>
+                      <a:pPr algn="l"/>
+                      <a:r>
+                        <a:rPr sz="1000" b="0">
+                          <a:solidFill>
+                            <a:srgbClr val="1D1B43"/>
+                          </a:solidFill>
+                          <a:latin typeface="Calibri"/>
+                        </a:rPr>
+                        <a:t>Excelente</a:t>
+                      </a:r>
+                    </a:p>
+                  </a:txBody>
+                  <a:tcPr>
+                    <a:solidFill>
+                      <a:srgbClr val="FFFFFF"/>
+                    </a:solidFill>
+                  </a:tcPr>
+                </a:tc>
+              </a:tr>
+              <a:tr h="457200">
+                <a:tc>
+                  <a:txBody>
+                    <a:bodyPr/>
+                    <a:lstStyle/>
+                    <a:p>
+                      <a:pPr algn="l"/>
+                      <a:r>
+                        <a:rPr sz="1000" b="0">
+                          <a:solidFill>
+                            <a:srgbClr val="1D1B43"/>
+                          </a:solidFill>
+                          <a:latin typeface="Calibri"/>
+                        </a:rPr>
+                        <a:t>MT</a:t>
+                      </a:r>
+                    </a:p>
+                  </a:txBody>
+                  <a:tcPr>
+                    <a:solidFill>
+                      <a:srgbClr val="F2F2F2"/>
+                    </a:solidFill>
+                  </a:tcPr>
+                </a:tc>
+                <a:tc>
+                  <a:txBody>
+                    <a:bodyPr/>
+                    <a:lstStyle/>
+                    <a:p>
+                      <a:pPr algn="l"/>
+                      <a:r>
+                        <a:rPr sz="1000" b="0">
+                          <a:solidFill>
+                            <a:srgbClr val="1D1B43"/>
+                          </a:solidFill>
+                          <a:latin typeface="Calibri"/>
+                        </a:rPr>
                         <a:t>1</a:t>
                       </a:r>
                     </a:p>
                   </a:txBody>
                   <a:tcPr>
                     <a:solidFill>
-                      <a:srgbClr val="FFFFFF"/>
+                      <a:srgbClr val="F2F2F2"/>
                     </a:solidFill>
                   </a:tcPr>
                 </a:tc>
@@ -6578,7 +6517,7 @@
                   </a:txBody>
                   <a:tcPr>
                     <a:solidFill>
-                      <a:srgbClr val="FFFFFF"/>
+                      <a:srgbClr val="F2F2F2"/>
                     </a:solidFill>
                   </a:tcPr>
                 </a:tc>
@@ -6601,7 +6540,7 @@
                   </a:txBody>
                   <a:tcPr>
                     <a:solidFill>
-                      <a:srgbClr val="FFFFFF"/>
+                      <a:srgbClr val="F2F2F2"/>
                     </a:solidFill>
                   </a:tcPr>
                 </a:tc>
@@ -6624,7 +6563,7 @@
                   </a:txBody>
                   <a:tcPr>
                     <a:solidFill>
-                      <a:srgbClr val="FFFFFF"/>
+                      <a:srgbClr val="F2F2F2"/>
                     </a:solidFill>
                   </a:tcPr>
                 </a:tc>
@@ -6647,7 +6586,7 @@
                   </a:txBody>
                   <a:tcPr>
                     <a:solidFill>
-                      <a:srgbClr val="FFFFFF"/>
+                      <a:srgbClr val="F2F2F2"/>
                     </a:solidFill>
                   </a:tcPr>
                 </a:tc>
@@ -6736,7 +6675,7 @@
                 </a:solidFill>
                 <a:latin typeface="Calibri"/>
               </a:rPr>
-              <a:t>TOP DESTINATARIOS (79 pontos)</a:t>
+              <a:t>TOP DESTINATARIOS (91 pontos)</a:t>
             </a:r>
           </a:p>
         </p:txBody>
@@ -7034,7 +6973,7 @@
                           </a:solidFill>
                           <a:latin typeface="Calibri"/>
                         </a:rPr>
-                        <a:t>36</a:t>
+                        <a:t>42</a:t>
                       </a:r>
                     </a:p>
                   </a:txBody>
@@ -7057,7 +6996,7 @@
                           </a:solidFill>
                           <a:latin typeface="Calibri"/>
                         </a:rPr>
-                        <a:t>33</a:t>
+                        <a:t>42</a:t>
                       </a:r>
                     </a:p>
                   </a:txBody>
@@ -7080,7 +7019,7 @@
                           </a:solidFill>
                           <a:latin typeface="Calibri"/>
                         </a:rPr>
-                        <a:t>3</a:t>
+                        <a:t>0</a:t>
                       </a:r>
                     </a:p>
                   </a:txBody>
@@ -7103,7 +7042,7 @@
                           </a:solidFill>
                           <a:latin typeface="Calibri"/>
                         </a:rPr>
-                        <a:t>91.7%</a:t>
+                        <a:t>100.0%</a:t>
                       </a:r>
                     </a:p>
                   </a:txBody>
@@ -7126,7 +7065,7 @@
                           </a:solidFill>
                           <a:latin typeface="Calibri"/>
                         </a:rPr>
-                        <a:t>Regular</a:t>
+                        <a:t>Excelente</a:t>
                       </a:r>
                     </a:p>
                   </a:txBody>
@@ -7174,7 +7113,7 @@
                           </a:solidFill>
                           <a:latin typeface="Calibri"/>
                         </a:rPr>
-                        <a:t>NAMASTE SERVICOS LTD - SAO PAULO / SP</a:t>
+                        <a:t>SAMSONITE BRASIL LTD - NAVEGANTES / SC</a:t>
                       </a:r>
                     </a:p>
                   </a:txBody>
@@ -7197,7 +7136,7 @@
                           </a:solidFill>
                           <a:latin typeface="Calibri"/>
                         </a:rPr>
-                        <a:t>16</a:t>
+                        <a:t>19</a:t>
                       </a:r>
                     </a:p>
                   </a:txBody>
@@ -7220,7 +7159,7 @@
                           </a:solidFill>
                           <a:latin typeface="Calibri"/>
                         </a:rPr>
-                        <a:t>16</a:t>
+                        <a:t>19</a:t>
                       </a:r>
                     </a:p>
                   </a:txBody>
@@ -7337,7 +7276,7 @@
                           </a:solidFill>
                           <a:latin typeface="Calibri"/>
                         </a:rPr>
-                        <a:t>SAMSONITE DO BRASIL - SAO PAULO / SP</a:t>
+                        <a:t>NAMASTE SERVICOS LTD - SAO PAULO / SP</a:t>
                       </a:r>
                     </a:p>
                   </a:txBody>
@@ -7360,7 +7299,7 @@
                           </a:solidFill>
                           <a:latin typeface="Calibri"/>
                         </a:rPr>
-                        <a:t>8</a:t>
+                        <a:t>15</a:t>
                       </a:r>
                     </a:p>
                   </a:txBody>
@@ -7383,7 +7322,7 @@
                           </a:solidFill>
                           <a:latin typeface="Calibri"/>
                         </a:rPr>
-                        <a:t>8</a:t>
+                        <a:t>15</a:t>
                       </a:r>
                     </a:p>
                   </a:txBody>
@@ -7500,7 +7439,7 @@
                           </a:solidFill>
                           <a:latin typeface="Calibri"/>
                         </a:rPr>
-                        <a:t>GIOVANA S. VIEIRA CO - CAMPINAS / SP</a:t>
+                        <a:t>SAMSONITE DO BRASIL - SAO PAULO / SP</a:t>
                       </a:r>
                     </a:p>
                   </a:txBody>
@@ -7523,7 +7462,7 @@
                           </a:solidFill>
                           <a:latin typeface="Calibri"/>
                         </a:rPr>
-                        <a:t>5</a:t>
+                        <a:t>9</a:t>
                       </a:r>
                     </a:p>
                   </a:txBody>
@@ -7546,7 +7485,7 @@
                           </a:solidFill>
                           <a:latin typeface="Calibri"/>
                         </a:rPr>
-                        <a:t>5</a:t>
+                        <a:t>9</a:t>
                       </a:r>
                     </a:p>
                   </a:txBody>
@@ -7686,7 +7625,7 @@
                           </a:solidFill>
                           <a:latin typeface="Calibri"/>
                         </a:rPr>
-                        <a:t>5</a:t>
+                        <a:t>7</a:t>
                       </a:r>
                     </a:p>
                   </a:txBody>
@@ -7709,7 +7648,7 @@
                           </a:solidFill>
                           <a:latin typeface="Calibri"/>
                         </a:rPr>
-                        <a:t>5</a:t>
+                        <a:t>7</a:t>
                       </a:r>
                     </a:p>
                   </a:txBody>
@@ -7826,7 +7765,7 @@
                           </a:solidFill>
                           <a:latin typeface="Calibri"/>
                         </a:rPr>
-                        <a:t>SAM PRAIA ARTIGOS DE - SANTOS / SP</a:t>
+                        <a:t>SAMSONITE BRASIL LTD - SAO ROQUE / SP</a:t>
                       </a:r>
                     </a:p>
                   </a:txBody>
@@ -7849,7 +7788,7 @@
                           </a:solidFill>
                           <a:latin typeface="Calibri"/>
                         </a:rPr>
-                        <a:t>5</a:t>
+                        <a:t>6</a:t>
                       </a:r>
                     </a:p>
                   </a:txBody>
@@ -7872,7 +7811,7 @@
                           </a:solidFill>
                           <a:latin typeface="Calibri"/>
                         </a:rPr>
-                        <a:t>5</a:t>
+                        <a:t>6</a:t>
                       </a:r>
                     </a:p>
                   </a:txBody>
@@ -7989,7 +7928,7 @@
                           </a:solidFill>
                           <a:latin typeface="Calibri"/>
                         </a:rPr>
-                        <a:t>SATE BALNEA ARTIGOS - BALNEARIO CAMBORIU / SC</a:t>
+                        <a:t>INTERTRAVEL BRASIL C - SAO JOSE DO RIO PRETO / S</a:t>
                       </a:r>
                     </a:p>
                   </a:txBody>
@@ -8012,7 +7951,7 @@
                           </a:solidFill>
                           <a:latin typeface="Calibri"/>
                         </a:rPr>
-                        <a:t>5</a:t>
+                        <a:t>6</a:t>
                       </a:r>
                     </a:p>
                   </a:txBody>
@@ -8035,7 +7974,7 @@
                           </a:solidFill>
                           <a:latin typeface="Calibri"/>
                         </a:rPr>
-                        <a:t>5</a:t>
+                        <a:t>6</a:t>
                       </a:r>
                     </a:p>
                   </a:txBody>
@@ -8152,7 +8091,7 @@
                           </a:solidFill>
                           <a:latin typeface="Calibri"/>
                         </a:rPr>
-                        <a:t>SAMSONITE BRASIL LTD - NAVEGANTES / SC</a:t>
+                        <a:t>SAMSONITE BRASIL LTD - ITUPEVA / SP</a:t>
                       </a:r>
                     </a:p>
                   </a:txBody>
@@ -8175,7 +8114,7 @@
                           </a:solidFill>
                           <a:latin typeface="Calibri"/>
                         </a:rPr>
-                        <a:t>4</a:t>
+                        <a:t>5</a:t>
                       </a:r>
                     </a:p>
                   </a:txBody>
@@ -8198,7 +8137,7 @@
                           </a:solidFill>
                           <a:latin typeface="Calibri"/>
                         </a:rPr>
-                        <a:t>4</a:t>
+                        <a:t>5</a:t>
                       </a:r>
                     </a:p>
                   </a:txBody>
@@ -8315,7 +8254,7 @@
                           </a:solidFill>
                           <a:latin typeface="Calibri"/>
                         </a:rPr>
-                        <a:t>DUFRY DO BRASIL DUTY - GUARULHOS / SP</a:t>
+                        <a:t>GIOVANA S. VIEIRA CO - CAMPINAS / SP</a:t>
                       </a:r>
                     </a:p>
                   </a:txBody>
@@ -8338,7 +8277,7 @@
                           </a:solidFill>
                           <a:latin typeface="Calibri"/>
                         </a:rPr>
-                        <a:t>4</a:t>
+                        <a:t>5</a:t>
                       </a:r>
                     </a:p>
                   </a:txBody>
@@ -8361,7 +8300,7 @@
                           </a:solidFill>
                           <a:latin typeface="Calibri"/>
                         </a:rPr>
-                        <a:t>4</a:t>
+                        <a:t>5</a:t>
                       </a:r>
                     </a:p>
                   </a:txBody>
@@ -8478,7 +8417,7 @@
                           </a:solidFill>
                           <a:latin typeface="Calibri"/>
                         </a:rPr>
-                        <a:t>SAL PIRACICABA ARTIG - PIRACICABA / SP</a:t>
+                        <a:t>SAAM PAULISTA ARTIGO - SAO PAULO / SP</a:t>
                       </a:r>
                     </a:p>
                   </a:txBody>
@@ -8501,7 +8440,7 @@
                           </a:solidFill>
                           <a:latin typeface="Calibri"/>
                         </a:rPr>
-                        <a:t>4</a:t>
+                        <a:t>5</a:t>
                       </a:r>
                     </a:p>
                   </a:txBody>
@@ -8524,7 +8463,7 @@
                           </a:solidFill>
                           <a:latin typeface="Calibri"/>
                         </a:rPr>
-                        <a:t>4</a:t>
+                        <a:t>5</a:t>
                       </a:r>
                     </a:p>
                   </a:txBody>
@@ -8641,7 +8580,7 @@
                           </a:solidFill>
                           <a:latin typeface="Calibri"/>
                         </a:rPr>
-                        <a:t>STE TAMBORE ARTIGOS - BARUERI / SP</a:t>
+                        <a:t>SAMITT JARDIM ARTIGO - SAO PAULO / SP</a:t>
                       </a:r>
                     </a:p>
                   </a:txBody>
@@ -8664,7 +8603,7 @@
                           </a:solidFill>
                           <a:latin typeface="Calibri"/>
                         </a:rPr>
-                        <a:t>4</a:t>
+                        <a:t>5</a:t>
                       </a:r>
                     </a:p>
                   </a:txBody>
@@ -8687,7 +8626,7 @@
                           </a:solidFill>
                           <a:latin typeface="Calibri"/>
                         </a:rPr>
-                        <a:t>4</a:t>
+                        <a:t>5</a:t>
                       </a:r>
                     </a:p>
                   </a:txBody>
@@ -8827,7 +8766,7 @@
                           </a:solidFill>
                           <a:latin typeface="Calibri"/>
                         </a:rPr>
-                        <a:t>4</a:t>
+                        <a:t>5</a:t>
                       </a:r>
                     </a:p>
                   </a:txBody>
@@ -8850,7 +8789,7 @@
                           </a:solidFill>
                           <a:latin typeface="Calibri"/>
                         </a:rPr>
-                        <a:t>4</a:t>
+                        <a:t>5</a:t>
                       </a:r>
                     </a:p>
                   </a:txBody>
@@ -8967,7 +8906,7 @@
                           </a:solidFill>
                           <a:latin typeface="Calibri"/>
                         </a:rPr>
-                        <a:t>SAAM PAULISTA ARTIGO - SAO PAULO / SP</a:t>
+                        <a:t>NOVA TK CENTER COURO - SAO PAULO / SP</a:t>
                       </a:r>
                     </a:p>
                   </a:txBody>
@@ -8990,7 +8929,7 @@
                           </a:solidFill>
                           <a:latin typeface="Calibri"/>
                         </a:rPr>
-                        <a:t>4</a:t>
+                        <a:t>5</a:t>
                       </a:r>
                     </a:p>
                   </a:txBody>
@@ -9013,7 +8952,7 @@
                           </a:solidFill>
                           <a:latin typeface="Calibri"/>
                         </a:rPr>
-                        <a:t>4</a:t>
+                        <a:t>5</a:t>
                       </a:r>
                     </a:p>
                   </a:txBody>
@@ -9130,7 +9069,7 @@
                           </a:solidFill>
                           <a:latin typeface="Calibri"/>
                         </a:rPr>
-                        <a:t>SAMITT JARDIM ARTIGO - SAO PAULO / SP</a:t>
+                        <a:t>TRIESTE COMERCIO DE - FLORIANOPOLIS / SC</a:t>
                       </a:r>
                     </a:p>
                   </a:txBody>
@@ -9153,7 +9092,7 @@
                           </a:solidFill>
                           <a:latin typeface="Calibri"/>
                         </a:rPr>
-                        <a:t>4</a:t>
+                        <a:t>5</a:t>
                       </a:r>
                     </a:p>
                   </a:txBody>
@@ -9176,7 +9115,7 @@
                           </a:solidFill>
                           <a:latin typeface="Calibri"/>
                         </a:rPr>
-                        <a:t>4</a:t>
+                        <a:t>5</a:t>
                       </a:r>
                     </a:p>
                   </a:txBody>

--- a/SAMSONITE_BRASIL_LTDA.pptx
+++ b/SAMSONITE_BRASIL_LTDA.pptx
@@ -143,10 +143,13 @@
           </c:spPr>
           <c:cat>
             <c:strRef>
-              <c:f>Sheet1!$A$2:$A$2</c:f>
+              <c:f>Sheet1!$A$2:$A$3</c:f>
               <c:strCache>
-                <c:ptCount val="1"/>
+                <c:ptCount val="2"/>
                 <c:pt idx="0">
+                  <c:v>Maio 2026</c:v>
+                </c:pt>
+                <c:pt idx="1">
                   <c:v>Abril 2026</c:v>
                 </c:pt>
               </c:strCache>
@@ -154,11 +157,14 @@
           </c:cat>
           <c:val>
             <c:numRef>
-              <c:f>Sheet1!$B$2:$B$2</c:f>
+              <c:f>Sheet1!$B$2:$B$3</c:f>
               <c:numCache>
                 <c:formatCode>General</c:formatCode>
-                <c:ptCount val="1"/>
+                <c:ptCount val="2"/>
                 <c:pt idx="0">
+                  <c:v>187</c:v>
+                </c:pt>
+                <c:pt idx="1">
                   <c:v>244</c:v>
                 </c:pt>
               </c:numCache>
@@ -186,10 +192,13 @@
           </c:spPr>
           <c:cat>
             <c:strRef>
-              <c:f>Sheet1!$A$2:$A$2</c:f>
+              <c:f>Sheet1!$A$2:$A$3</c:f>
               <c:strCache>
-                <c:ptCount val="1"/>
+                <c:ptCount val="2"/>
                 <c:pt idx="0">
+                  <c:v>Maio 2026</c:v>
+                </c:pt>
+                <c:pt idx="1">
                   <c:v>Abril 2026</c:v>
                 </c:pt>
               </c:strCache>
@@ -197,11 +206,14 @@
           </c:cat>
           <c:val>
             <c:numRef>
-              <c:f>Sheet1!$C$2:$C$2</c:f>
+              <c:f>Sheet1!$C$2:$C$3</c:f>
               <c:numCache>
                 <c:formatCode>General</c:formatCode>
-                <c:ptCount val="1"/>
+                <c:ptCount val="2"/>
                 <c:pt idx="0">
+                  <c:v>6</c:v>
+                </c:pt>
+                <c:pt idx="1">
                   <c:v>1</c:v>
                 </c:pt>
               </c:numCache>
@@ -4142,7 +4154,7 @@
                           </a:solidFill>
                           <a:latin typeface="Calibri"/>
                         </a:rPr>
-                        <a:t>Marco 2026</a:t>
+                        <a:t>Maio 2026</a:t>
                       </a:r>
                     </a:p>
                   </a:txBody>
@@ -4236,7 +4248,7 @@
                           </a:solidFill>
                           <a:latin typeface="Calibri"/>
                         </a:rPr>
-                        <a:t>-</a:t>
+                        <a:t>193</a:t>
                       </a:r>
                     </a:p>
                   </a:txBody>
@@ -4282,7 +4294,7 @@
                           </a:solidFill>
                           <a:latin typeface="Calibri"/>
                         </a:rPr>
-                        <a:t>-</a:t>
+                        <a:t>+ 52</a:t>
                       </a:r>
                     </a:p>
                   </a:txBody>
@@ -4330,7 +4342,7 @@
                           </a:solidFill>
                           <a:latin typeface="Calibri"/>
                         </a:rPr>
-                        <a:t>-</a:t>
+                        <a:t>187</a:t>
                       </a:r>
                     </a:p>
                   </a:txBody>
@@ -4376,7 +4388,7 @@
                           </a:solidFill>
                           <a:latin typeface="Calibri"/>
                         </a:rPr>
-                        <a:t>-</a:t>
+                        <a:t>+ 57</a:t>
                       </a:r>
                     </a:p>
                   </a:txBody>
@@ -4424,7 +4436,7 @@
                           </a:solidFill>
                           <a:latin typeface="Calibri"/>
                         </a:rPr>
-                        <a:t>-</a:t>
+                        <a:t>6</a:t>
                       </a:r>
                     </a:p>
                   </a:txBody>
@@ -4470,7 +4482,7 @@
                           </a:solidFill>
                           <a:latin typeface="Calibri"/>
                         </a:rPr>
-                        <a:t>-</a:t>
+                        <a:t>- 5</a:t>
                       </a:r>
                     </a:p>
                   </a:txBody>
@@ -4518,7 +4530,7 @@
                           </a:solidFill>
                           <a:latin typeface="Calibri"/>
                         </a:rPr>
-                        <a:t>-</a:t>
+                        <a:t>96.9%</a:t>
                       </a:r>
                     </a:p>
                   </a:txBody>
@@ -4564,7 +4576,7 @@
                           </a:solidFill>
                           <a:latin typeface="Calibri"/>
                         </a:rPr>
-                        <a:t>-</a:t>
+                        <a:t>+ 2.7pp</a:t>
                       </a:r>
                     </a:p>
                   </a:txBody>
@@ -4735,7 +4747,7 @@
         </p:nvGraphicFramePr>
         <p:xfrm>
           <a:off x="7955279" y="2286000"/>
-          <a:ext cx="4480560" cy="877824"/>
+          <a:ext cx="4480560" cy="1316736"/>
         </p:xfrm>
         <a:graphic>
           <a:graphicData uri="http://schemas.openxmlformats.org/drawingml/2006/table">
@@ -4881,13 +4893,130 @@
                           </a:solidFill>
                           <a:latin typeface="Calibri"/>
                         </a:rPr>
+                        <a:t>Maio 2026</a:t>
+                      </a:r>
+                    </a:p>
+                  </a:txBody>
+                  <a:tcPr>
+                    <a:solidFill>
+                      <a:srgbClr val="FFFFFF"/>
+                    </a:solidFill>
+                  </a:tcPr>
+                </a:tc>
+                <a:tc>
+                  <a:txBody>
+                    <a:bodyPr/>
+                    <a:lstStyle/>
+                    <a:p>
+                      <a:pPr algn="l"/>
+                      <a:r>
+                        <a:rPr sz="1000" b="0">
+                          <a:solidFill>
+                            <a:srgbClr val="1D1B43"/>
+                          </a:solidFill>
+                          <a:latin typeface="Calibri"/>
+                        </a:rPr>
+                        <a:t>193</a:t>
+                      </a:r>
+                    </a:p>
+                  </a:txBody>
+                  <a:tcPr>
+                    <a:solidFill>
+                      <a:srgbClr val="FFFFFF"/>
+                    </a:solidFill>
+                  </a:tcPr>
+                </a:tc>
+                <a:tc>
+                  <a:txBody>
+                    <a:bodyPr/>
+                    <a:lstStyle/>
+                    <a:p>
+                      <a:pPr algn="l"/>
+                      <a:r>
+                        <a:rPr sz="1000" b="0">
+                          <a:solidFill>
+                            <a:srgbClr val="1D1B43"/>
+                          </a:solidFill>
+                          <a:latin typeface="Calibri"/>
+                        </a:rPr>
+                        <a:t>187</a:t>
+                      </a:r>
+                    </a:p>
+                  </a:txBody>
+                  <a:tcPr>
+                    <a:solidFill>
+                      <a:srgbClr val="FFFFFF"/>
+                    </a:solidFill>
+                  </a:tcPr>
+                </a:tc>
+                <a:tc>
+                  <a:txBody>
+                    <a:bodyPr/>
+                    <a:lstStyle/>
+                    <a:p>
+                      <a:pPr algn="l"/>
+                      <a:r>
+                        <a:rPr sz="1000" b="0">
+                          <a:solidFill>
+                            <a:srgbClr val="1D1B43"/>
+                          </a:solidFill>
+                          <a:latin typeface="Calibri"/>
+                        </a:rPr>
+                        <a:t>6</a:t>
+                      </a:r>
+                    </a:p>
+                  </a:txBody>
+                  <a:tcPr>
+                    <a:solidFill>
+                      <a:srgbClr val="FFFFFF"/>
+                    </a:solidFill>
+                  </a:tcPr>
+                </a:tc>
+                <a:tc>
+                  <a:txBody>
+                    <a:bodyPr/>
+                    <a:lstStyle/>
+                    <a:p>
+                      <a:pPr algn="l"/>
+                      <a:r>
+                        <a:rPr sz="1000" b="0">
+                          <a:solidFill>
+                            <a:srgbClr val="1D1B43"/>
+                          </a:solidFill>
+                          <a:latin typeface="Calibri"/>
+                        </a:rPr>
+                        <a:t>96.9%</a:t>
+                      </a:r>
+                    </a:p>
+                  </a:txBody>
+                  <a:tcPr>
+                    <a:solidFill>
+                      <a:srgbClr val="FFFFFF"/>
+                    </a:solidFill>
+                  </a:tcPr>
+                </a:tc>
+              </a:tr>
+              <a:tr h="438912">
+                <a:tc>
+                  <a:txBody>
+                    <a:bodyPr/>
+                    <a:lstStyle/>
+                    <a:p>
+                      <a:pPr algn="l"/>
+                      <a:r>
+                        <a:rPr sz="1000" b="0">
+                          <a:solidFill>
+                            <a:srgbClr val="1D1B43"/>
+                          </a:solidFill>
+                          <a:latin typeface="Calibri"/>
+                        </a:rPr>
                         <a:t>Abril 2026</a:t>
                       </a:r>
                     </a:p>
                   </a:txBody>
                   <a:tcPr>
                     <a:solidFill>
-                      <a:srgbClr val="FFFFFF"/>
+                      <a:srgbClr val="F2F2F2"/>
                     </a:solidFill>
                   </a:tcPr>
                 </a:tc>
@@ -4910,7 +5039,7 @@
                   </a:txBody>
                   <a:tcPr>
                     <a:solidFill>
-                      <a:srgbClr val="FFFFFF"/>
+                      <a:srgbClr val="F2F2F2"/>
                     </a:solidFill>
                   </a:tcPr>
                 </a:tc>
@@ -4933,7 +5062,7 @@
                   </a:txBody>
                   <a:tcPr>
                     <a:solidFill>
-                      <a:srgbClr val="FFFFFF"/>
+                      <a:srgbClr val="F2F2F2"/>
                     </a:solidFill>
                   </a:tcPr>
                 </a:tc>
@@ -4956,7 +5085,7 @@
                   </a:txBody>
                   <a:tcPr>
                     <a:solidFill>
-                      <a:srgbClr val="FFFFFF"/>
+                      <a:srgbClr val="F2F2F2"/>
                     </a:solidFill>
                   </a:tcPr>
                 </a:tc>
@@ -4979,7 +5108,7 @@
                   </a:txBody>
                   <a:tcPr>
                     <a:solidFill>
-                      <a:srgbClr val="FFFFFF"/>
+                      <a:srgbClr val="F2F2F2"/>
                     </a:solidFill>
                   </a:tcPr>
                 </a:tc>

--- a/SAMSONITE_BRASIL_LTDA.pptx
+++ b/SAMSONITE_BRASIL_LTDA.pptx
@@ -162,7 +162,7 @@
                 <c:formatCode>General</c:formatCode>
                 <c:ptCount val="2"/>
                 <c:pt idx="0">
-                  <c:v>187</c:v>
+                  <c:v>233</c:v>
                 </c:pt>
                 <c:pt idx="1">
                   <c:v>244</c:v>
@@ -211,7 +211,7 @@
                 <c:formatCode>General</c:formatCode>
                 <c:ptCount val="2"/>
                 <c:pt idx="0">
-                  <c:v>6</c:v>
+                  <c:v>14</c:v>
                 </c:pt>
                 <c:pt idx="1">
                   <c:v>1</c:v>
@@ -4248,7 +4248,7 @@
                           </a:solidFill>
                           <a:latin typeface="Calibri"/>
                         </a:rPr>
-                        <a:t>193</a:t>
+                        <a:t>247</a:t>
                       </a:r>
                     </a:p>
                   </a:txBody>
@@ -4294,7 +4294,7 @@
                           </a:solidFill>
                           <a:latin typeface="Calibri"/>
                         </a:rPr>
-                        <a:t>+ 52</a:t>
+                        <a:t>- 2</a:t>
                       </a:r>
                     </a:p>
                   </a:txBody>
@@ -4342,7 +4342,7 @@
                           </a:solidFill>
                           <a:latin typeface="Calibri"/>
                         </a:rPr>
-                        <a:t>187</a:t>
+                        <a:t>233</a:t>
                       </a:r>
                     </a:p>
                   </a:txBody>
@@ -4388,7 +4388,7 @@
                           </a:solidFill>
                           <a:latin typeface="Calibri"/>
                         </a:rPr>
-                        <a:t>+ 57</a:t>
+                        <a:t>+ 11</a:t>
                       </a:r>
                     </a:p>
                   </a:txBody>
@@ -4436,7 +4436,7 @@
                           </a:solidFill>
                           <a:latin typeface="Calibri"/>
                         </a:rPr>
-                        <a:t>6</a:t>
+                        <a:t>14</a:t>
                       </a:r>
                     </a:p>
                   </a:txBody>
@@ -4482,7 +4482,7 @@
                           </a:solidFill>
                           <a:latin typeface="Calibri"/>
                         </a:rPr>
-                        <a:t>- 5</a:t>
+                        <a:t>- 13</a:t>
                       </a:r>
                     </a:p>
                   </a:txBody>
@@ -4530,7 +4530,7 @@
                           </a:solidFill>
                           <a:latin typeface="Calibri"/>
                         </a:rPr>
-                        <a:t>96.9%</a:t>
+                        <a:t>94.3%</a:t>
                       </a:r>
                     </a:p>
                   </a:txBody>
@@ -4576,7 +4576,7 @@
                           </a:solidFill>
                           <a:latin typeface="Calibri"/>
                         </a:rPr>
-                        <a:t>+ 2.7pp</a:t>
+                        <a:t>+ 5.3pp</a:t>
                       </a:r>
                     </a:p>
                   </a:txBody>
@@ -4916,7 +4916,7 @@
                           </a:solidFill>
                           <a:latin typeface="Calibri"/>
                         </a:rPr>
-                        <a:t>193</a:t>
+                        <a:t>247</a:t>
                       </a:r>
                     </a:p>
                   </a:txBody>
@@ -4939,7 +4939,7 @@
                           </a:solidFill>
                           <a:latin typeface="Calibri"/>
                         </a:rPr>
-                        <a:t>187</a:t>
+                        <a:t>233</a:t>
                       </a:r>
                     </a:p>
                   </a:txBody>
@@ -4962,7 +4962,7 @@
                           </a:solidFill>
                           <a:latin typeface="Calibri"/>
                         </a:rPr>
-                        <a:t>6</a:t>
+                        <a:t>14</a:t>
                       </a:r>
                     </a:p>
                   </a:txBody>
@@ -4985,7 +4985,7 @@
                           </a:solidFill>
                           <a:latin typeface="Calibri"/>
                         </a:rPr>
-                        <a:t>96.9%</a:t>
+                        <a:t>94.3%</a:t>
                       </a:r>
                     </a:p>
                   </a:txBody>

--- a/SAMSONITE_BRASIL_LTDA.pptx
+++ b/SAMSONITE_BRASIL_LTDA.pptx
@@ -147,10 +147,10 @@
               <c:strCache>
                 <c:ptCount val="2"/>
                 <c:pt idx="0">
-                  <c:v>Maio 2026</c:v>
+                  <c:v>Abril 2026</c:v>
                 </c:pt>
                 <c:pt idx="1">
-                  <c:v>Abril 2026</c:v>
+                  <c:v>Maio 2026</c:v>
                 </c:pt>
               </c:strCache>
             </c:strRef>
@@ -162,10 +162,10 @@
                 <c:formatCode>General</c:formatCode>
                 <c:ptCount val="2"/>
                 <c:pt idx="0">
-                  <c:v>233</c:v>
+                  <c:v>244</c:v>
                 </c:pt>
                 <c:pt idx="1">
-                  <c:v>244</c:v>
+                  <c:v>302</c:v>
                 </c:pt>
               </c:numCache>
             </c:numRef>
@@ -196,10 +196,10 @@
               <c:strCache>
                 <c:ptCount val="2"/>
                 <c:pt idx="0">
-                  <c:v>Maio 2026</c:v>
+                  <c:v>Abril 2026</c:v>
                 </c:pt>
                 <c:pt idx="1">
-                  <c:v>Abril 2026</c:v>
+                  <c:v>Maio 2026</c:v>
                 </c:pt>
               </c:strCache>
             </c:strRef>
@@ -211,10 +211,10 @@
                 <c:formatCode>General</c:formatCode>
                 <c:ptCount val="2"/>
                 <c:pt idx="0">
-                  <c:v>14</c:v>
+                  <c:v>1</c:v>
                 </c:pt>
                 <c:pt idx="1">
-                  <c:v>1</c:v>
+                  <c:v>16</c:v>
                 </c:pt>
               </c:numCache>
             </c:numRef>
@@ -3387,7 +3387,7 @@
                 </a:solidFill>
                 <a:latin typeface="Calibri"/>
               </a:rPr>
-              <a:t>INDICADORES ABRIL 2026</a:t>
+              <a:t>INDICADORES MAIO 2026</a:t>
             </a:r>
           </a:p>
         </p:txBody>
@@ -3708,7 +3708,7 @@
                 </a:solidFill>
                 <a:latin typeface="Calibri"/>
               </a:rPr>
-              <a:t>245</a:t>
+              <a:t>318</a:t>
             </a:r>
           </a:p>
         </p:txBody>
@@ -3823,7 +3823,7 @@
                 </a:solidFill>
                 <a:latin typeface="Calibri"/>
               </a:rPr>
-              <a:t>244</a:t>
+              <a:t>302</a:t>
             </a:r>
           </a:p>
         </p:txBody>
@@ -3938,7 +3938,7 @@
                 </a:solidFill>
                 <a:latin typeface="Calibri"/>
               </a:rPr>
-              <a:t>1</a:t>
+              <a:t>16</a:t>
             </a:r>
           </a:p>
         </p:txBody>
@@ -4049,11 +4049,11 @@
             <a:r>
               <a:rPr sz="2800" b="1">
                 <a:solidFill>
-                  <a:srgbClr val="10B981"/>
+                  <a:srgbClr val="F59E0B"/>
                 </a:solidFill>
                 <a:latin typeface="Calibri"/>
               </a:rPr>
-              <a:t>99.6%</a:t>
+              <a:t>95.0%</a:t>
             </a:r>
           </a:p>
         </p:txBody>
@@ -4154,30 +4154,30 @@
                           </a:solidFill>
                           <a:latin typeface="Calibri"/>
                         </a:rPr>
+                        <a:t>Abril 2026</a:t>
+                      </a:r>
+                    </a:p>
+                  </a:txBody>
+                  <a:tcPr>
+                    <a:solidFill>
+                      <a:srgbClr val="1D1B43"/>
+                    </a:solidFill>
+                  </a:tcPr>
+                </a:tc>
+                <a:tc>
+                  <a:txBody>
+                    <a:bodyPr/>
+                    <a:lstStyle/>
+                    <a:p>
+                      <a:pPr algn="ctr"/>
+                      <a:r>
+                        <a:rPr sz="1100" b="1">
+                          <a:solidFill>
+                            <a:srgbClr val="FFFFFF"/>
+                          </a:solidFill>
+                          <a:latin typeface="Calibri"/>
+                        </a:rPr>
                         <a:t>Maio 2026</a:t>
-                      </a:r>
-                    </a:p>
-                  </a:txBody>
-                  <a:tcPr>
-                    <a:solidFill>
-                      <a:srgbClr val="1D1B43"/>
-                    </a:solidFill>
-                  </a:tcPr>
-                </a:tc>
-                <a:tc>
-                  <a:txBody>
-                    <a:bodyPr/>
-                    <a:lstStyle/>
-                    <a:p>
-                      <a:pPr algn="ctr"/>
-                      <a:r>
-                        <a:rPr sz="1100" b="1">
-                          <a:solidFill>
-                            <a:srgbClr val="FFFFFF"/>
-                          </a:solidFill>
-                          <a:latin typeface="Calibri"/>
-                        </a:rPr>
-                        <a:t>Abril 2026</a:t>
                       </a:r>
                     </a:p>
                   </a:txBody>
@@ -4248,29 +4248,6 @@
                           </a:solidFill>
                           <a:latin typeface="Calibri"/>
                         </a:rPr>
-                        <a:t>247</a:t>
-                      </a:r>
-                    </a:p>
-                  </a:txBody>
-                  <a:tcPr>
-                    <a:solidFill>
-                      <a:srgbClr val="FFFFFF"/>
-                    </a:solidFill>
-                  </a:tcPr>
-                </a:tc>
-                <a:tc>
-                  <a:txBody>
-                    <a:bodyPr/>
-                    <a:lstStyle/>
-                    <a:p>
-                      <a:pPr algn="l"/>
-                      <a:r>
-                        <a:rPr sz="1000" b="0">
-                          <a:solidFill>
-                            <a:srgbClr val="1D1B43"/>
-                          </a:solidFill>
-                          <a:latin typeface="Calibri"/>
-                        </a:rPr>
                         <a:t>245</a:t>
                       </a:r>
                     </a:p>
@@ -4294,7 +4271,30 @@
                           </a:solidFill>
                           <a:latin typeface="Calibri"/>
                         </a:rPr>
-                        <a:t>- 2</a:t>
+                        <a:t>318</a:t>
+                      </a:r>
+                    </a:p>
+                  </a:txBody>
+                  <a:tcPr>
+                    <a:solidFill>
+                      <a:srgbClr val="FFFFFF"/>
+                    </a:solidFill>
+                  </a:tcPr>
+                </a:tc>
+                <a:tc>
+                  <a:txBody>
+                    <a:bodyPr/>
+                    <a:lstStyle/>
+                    <a:p>
+                      <a:pPr algn="l"/>
+                      <a:r>
+                        <a:rPr sz="1000" b="0">
+                          <a:solidFill>
+                            <a:srgbClr val="1D1B43"/>
+                          </a:solidFill>
+                          <a:latin typeface="Calibri"/>
+                        </a:rPr>
+                        <a:t>+ 73</a:t>
                       </a:r>
                     </a:p>
                   </a:txBody>
@@ -4342,7 +4342,7 @@
                           </a:solidFill>
                           <a:latin typeface="Calibri"/>
                         </a:rPr>
-                        <a:t>233</a:t>
+                        <a:t>244</a:t>
                       </a:r>
                     </a:p>
                   </a:txBody>
@@ -4365,7 +4365,7 @@
                           </a:solidFill>
                           <a:latin typeface="Calibri"/>
                         </a:rPr>
-                        <a:t>244</a:t>
+                        <a:t>302</a:t>
                       </a:r>
                     </a:p>
                   </a:txBody>
@@ -4388,7 +4388,7 @@
                           </a:solidFill>
                           <a:latin typeface="Calibri"/>
                         </a:rPr>
-                        <a:t>+ 11</a:t>
+                        <a:t>+ 58</a:t>
                       </a:r>
                     </a:p>
                   </a:txBody>
@@ -4436,29 +4436,6 @@
                           </a:solidFill>
                           <a:latin typeface="Calibri"/>
                         </a:rPr>
-                        <a:t>14</a:t>
-                      </a:r>
-                    </a:p>
-                  </a:txBody>
-                  <a:tcPr>
-                    <a:solidFill>
-                      <a:srgbClr val="FFFFFF"/>
-                    </a:solidFill>
-                  </a:tcPr>
-                </a:tc>
-                <a:tc>
-                  <a:txBody>
-                    <a:bodyPr/>
-                    <a:lstStyle/>
-                    <a:p>
-                      <a:pPr algn="l"/>
-                      <a:r>
-                        <a:rPr sz="1000" b="0">
-                          <a:solidFill>
-                            <a:srgbClr val="1D1B43"/>
-                          </a:solidFill>
-                          <a:latin typeface="Calibri"/>
-                        </a:rPr>
                         <a:t>1</a:t>
                       </a:r>
                     </a:p>
@@ -4482,7 +4459,30 @@
                           </a:solidFill>
                           <a:latin typeface="Calibri"/>
                         </a:rPr>
-                        <a:t>- 13</a:t>
+                        <a:t>16</a:t>
+                      </a:r>
+                    </a:p>
+                  </a:txBody>
+                  <a:tcPr>
+                    <a:solidFill>
+                      <a:srgbClr val="FFFFFF"/>
+                    </a:solidFill>
+                  </a:tcPr>
+                </a:tc>
+                <a:tc>
+                  <a:txBody>
+                    <a:bodyPr/>
+                    <a:lstStyle/>
+                    <a:p>
+                      <a:pPr algn="l"/>
+                      <a:r>
+                        <a:rPr sz="1000" b="0">
+                          <a:solidFill>
+                            <a:srgbClr val="1D1B43"/>
+                          </a:solidFill>
+                          <a:latin typeface="Calibri"/>
+                        </a:rPr>
+                        <a:t>+ 15</a:t>
                       </a:r>
                     </a:p>
                   </a:txBody>
@@ -4530,7 +4530,7 @@
                           </a:solidFill>
                           <a:latin typeface="Calibri"/>
                         </a:rPr>
-                        <a:t>94.3%</a:t>
+                        <a:t>99.6%</a:t>
                       </a:r>
                     </a:p>
                   </a:txBody>
@@ -4553,7 +4553,7 @@
                           </a:solidFill>
                           <a:latin typeface="Calibri"/>
                         </a:rPr>
-                        <a:t>99.6%</a:t>
+                        <a:t>95.0%</a:t>
                       </a:r>
                     </a:p>
                   </a:txBody>
@@ -4576,7 +4576,7 @@
                           </a:solidFill>
                           <a:latin typeface="Calibri"/>
                         </a:rPr>
-                        <a:t>+ 5.3pp</a:t>
+                        <a:t>- 4.6pp</a:t>
                       </a:r>
                     </a:p>
                   </a:txBody>
@@ -4893,99 +4893,99 @@
                           </a:solidFill>
                           <a:latin typeface="Calibri"/>
                         </a:rPr>
-                        <a:t>Maio 2026</a:t>
-                      </a:r>
-                    </a:p>
-                  </a:txBody>
-                  <a:tcPr>
-                    <a:solidFill>
-                      <a:srgbClr val="FFFFFF"/>
-                    </a:solidFill>
-                  </a:tcPr>
-                </a:tc>
-                <a:tc>
-                  <a:txBody>
-                    <a:bodyPr/>
-                    <a:lstStyle/>
-                    <a:p>
-                      <a:pPr algn="l"/>
-                      <a:r>
-                        <a:rPr sz="1000" b="0">
-                          <a:solidFill>
-                            <a:srgbClr val="1D1B43"/>
-                          </a:solidFill>
-                          <a:latin typeface="Calibri"/>
-                        </a:rPr>
-                        <a:t>247</a:t>
-                      </a:r>
-                    </a:p>
-                  </a:txBody>
-                  <a:tcPr>
-                    <a:solidFill>
-                      <a:srgbClr val="FFFFFF"/>
-                    </a:solidFill>
-                  </a:tcPr>
-                </a:tc>
-                <a:tc>
-                  <a:txBody>
-                    <a:bodyPr/>
-                    <a:lstStyle/>
-                    <a:p>
-                      <a:pPr algn="l"/>
-                      <a:r>
-                        <a:rPr sz="1000" b="0">
-                          <a:solidFill>
-                            <a:srgbClr val="1D1B43"/>
-                          </a:solidFill>
-                          <a:latin typeface="Calibri"/>
-                        </a:rPr>
-                        <a:t>233</a:t>
-                      </a:r>
-                    </a:p>
-                  </a:txBody>
-                  <a:tcPr>
-                    <a:solidFill>
-                      <a:srgbClr val="FFFFFF"/>
-                    </a:solidFill>
-                  </a:tcPr>
-                </a:tc>
-                <a:tc>
-                  <a:txBody>
-                    <a:bodyPr/>
-                    <a:lstStyle/>
-                    <a:p>
-                      <a:pPr algn="l"/>
-                      <a:r>
-                        <a:rPr sz="1000" b="0">
-                          <a:solidFill>
-                            <a:srgbClr val="1D1B43"/>
-                          </a:solidFill>
-                          <a:latin typeface="Calibri"/>
-                        </a:rPr>
-                        <a:t>14</a:t>
-                      </a:r>
-                    </a:p>
-                  </a:txBody>
-                  <a:tcPr>
-                    <a:solidFill>
-                      <a:srgbClr val="FFFFFF"/>
-                    </a:solidFill>
-                  </a:tcPr>
-                </a:tc>
-                <a:tc>
-                  <a:txBody>
-                    <a:bodyPr/>
-                    <a:lstStyle/>
-                    <a:p>
-                      <a:pPr algn="l"/>
-                      <a:r>
-                        <a:rPr sz="1000" b="0">
-                          <a:solidFill>
-                            <a:srgbClr val="1D1B43"/>
-                          </a:solidFill>
-                          <a:latin typeface="Calibri"/>
-                        </a:rPr>
-                        <a:t>94.3%</a:t>
+                        <a:t>Abril 2026</a:t>
+                      </a:r>
+                    </a:p>
+                  </a:txBody>
+                  <a:tcPr>
+                    <a:solidFill>
+                      <a:srgbClr val="FFFFFF"/>
+                    </a:solidFill>
+                  </a:tcPr>
+                </a:tc>
+                <a:tc>
+                  <a:txBody>
+                    <a:bodyPr/>
+                    <a:lstStyle/>
+                    <a:p>
+                      <a:pPr algn="l"/>
+                      <a:r>
+                        <a:rPr sz="1000" b="0">
+                          <a:solidFill>
+                            <a:srgbClr val="1D1B43"/>
+                          </a:solidFill>
+                          <a:latin typeface="Calibri"/>
+                        </a:rPr>
+                        <a:t>245</a:t>
+                      </a:r>
+                    </a:p>
+                  </a:txBody>
+                  <a:tcPr>
+                    <a:solidFill>
+                      <a:srgbClr val="FFFFFF"/>
+                    </a:solidFill>
+                  </a:tcPr>
+                </a:tc>
+                <a:tc>
+                  <a:txBody>
+                    <a:bodyPr/>
+                    <a:lstStyle/>
+                    <a:p>
+                      <a:pPr algn="l"/>
+                      <a:r>
+                        <a:rPr sz="1000" b="0">
+                          <a:solidFill>
+                            <a:srgbClr val="1D1B43"/>
+                          </a:solidFill>
+                          <a:latin typeface="Calibri"/>
+                        </a:rPr>
+                        <a:t>244</a:t>
+                      </a:r>
+                    </a:p>
+                  </a:txBody>
+                  <a:tcPr>
+                    <a:solidFill>
+                      <a:srgbClr val="FFFFFF"/>
+                    </a:solidFill>
+                  </a:tcPr>
+                </a:tc>
+                <a:tc>
+                  <a:txBody>
+                    <a:bodyPr/>
+                    <a:lstStyle/>
+                    <a:p>
+                      <a:pPr algn="l"/>
+                      <a:r>
+                        <a:rPr sz="1000" b="0">
+                          <a:solidFill>
+                            <a:srgbClr val="1D1B43"/>
+                          </a:solidFill>
+                          <a:latin typeface="Calibri"/>
+                        </a:rPr>
+                        <a:t>1</a:t>
+                      </a:r>
+                    </a:p>
+                  </a:txBody>
+                  <a:tcPr>
+                    <a:solidFill>
+                      <a:srgbClr val="FFFFFF"/>
+                    </a:solidFill>
+                  </a:tcPr>
+                </a:tc>
+                <a:tc>
+                  <a:txBody>
+                    <a:bodyPr/>
+                    <a:lstStyle/>
+                    <a:p>
+                      <a:pPr algn="l"/>
+                      <a:r>
+                        <a:rPr sz="1000" b="0">
+                          <a:solidFill>
+                            <a:srgbClr val="1D1B43"/>
+                          </a:solidFill>
+                          <a:latin typeface="Calibri"/>
+                        </a:rPr>
+                        <a:t>99.6%</a:t>
                       </a:r>
                     </a:p>
                   </a:txBody>
@@ -5010,7 +5010,7 @@
                           </a:solidFill>
                           <a:latin typeface="Calibri"/>
                         </a:rPr>
-                        <a:t>Abril 2026</a:t>
+                        <a:t>Maio 2026</a:t>
                       </a:r>
                     </a:p>
                   </a:txBody>
@@ -5033,7 +5033,7 @@
                           </a:solidFill>
                           <a:latin typeface="Calibri"/>
                         </a:rPr>
-                        <a:t>245</a:t>
+                        <a:t>318</a:t>
                       </a:r>
                     </a:p>
                   </a:txBody>
@@ -5056,7 +5056,7 @@
                           </a:solidFill>
                           <a:latin typeface="Calibri"/>
                         </a:rPr>
-                        <a:t>244</a:t>
+                        <a:t>302</a:t>
                       </a:r>
                     </a:p>
                   </a:txBody>
@@ -5079,7 +5079,7 @@
                           </a:solidFill>
                           <a:latin typeface="Calibri"/>
                         </a:rPr>
-                        <a:t>1</a:t>
+                        <a:t>16</a:t>
                       </a:r>
                     </a:p>
                   </a:txBody>
@@ -5102,7 +5102,7 @@
                           </a:solidFill>
                           <a:latin typeface="Calibri"/>
                         </a:rPr>
-                        <a:t>99.6%</a:t>
+                        <a:t>95.0%</a:t>
                       </a:r>
                     </a:p>
                   </a:txBody>
@@ -5190,7 +5190,7 @@
                 </a:solidFill>
                 <a:latin typeface="Calibri"/>
               </a:rPr>
-              <a:t>PERFORMANCE: 99.6% - EXCELENTE</a:t>
+              <a:t>PERFORMANCE: 95.0% - REGULAR</a:t>
             </a:r>
           </a:p>
         </p:txBody>
@@ -5275,7 +5275,7 @@
                 </a:solidFill>
                 <a:latin typeface="Calibri"/>
               </a:rPr>
-              <a:t>OCORRENCIAS FORA DO PRAZO (1)</a:t>
+              <a:t>OCORRENCIAS FORA DO PRAZO (16)</a:t>
             </a:r>
           </a:p>
         </p:txBody>
@@ -5333,7 +5333,7 @@
         </p:nvGraphicFramePr>
         <p:xfrm>
           <a:off x="457200" y="1828800"/>
-          <a:ext cx="11429999" cy="768096"/>
+          <a:ext cx="11429999" cy="4571997"/>
         </p:xfrm>
         <a:graphic>
           <a:graphicData uri="http://schemas.openxmlformats.org/drawingml/2006/table">
@@ -5348,7 +5348,7 @@
                 <a:gridCol w="1554480"/>
                 <a:gridCol w="2743200"/>
               </a:tblGrid>
-              <a:tr h="384048">
+              <a:tr h="268941">
                 <a:tc>
                   <a:txBody>
                     <a:bodyPr/>
@@ -5465,50 +5465,1805 @@
                   </a:tcPr>
                 </a:tc>
               </a:tr>
-              <a:tr h="384048">
-                <a:tc>
-                  <a:txBody>
-                    <a:bodyPr/>
-                    <a:lstStyle/>
-                    <a:p>
-                      <a:pPr algn="l"/>
-                      <a:r>
-                        <a:rPr sz="1000" b="0">
-                          <a:solidFill>
-                            <a:srgbClr val="1D1B43"/>
-                          </a:solidFill>
-                          <a:latin typeface="Calibri"/>
-                        </a:rPr>
-                        <a:t>281066</a:t>
-                      </a:r>
-                    </a:p>
-                  </a:txBody>
-                  <a:tcPr>
-                    <a:solidFill>
-                      <a:srgbClr val="FFFFFF"/>
-                    </a:solidFill>
-                  </a:tcPr>
-                </a:tc>
-                <a:tc>
-                  <a:txBody>
-                    <a:bodyPr/>
-                    <a:lstStyle/>
-                    <a:p>
-                      <a:pPr algn="l"/>
-                      <a:r>
-                        <a:rPr sz="1000" b="0">
-                          <a:solidFill>
-                            <a:srgbClr val="1D1B43"/>
-                          </a:solidFill>
-                          <a:latin typeface="Calibri"/>
-                        </a:rPr>
-                        <a:t>EBAZAR.COM.BR. LTDA - CAJAMAR / SP</a:t>
-                      </a:r>
-                    </a:p>
-                  </a:txBody>
-                  <a:tcPr>
-                    <a:solidFill>
-                      <a:srgbClr val="FFFFFF"/>
+              <a:tr h="268941">
+                <a:tc>
+                  <a:txBody>
+                    <a:bodyPr/>
+                    <a:lstStyle/>
+                    <a:p>
+                      <a:pPr algn="l"/>
+                      <a:r>
+                        <a:rPr sz="1000" b="0">
+                          <a:solidFill>
+                            <a:srgbClr val="1D1B43"/>
+                          </a:solidFill>
+                          <a:latin typeface="Calibri"/>
+                        </a:rPr>
+                        <a:t>281070</a:t>
+                      </a:r>
+                    </a:p>
+                  </a:txBody>
+                  <a:tcPr>
+                    <a:solidFill>
+                      <a:srgbClr val="FFFFFF"/>
+                    </a:solidFill>
+                  </a:tcPr>
+                </a:tc>
+                <a:tc>
+                  <a:txBody>
+                    <a:bodyPr/>
+                    <a:lstStyle/>
+                    <a:p>
+                      <a:pPr algn="l"/>
+                      <a:r>
+                        <a:rPr sz="1000" b="0">
+                          <a:solidFill>
+                            <a:srgbClr val="1D1B43"/>
+                          </a:solidFill>
+                          <a:latin typeface="Calibri"/>
+                        </a:rPr>
+                        <a:t>SAMSONITE DO BRASIL - SAO PAULO / SP</a:t>
+                      </a:r>
+                    </a:p>
+                  </a:txBody>
+                  <a:tcPr>
+                    <a:solidFill>
+                      <a:srgbClr val="FFFFFF"/>
+                    </a:solidFill>
+                  </a:tcPr>
+                </a:tc>
+                <a:tc>
+                  <a:txBody>
+                    <a:bodyPr/>
+                    <a:lstStyle/>
+                    <a:p>
+                      <a:pPr algn="l"/>
+                      <a:r>
+                        <a:rPr sz="1000" b="0">
+                          <a:solidFill>
+                            <a:srgbClr val="1D1B43"/>
+                          </a:solidFill>
+                          <a:latin typeface="Calibri"/>
+                        </a:rPr>
+                        <a:t>SAO PAULO/SP</a:t>
+                      </a:r>
+                    </a:p>
+                  </a:txBody>
+                  <a:tcPr>
+                    <a:solidFill>
+                      <a:srgbClr val="FFFFFF"/>
+                    </a:solidFill>
+                  </a:tcPr>
+                </a:tc>
+                <a:tc>
+                  <a:txBody>
+                    <a:bodyPr/>
+                    <a:lstStyle/>
+                    <a:p>
+                      <a:pPr algn="l"/>
+                      <a:r>
+                        <a:rPr sz="1000" b="0">
+                          <a:solidFill>
+                            <a:srgbClr val="1D1B43"/>
+                          </a:solidFill>
+                          <a:latin typeface="Calibri"/>
+                        </a:rPr>
+                        <a:t>30/04/2026</a:t>
+                      </a:r>
+                    </a:p>
+                  </a:txBody>
+                  <a:tcPr>
+                    <a:solidFill>
+                      <a:srgbClr val="FFFFFF"/>
+                    </a:solidFill>
+                  </a:tcPr>
+                </a:tc>
+                <a:tc>
+                  <a:txBody>
+                    <a:bodyPr/>
+                    <a:lstStyle/>
+                    <a:p>
+                      <a:pPr algn="l"/>
+                      <a:r>
+                        <a:rPr sz="1000" b="0">
+                          <a:solidFill>
+                            <a:srgbClr val="1D1B43"/>
+                          </a:solidFill>
+                          <a:latin typeface="Calibri"/>
+                        </a:rPr>
+                        <a:t>ENTREGUE FORA DO PRAZO</a:t>
+                      </a:r>
+                    </a:p>
+                  </a:txBody>
+                  <a:tcPr>
+                    <a:solidFill>
+                      <a:srgbClr val="FFFFFF"/>
+                    </a:solidFill>
+                  </a:tcPr>
+                </a:tc>
+              </a:tr>
+              <a:tr h="268941">
+                <a:tc>
+                  <a:txBody>
+                    <a:bodyPr/>
+                    <a:lstStyle/>
+                    <a:p>
+                      <a:pPr algn="l"/>
+                      <a:r>
+                        <a:rPr sz="1000" b="0">
+                          <a:solidFill>
+                            <a:srgbClr val="1D1B43"/>
+                          </a:solidFill>
+                          <a:latin typeface="Calibri"/>
+                        </a:rPr>
+                        <a:t>281740</a:t>
+                      </a:r>
+                    </a:p>
+                  </a:txBody>
+                  <a:tcPr>
+                    <a:solidFill>
+                      <a:srgbClr val="F2F2F2"/>
+                    </a:solidFill>
+                  </a:tcPr>
+                </a:tc>
+                <a:tc>
+                  <a:txBody>
+                    <a:bodyPr/>
+                    <a:lstStyle/>
+                    <a:p>
+                      <a:pPr algn="l"/>
+                      <a:r>
+                        <a:rPr sz="1000" b="0">
+                          <a:solidFill>
+                            <a:srgbClr val="1D1B43"/>
+                          </a:solidFill>
+                          <a:latin typeface="Calibri"/>
+                        </a:rPr>
+                        <a:t>RMS SOLUTIONS LTDA R - OSASCO / SP</a:t>
+                      </a:r>
+                    </a:p>
+                  </a:txBody>
+                  <a:tcPr>
+                    <a:solidFill>
+                      <a:srgbClr val="F2F2F2"/>
+                    </a:solidFill>
+                  </a:tcPr>
+                </a:tc>
+                <a:tc>
+                  <a:txBody>
+                    <a:bodyPr/>
+                    <a:lstStyle/>
+                    <a:p>
+                      <a:pPr algn="l"/>
+                      <a:r>
+                        <a:rPr sz="1000" b="0">
+                          <a:solidFill>
+                            <a:srgbClr val="1D1B43"/>
+                          </a:solidFill>
+                          <a:latin typeface="Calibri"/>
+                        </a:rPr>
+                        <a:t>OSASCO/SP</a:t>
+                      </a:r>
+                    </a:p>
+                  </a:txBody>
+                  <a:tcPr>
+                    <a:solidFill>
+                      <a:srgbClr val="F2F2F2"/>
+                    </a:solidFill>
+                  </a:tcPr>
+                </a:tc>
+                <a:tc>
+                  <a:txBody>
+                    <a:bodyPr/>
+                    <a:lstStyle/>
+                    <a:p>
+                      <a:pPr algn="l"/>
+                      <a:r>
+                        <a:rPr sz="1000" b="0">
+                          <a:solidFill>
+                            <a:srgbClr val="1D1B43"/>
+                          </a:solidFill>
+                          <a:latin typeface="Calibri"/>
+                        </a:rPr>
+                        <a:t>07/05/2026</a:t>
+                      </a:r>
+                    </a:p>
+                  </a:txBody>
+                  <a:tcPr>
+                    <a:solidFill>
+                      <a:srgbClr val="F2F2F2"/>
+                    </a:solidFill>
+                  </a:tcPr>
+                </a:tc>
+                <a:tc>
+                  <a:txBody>
+                    <a:bodyPr/>
+                    <a:lstStyle/>
+                    <a:p>
+                      <a:pPr algn="l"/>
+                      <a:r>
+                        <a:rPr sz="1000" b="0">
+                          <a:solidFill>
+                            <a:srgbClr val="1D1B43"/>
+                          </a:solidFill>
+                          <a:latin typeface="Calibri"/>
+                        </a:rPr>
+                        <a:t>ENTREGUE FORA DO PRAZO</a:t>
+                      </a:r>
+                    </a:p>
+                  </a:txBody>
+                  <a:tcPr>
+                    <a:solidFill>
+                      <a:srgbClr val="F2F2F2"/>
+                    </a:solidFill>
+                  </a:tcPr>
+                </a:tc>
+              </a:tr>
+              <a:tr h="268941">
+                <a:tc>
+                  <a:txBody>
+                    <a:bodyPr/>
+                    <a:lstStyle/>
+                    <a:p>
+                      <a:pPr algn="l"/>
+                      <a:r>
+                        <a:rPr sz="1000" b="0">
+                          <a:solidFill>
+                            <a:srgbClr val="1D1B43"/>
+                          </a:solidFill>
+                          <a:latin typeface="Calibri"/>
+                        </a:rPr>
+                        <a:t>281959</a:t>
+                      </a:r>
+                    </a:p>
+                  </a:txBody>
+                  <a:tcPr>
+                    <a:solidFill>
+                      <a:srgbClr val="FFFFFF"/>
+                    </a:solidFill>
+                  </a:tcPr>
+                </a:tc>
+                <a:tc>
+                  <a:txBody>
+                    <a:bodyPr/>
+                    <a:lstStyle/>
+                    <a:p>
+                      <a:pPr algn="l"/>
+                      <a:r>
+                        <a:rPr sz="1000" b="0">
+                          <a:solidFill>
+                            <a:srgbClr val="1D1B43"/>
+                          </a:solidFill>
+                          <a:latin typeface="Calibri"/>
+                        </a:rPr>
+                        <a:t>SAMSONITE BRASIL LTD - SAO PAULO / SP</a:t>
+                      </a:r>
+                    </a:p>
+                  </a:txBody>
+                  <a:tcPr>
+                    <a:solidFill>
+                      <a:srgbClr val="FFFFFF"/>
+                    </a:solidFill>
+                  </a:tcPr>
+                </a:tc>
+                <a:tc>
+                  <a:txBody>
+                    <a:bodyPr/>
+                    <a:lstStyle/>
+                    <a:p>
+                      <a:pPr algn="l"/>
+                      <a:r>
+                        <a:rPr sz="1000" b="0">
+                          <a:solidFill>
+                            <a:srgbClr val="1D1B43"/>
+                          </a:solidFill>
+                          <a:latin typeface="Calibri"/>
+                        </a:rPr>
+                        <a:t>SAO PAULO/SP</a:t>
+                      </a:r>
+                    </a:p>
+                  </a:txBody>
+                  <a:tcPr>
+                    <a:solidFill>
+                      <a:srgbClr val="FFFFFF"/>
+                    </a:solidFill>
+                  </a:tcPr>
+                </a:tc>
+                <a:tc>
+                  <a:txBody>
+                    <a:bodyPr/>
+                    <a:lstStyle/>
+                    <a:p>
+                      <a:pPr algn="l"/>
+                      <a:r>
+                        <a:rPr sz="1000" b="0">
+                          <a:solidFill>
+                            <a:srgbClr val="1D1B43"/>
+                          </a:solidFill>
+                          <a:latin typeface="Calibri"/>
+                        </a:rPr>
+                        <a:t>09/05/2026</a:t>
+                      </a:r>
+                    </a:p>
+                  </a:txBody>
+                  <a:tcPr>
+                    <a:solidFill>
+                      <a:srgbClr val="FFFFFF"/>
+                    </a:solidFill>
+                  </a:tcPr>
+                </a:tc>
+                <a:tc>
+                  <a:txBody>
+                    <a:bodyPr/>
+                    <a:lstStyle/>
+                    <a:p>
+                      <a:pPr algn="l"/>
+                      <a:r>
+                        <a:rPr sz="1000" b="0">
+                          <a:solidFill>
+                            <a:srgbClr val="1D1B43"/>
+                          </a:solidFill>
+                          <a:latin typeface="Calibri"/>
+                        </a:rPr>
+                        <a:t>ENTREGUE FORA DO PRAZO</a:t>
+                      </a:r>
+                    </a:p>
+                  </a:txBody>
+                  <a:tcPr>
+                    <a:solidFill>
+                      <a:srgbClr val="FFFFFF"/>
+                    </a:solidFill>
+                  </a:tcPr>
+                </a:tc>
+              </a:tr>
+              <a:tr h="268941">
+                <a:tc>
+                  <a:txBody>
+                    <a:bodyPr/>
+                    <a:lstStyle/>
+                    <a:p>
+                      <a:pPr algn="l"/>
+                      <a:r>
+                        <a:rPr sz="1000" b="0">
+                          <a:solidFill>
+                            <a:srgbClr val="1D1B43"/>
+                          </a:solidFill>
+                          <a:latin typeface="Calibri"/>
+                        </a:rPr>
+                        <a:t>282630</a:t>
+                      </a:r>
+                    </a:p>
+                  </a:txBody>
+                  <a:tcPr>
+                    <a:solidFill>
+                      <a:srgbClr val="F2F2F2"/>
+                    </a:solidFill>
+                  </a:tcPr>
+                </a:tc>
+                <a:tc>
+                  <a:txBody>
+                    <a:bodyPr/>
+                    <a:lstStyle/>
+                    <a:p>
+                      <a:pPr algn="l"/>
+                      <a:r>
+                        <a:rPr sz="1000" b="0">
+                          <a:solidFill>
+                            <a:srgbClr val="1D1B43"/>
+                          </a:solidFill>
+                          <a:latin typeface="Calibri"/>
+                        </a:rPr>
+                        <a:t>SAMSONITE BRASIL LTD - SAO PAULO / SP</a:t>
+                      </a:r>
+                    </a:p>
+                  </a:txBody>
+                  <a:tcPr>
+                    <a:solidFill>
+                      <a:srgbClr val="F2F2F2"/>
+                    </a:solidFill>
+                  </a:tcPr>
+                </a:tc>
+                <a:tc>
+                  <a:txBody>
+                    <a:bodyPr/>
+                    <a:lstStyle/>
+                    <a:p>
+                      <a:pPr algn="l"/>
+                      <a:r>
+                        <a:rPr sz="1000" b="0">
+                          <a:solidFill>
+                            <a:srgbClr val="1D1B43"/>
+                          </a:solidFill>
+                          <a:latin typeface="Calibri"/>
+                        </a:rPr>
+                        <a:t>SAO PAULO/SP</a:t>
+                      </a:r>
+                    </a:p>
+                  </a:txBody>
+                  <a:tcPr>
+                    <a:solidFill>
+                      <a:srgbClr val="F2F2F2"/>
+                    </a:solidFill>
+                  </a:tcPr>
+                </a:tc>
+                <a:tc>
+                  <a:txBody>
+                    <a:bodyPr/>
+                    <a:lstStyle/>
+                    <a:p>
+                      <a:pPr algn="l"/>
+                      <a:r>
+                        <a:rPr sz="1000" b="0">
+                          <a:solidFill>
+                            <a:srgbClr val="1D1B43"/>
+                          </a:solidFill>
+                          <a:latin typeface="Calibri"/>
+                        </a:rPr>
+                        <a:t>14/05/2026</a:t>
+                      </a:r>
+                    </a:p>
+                  </a:txBody>
+                  <a:tcPr>
+                    <a:solidFill>
+                      <a:srgbClr val="F2F2F2"/>
+                    </a:solidFill>
+                  </a:tcPr>
+                </a:tc>
+                <a:tc>
+                  <a:txBody>
+                    <a:bodyPr/>
+                    <a:lstStyle/>
+                    <a:p>
+                      <a:pPr algn="l"/>
+                      <a:r>
+                        <a:rPr sz="1000" b="0">
+                          <a:solidFill>
+                            <a:srgbClr val="1D1B43"/>
+                          </a:solidFill>
+                          <a:latin typeface="Calibri"/>
+                        </a:rPr>
+                        <a:t>ENTREGUE FORA DO PRAZO</a:t>
+                      </a:r>
+                    </a:p>
+                  </a:txBody>
+                  <a:tcPr>
+                    <a:solidFill>
+                      <a:srgbClr val="F2F2F2"/>
+                    </a:solidFill>
+                  </a:tcPr>
+                </a:tc>
+              </a:tr>
+              <a:tr h="268941">
+                <a:tc>
+                  <a:txBody>
+                    <a:bodyPr/>
+                    <a:lstStyle/>
+                    <a:p>
+                      <a:pPr algn="l"/>
+                      <a:r>
+                        <a:rPr sz="1000" b="0">
+                          <a:solidFill>
+                            <a:srgbClr val="1D1B43"/>
+                          </a:solidFill>
+                          <a:latin typeface="Calibri"/>
+                        </a:rPr>
+                        <a:t>282635</a:t>
+                      </a:r>
+                    </a:p>
+                  </a:txBody>
+                  <a:tcPr>
+                    <a:solidFill>
+                      <a:srgbClr val="FFFFFF"/>
+                    </a:solidFill>
+                  </a:tcPr>
+                </a:tc>
+                <a:tc>
+                  <a:txBody>
+                    <a:bodyPr/>
+                    <a:lstStyle/>
+                    <a:p>
+                      <a:pPr algn="l"/>
+                      <a:r>
+                        <a:rPr sz="1000" b="0">
+                          <a:solidFill>
+                            <a:srgbClr val="1D1B43"/>
+                          </a:solidFill>
+                          <a:latin typeface="Calibri"/>
+                        </a:rPr>
+                        <a:t>SAMSONITE BRASIL LTD - SAO PAULO / SP</a:t>
+                      </a:r>
+                    </a:p>
+                  </a:txBody>
+                  <a:tcPr>
+                    <a:solidFill>
+                      <a:srgbClr val="FFFFFF"/>
+                    </a:solidFill>
+                  </a:tcPr>
+                </a:tc>
+                <a:tc>
+                  <a:txBody>
+                    <a:bodyPr/>
+                    <a:lstStyle/>
+                    <a:p>
+                      <a:pPr algn="l"/>
+                      <a:r>
+                        <a:rPr sz="1000" b="0">
+                          <a:solidFill>
+                            <a:srgbClr val="1D1B43"/>
+                          </a:solidFill>
+                          <a:latin typeface="Calibri"/>
+                        </a:rPr>
+                        <a:t>SAO PAULO/SP</a:t>
+                      </a:r>
+                    </a:p>
+                  </a:txBody>
+                  <a:tcPr>
+                    <a:solidFill>
+                      <a:srgbClr val="FFFFFF"/>
+                    </a:solidFill>
+                  </a:tcPr>
+                </a:tc>
+                <a:tc>
+                  <a:txBody>
+                    <a:bodyPr/>
+                    <a:lstStyle/>
+                    <a:p>
+                      <a:pPr algn="l"/>
+                      <a:r>
+                        <a:rPr sz="1000" b="0">
+                          <a:solidFill>
+                            <a:srgbClr val="1D1B43"/>
+                          </a:solidFill>
+                          <a:latin typeface="Calibri"/>
+                        </a:rPr>
+                        <a:t>15/05/2026</a:t>
+                      </a:r>
+                    </a:p>
+                  </a:txBody>
+                  <a:tcPr>
+                    <a:solidFill>
+                      <a:srgbClr val="FFFFFF"/>
+                    </a:solidFill>
+                  </a:tcPr>
+                </a:tc>
+                <a:tc>
+                  <a:txBody>
+                    <a:bodyPr/>
+                    <a:lstStyle/>
+                    <a:p>
+                      <a:pPr algn="l"/>
+                      <a:r>
+                        <a:rPr sz="1000" b="0">
+                          <a:solidFill>
+                            <a:srgbClr val="1D1B43"/>
+                          </a:solidFill>
+                          <a:latin typeface="Calibri"/>
+                        </a:rPr>
+                        <a:t>ENTREGUE FORA DO PRAZO</a:t>
+                      </a:r>
+                    </a:p>
+                  </a:txBody>
+                  <a:tcPr>
+                    <a:solidFill>
+                      <a:srgbClr val="FFFFFF"/>
+                    </a:solidFill>
+                  </a:tcPr>
+                </a:tc>
+              </a:tr>
+              <a:tr h="268941">
+                <a:tc>
+                  <a:txBody>
+                    <a:bodyPr/>
+                    <a:lstStyle/>
+                    <a:p>
+                      <a:pPr algn="l"/>
+                      <a:r>
+                        <a:rPr sz="1000" b="0">
+                          <a:solidFill>
+                            <a:srgbClr val="1D1B43"/>
+                          </a:solidFill>
+                          <a:latin typeface="Calibri"/>
+                        </a:rPr>
+                        <a:t>283969</a:t>
+                      </a:r>
+                    </a:p>
+                  </a:txBody>
+                  <a:tcPr>
+                    <a:solidFill>
+                      <a:srgbClr val="F2F2F2"/>
+                    </a:solidFill>
+                  </a:tcPr>
+                </a:tc>
+                <a:tc>
+                  <a:txBody>
+                    <a:bodyPr/>
+                    <a:lstStyle/>
+                    <a:p>
+                      <a:pPr algn="l"/>
+                      <a:r>
+                        <a:rPr sz="1000" b="0">
+                          <a:solidFill>
+                            <a:srgbClr val="1D1B43"/>
+                          </a:solidFill>
+                          <a:latin typeface="Calibri"/>
+                        </a:rPr>
+                        <a:t>SAAM PAULISTA ARTIGO - SAO PAULO / SP</a:t>
+                      </a:r>
+                    </a:p>
+                  </a:txBody>
+                  <a:tcPr>
+                    <a:solidFill>
+                      <a:srgbClr val="F2F2F2"/>
+                    </a:solidFill>
+                  </a:tcPr>
+                </a:tc>
+                <a:tc>
+                  <a:txBody>
+                    <a:bodyPr/>
+                    <a:lstStyle/>
+                    <a:p>
+                      <a:pPr algn="l"/>
+                      <a:r>
+                        <a:rPr sz="1000" b="0">
+                          <a:solidFill>
+                            <a:srgbClr val="1D1B43"/>
+                          </a:solidFill>
+                          <a:latin typeface="Calibri"/>
+                        </a:rPr>
+                        <a:t>SAO PAULO/SP</a:t>
+                      </a:r>
+                    </a:p>
+                  </a:txBody>
+                  <a:tcPr>
+                    <a:solidFill>
+                      <a:srgbClr val="F2F2F2"/>
+                    </a:solidFill>
+                  </a:tcPr>
+                </a:tc>
+                <a:tc>
+                  <a:txBody>
+                    <a:bodyPr/>
+                    <a:lstStyle/>
+                    <a:p>
+                      <a:pPr algn="l"/>
+                      <a:r>
+                        <a:rPr sz="1000" b="0">
+                          <a:solidFill>
+                            <a:srgbClr val="1D1B43"/>
+                          </a:solidFill>
+                          <a:latin typeface="Calibri"/>
+                        </a:rPr>
+                        <a:t>25/05/2026</a:t>
+                      </a:r>
+                    </a:p>
+                  </a:txBody>
+                  <a:tcPr>
+                    <a:solidFill>
+                      <a:srgbClr val="F2F2F2"/>
+                    </a:solidFill>
+                  </a:tcPr>
+                </a:tc>
+                <a:tc>
+                  <a:txBody>
+                    <a:bodyPr/>
+                    <a:lstStyle/>
+                    <a:p>
+                      <a:pPr algn="l"/>
+                      <a:r>
+                        <a:rPr sz="1000" b="0">
+                          <a:solidFill>
+                            <a:srgbClr val="1D1B43"/>
+                          </a:solidFill>
+                          <a:latin typeface="Calibri"/>
+                        </a:rPr>
+                        <a:t>ENTREGUE FORA DO PRAZO</a:t>
+                      </a:r>
+                    </a:p>
+                  </a:txBody>
+                  <a:tcPr>
+                    <a:solidFill>
+                      <a:srgbClr val="F2F2F2"/>
+                    </a:solidFill>
+                  </a:tcPr>
+                </a:tc>
+              </a:tr>
+              <a:tr h="268941">
+                <a:tc>
+                  <a:txBody>
+                    <a:bodyPr/>
+                    <a:lstStyle/>
+                    <a:p>
+                      <a:pPr algn="l"/>
+                      <a:r>
+                        <a:rPr sz="1000" b="0">
+                          <a:solidFill>
+                            <a:srgbClr val="1D1B43"/>
+                          </a:solidFill>
+                          <a:latin typeface="Calibri"/>
+                        </a:rPr>
+                        <a:t>284077</a:t>
+                      </a:r>
+                    </a:p>
+                  </a:txBody>
+                  <a:tcPr>
+                    <a:solidFill>
+                      <a:srgbClr val="FFFFFF"/>
+                    </a:solidFill>
+                  </a:tcPr>
+                </a:tc>
+                <a:tc>
+                  <a:txBody>
+                    <a:bodyPr/>
+                    <a:lstStyle/>
+                    <a:p>
+                      <a:pPr algn="l"/>
+                      <a:r>
+                        <a:rPr sz="1000" b="0">
+                          <a:solidFill>
+                            <a:srgbClr val="1D1B43"/>
+                          </a:solidFill>
+                          <a:latin typeface="Calibri"/>
+                        </a:rPr>
+                        <a:t>INOVATHI PARTICIPACO - BARUERI / SP</a:t>
+                      </a:r>
+                    </a:p>
+                  </a:txBody>
+                  <a:tcPr>
+                    <a:solidFill>
+                      <a:srgbClr val="FFFFFF"/>
+                    </a:solidFill>
+                  </a:tcPr>
+                </a:tc>
+                <a:tc>
+                  <a:txBody>
+                    <a:bodyPr/>
+                    <a:lstStyle/>
+                    <a:p>
+                      <a:pPr algn="l"/>
+                      <a:r>
+                        <a:rPr sz="1000" b="0">
+                          <a:solidFill>
+                            <a:srgbClr val="1D1B43"/>
+                          </a:solidFill>
+                          <a:latin typeface="Calibri"/>
+                        </a:rPr>
+                        <a:t>BARUERI/SP</a:t>
+                      </a:r>
+                    </a:p>
+                  </a:txBody>
+                  <a:tcPr>
+                    <a:solidFill>
+                      <a:srgbClr val="FFFFFF"/>
+                    </a:solidFill>
+                  </a:tcPr>
+                </a:tc>
+                <a:tc>
+                  <a:txBody>
+                    <a:bodyPr/>
+                    <a:lstStyle/>
+                    <a:p>
+                      <a:pPr algn="l"/>
+                      <a:r>
+                        <a:rPr sz="1000" b="0">
+                          <a:solidFill>
+                            <a:srgbClr val="1D1B43"/>
+                          </a:solidFill>
+                          <a:latin typeface="Calibri"/>
+                        </a:rPr>
+                        <a:t>22/05/2026</a:t>
+                      </a:r>
+                    </a:p>
+                  </a:txBody>
+                  <a:tcPr>
+                    <a:solidFill>
+                      <a:srgbClr val="FFFFFF"/>
+                    </a:solidFill>
+                  </a:tcPr>
+                </a:tc>
+                <a:tc>
+                  <a:txBody>
+                    <a:bodyPr/>
+                    <a:lstStyle/>
+                    <a:p>
+                      <a:pPr algn="l"/>
+                      <a:r>
+                        <a:rPr sz="1000" b="0">
+                          <a:solidFill>
+                            <a:srgbClr val="1D1B43"/>
+                          </a:solidFill>
+                          <a:latin typeface="Calibri"/>
+                        </a:rPr>
+                        <a:t>ENTREGUE FORA DO PRAZO</a:t>
+                      </a:r>
+                    </a:p>
+                  </a:txBody>
+                  <a:tcPr>
+                    <a:solidFill>
+                      <a:srgbClr val="FFFFFF"/>
+                    </a:solidFill>
+                  </a:tcPr>
+                </a:tc>
+              </a:tr>
+              <a:tr h="268941">
+                <a:tc>
+                  <a:txBody>
+                    <a:bodyPr/>
+                    <a:lstStyle/>
+                    <a:p>
+                      <a:pPr algn="l"/>
+                      <a:r>
+                        <a:rPr sz="1000" b="0">
+                          <a:solidFill>
+                            <a:srgbClr val="1D1B43"/>
+                          </a:solidFill>
+                          <a:latin typeface="Calibri"/>
+                        </a:rPr>
+                        <a:t>284118</a:t>
+                      </a:r>
+                    </a:p>
+                  </a:txBody>
+                  <a:tcPr>
+                    <a:solidFill>
+                      <a:srgbClr val="F2F2F2"/>
+                    </a:solidFill>
+                  </a:tcPr>
+                </a:tc>
+                <a:tc>
+                  <a:txBody>
+                    <a:bodyPr/>
+                    <a:lstStyle/>
+                    <a:p>
+                      <a:pPr algn="l"/>
+                      <a:r>
+                        <a:rPr sz="1000" b="0">
+                          <a:solidFill>
+                            <a:srgbClr val="1D1B43"/>
+                          </a:solidFill>
+                          <a:latin typeface="Calibri"/>
+                        </a:rPr>
+                        <a:t>NSNA SOCIOAMBIENTAL - SAO PAULO / SP</a:t>
+                      </a:r>
+                    </a:p>
+                  </a:txBody>
+                  <a:tcPr>
+                    <a:solidFill>
+                      <a:srgbClr val="F2F2F2"/>
+                    </a:solidFill>
+                  </a:tcPr>
+                </a:tc>
+                <a:tc>
+                  <a:txBody>
+                    <a:bodyPr/>
+                    <a:lstStyle/>
+                    <a:p>
+                      <a:pPr algn="l"/>
+                      <a:r>
+                        <a:rPr sz="1000" b="0">
+                          <a:solidFill>
+                            <a:srgbClr val="1D1B43"/>
+                          </a:solidFill>
+                          <a:latin typeface="Calibri"/>
+                        </a:rPr>
+                        <a:t>SAO PAULO/SP</a:t>
+                      </a:r>
+                    </a:p>
+                  </a:txBody>
+                  <a:tcPr>
+                    <a:solidFill>
+                      <a:srgbClr val="F2F2F2"/>
+                    </a:solidFill>
+                  </a:tcPr>
+                </a:tc>
+                <a:tc>
+                  <a:txBody>
+                    <a:bodyPr/>
+                    <a:lstStyle/>
+                    <a:p>
+                      <a:pPr algn="l"/>
+                      <a:r>
+                        <a:rPr sz="1000" b="0">
+                          <a:solidFill>
+                            <a:srgbClr val="1D1B43"/>
+                          </a:solidFill>
+                          <a:latin typeface="Calibri"/>
+                        </a:rPr>
+                        <a:t>22/05/2026</a:t>
+                      </a:r>
+                    </a:p>
+                  </a:txBody>
+                  <a:tcPr>
+                    <a:solidFill>
+                      <a:srgbClr val="F2F2F2"/>
+                    </a:solidFill>
+                  </a:tcPr>
+                </a:tc>
+                <a:tc>
+                  <a:txBody>
+                    <a:bodyPr/>
+                    <a:lstStyle/>
+                    <a:p>
+                      <a:pPr algn="l"/>
+                      <a:r>
+                        <a:rPr sz="1000" b="0">
+                          <a:solidFill>
+                            <a:srgbClr val="1D1B43"/>
+                          </a:solidFill>
+                          <a:latin typeface="Calibri"/>
+                        </a:rPr>
+                        <a:t>FORA DO PRAZO</a:t>
+                      </a:r>
+                    </a:p>
+                  </a:txBody>
+                  <a:tcPr>
+                    <a:solidFill>
+                      <a:srgbClr val="F2F2F2"/>
+                    </a:solidFill>
+                  </a:tcPr>
+                </a:tc>
+              </a:tr>
+              <a:tr h="268941">
+                <a:tc>
+                  <a:txBody>
+                    <a:bodyPr/>
+                    <a:lstStyle/>
+                    <a:p>
+                      <a:pPr algn="l"/>
+                      <a:r>
+                        <a:rPr sz="1000" b="0">
+                          <a:solidFill>
+                            <a:srgbClr val="1D1B43"/>
+                          </a:solidFill>
+                          <a:latin typeface="Calibri"/>
+                        </a:rPr>
+                        <a:t>284280</a:t>
+                      </a:r>
+                    </a:p>
+                  </a:txBody>
+                  <a:tcPr>
+                    <a:solidFill>
+                      <a:srgbClr val="FFFFFF"/>
+                    </a:solidFill>
+                  </a:tcPr>
+                </a:tc>
+                <a:tc>
+                  <a:txBody>
+                    <a:bodyPr/>
+                    <a:lstStyle/>
+                    <a:p>
+                      <a:pPr algn="l"/>
+                      <a:r>
+                        <a:rPr sz="1000" b="0">
+                          <a:solidFill>
+                            <a:srgbClr val="1D1B43"/>
+                          </a:solidFill>
+                          <a:latin typeface="Calibri"/>
+                        </a:rPr>
+                        <a:t>DIRRE COMERCIAL CENT - SAO PAULO / SP</a:t>
+                      </a:r>
+                    </a:p>
+                  </a:txBody>
+                  <a:tcPr>
+                    <a:solidFill>
+                      <a:srgbClr val="FFFFFF"/>
+                    </a:solidFill>
+                  </a:tcPr>
+                </a:tc>
+                <a:tc>
+                  <a:txBody>
+                    <a:bodyPr/>
+                    <a:lstStyle/>
+                    <a:p>
+                      <a:pPr algn="l"/>
+                      <a:r>
+                        <a:rPr sz="1000" b="0">
+                          <a:solidFill>
+                            <a:srgbClr val="1D1B43"/>
+                          </a:solidFill>
+                          <a:latin typeface="Calibri"/>
+                        </a:rPr>
+                        <a:t>SAO PAULO/SP</a:t>
+                      </a:r>
+                    </a:p>
+                  </a:txBody>
+                  <a:tcPr>
+                    <a:solidFill>
+                      <a:srgbClr val="FFFFFF"/>
+                    </a:solidFill>
+                  </a:tcPr>
+                </a:tc>
+                <a:tc>
+                  <a:txBody>
+                    <a:bodyPr/>
+                    <a:lstStyle/>
+                    <a:p>
+                      <a:pPr algn="l"/>
+                      <a:r>
+                        <a:rPr sz="1000" b="0">
+                          <a:solidFill>
+                            <a:srgbClr val="1D1B43"/>
+                          </a:solidFill>
+                          <a:latin typeface="Calibri"/>
+                        </a:rPr>
+                        <a:t>25/05/2026</a:t>
+                      </a:r>
+                    </a:p>
+                  </a:txBody>
+                  <a:tcPr>
+                    <a:solidFill>
+                      <a:srgbClr val="FFFFFF"/>
+                    </a:solidFill>
+                  </a:tcPr>
+                </a:tc>
+                <a:tc>
+                  <a:txBody>
+                    <a:bodyPr/>
+                    <a:lstStyle/>
+                    <a:p>
+                      <a:pPr algn="l"/>
+                      <a:r>
+                        <a:rPr sz="1000" b="0">
+                          <a:solidFill>
+                            <a:srgbClr val="1D1B43"/>
+                          </a:solidFill>
+                          <a:latin typeface="Calibri"/>
+                        </a:rPr>
+                        <a:t>ENTREGUE FORA DO PRAZO</a:t>
+                      </a:r>
+                    </a:p>
+                  </a:txBody>
+                  <a:tcPr>
+                    <a:solidFill>
+                      <a:srgbClr val="FFFFFF"/>
+                    </a:solidFill>
+                  </a:tcPr>
+                </a:tc>
+              </a:tr>
+              <a:tr h="268941">
+                <a:tc>
+                  <a:txBody>
+                    <a:bodyPr/>
+                    <a:lstStyle/>
+                    <a:p>
+                      <a:pPr algn="l"/>
+                      <a:r>
+                        <a:rPr sz="1000" b="0">
+                          <a:solidFill>
+                            <a:srgbClr val="1D1B43"/>
+                          </a:solidFill>
+                          <a:latin typeface="Calibri"/>
+                        </a:rPr>
+                        <a:t>284286</a:t>
+                      </a:r>
+                    </a:p>
+                  </a:txBody>
+                  <a:tcPr>
+                    <a:solidFill>
+                      <a:srgbClr val="F2F2F2"/>
+                    </a:solidFill>
+                  </a:tcPr>
+                </a:tc>
+                <a:tc>
+                  <a:txBody>
+                    <a:bodyPr/>
+                    <a:lstStyle/>
+                    <a:p>
+                      <a:pPr algn="l"/>
+                      <a:r>
+                        <a:rPr sz="1000" b="0">
+                          <a:solidFill>
+                            <a:srgbClr val="1D1B43"/>
+                          </a:solidFill>
+                          <a:latin typeface="Calibri"/>
+                        </a:rPr>
+                        <a:t>RMS SOLUTIONS LTDA R - OSASCO / SP</a:t>
+                      </a:r>
+                    </a:p>
+                  </a:txBody>
+                  <a:tcPr>
+                    <a:solidFill>
+                      <a:srgbClr val="F2F2F2"/>
+                    </a:solidFill>
+                  </a:tcPr>
+                </a:tc>
+                <a:tc>
+                  <a:txBody>
+                    <a:bodyPr/>
+                    <a:lstStyle/>
+                    <a:p>
+                      <a:pPr algn="l"/>
+                      <a:r>
+                        <a:rPr sz="1000" b="0">
+                          <a:solidFill>
+                            <a:srgbClr val="1D1B43"/>
+                          </a:solidFill>
+                          <a:latin typeface="Calibri"/>
+                        </a:rPr>
+                        <a:t>OSASCO/SP</a:t>
+                      </a:r>
+                    </a:p>
+                  </a:txBody>
+                  <a:tcPr>
+                    <a:solidFill>
+                      <a:srgbClr val="F2F2F2"/>
+                    </a:solidFill>
+                  </a:tcPr>
+                </a:tc>
+                <a:tc>
+                  <a:txBody>
+                    <a:bodyPr/>
+                    <a:lstStyle/>
+                    <a:p>
+                      <a:pPr algn="l"/>
+                      <a:r>
+                        <a:rPr sz="1000" b="0">
+                          <a:solidFill>
+                            <a:srgbClr val="1D1B43"/>
+                          </a:solidFill>
+                          <a:latin typeface="Calibri"/>
+                        </a:rPr>
+                        <a:t>25/05/2026</a:t>
+                      </a:r>
+                    </a:p>
+                  </a:txBody>
+                  <a:tcPr>
+                    <a:solidFill>
+                      <a:srgbClr val="F2F2F2"/>
+                    </a:solidFill>
+                  </a:tcPr>
+                </a:tc>
+                <a:tc>
+                  <a:txBody>
+                    <a:bodyPr/>
+                    <a:lstStyle/>
+                    <a:p>
+                      <a:pPr algn="l"/>
+                      <a:r>
+                        <a:rPr sz="1000" b="0">
+                          <a:solidFill>
+                            <a:srgbClr val="1D1B43"/>
+                          </a:solidFill>
+                          <a:latin typeface="Calibri"/>
+                        </a:rPr>
+                        <a:t>ENTREGUE FORA DO PRAZO</a:t>
+                      </a:r>
+                    </a:p>
+                  </a:txBody>
+                  <a:tcPr>
+                    <a:solidFill>
+                      <a:srgbClr val="F2F2F2"/>
+                    </a:solidFill>
+                  </a:tcPr>
+                </a:tc>
+              </a:tr>
+              <a:tr h="268941">
+                <a:tc>
+                  <a:txBody>
+                    <a:bodyPr/>
+                    <a:lstStyle/>
+                    <a:p>
+                      <a:pPr algn="l"/>
+                      <a:r>
+                        <a:rPr sz="1000" b="0">
+                          <a:solidFill>
+                            <a:srgbClr val="1D1B43"/>
+                          </a:solidFill>
+                          <a:latin typeface="Calibri"/>
+                        </a:rPr>
+                        <a:t>284292</a:t>
+                      </a:r>
+                    </a:p>
+                  </a:txBody>
+                  <a:tcPr>
+                    <a:solidFill>
+                      <a:srgbClr val="FFFFFF"/>
+                    </a:solidFill>
+                  </a:tcPr>
+                </a:tc>
+                <a:tc>
+                  <a:txBody>
+                    <a:bodyPr/>
+                    <a:lstStyle/>
+                    <a:p>
+                      <a:pPr algn="l"/>
+                      <a:r>
+                        <a:rPr sz="1000" b="0">
+                          <a:solidFill>
+                            <a:srgbClr val="1D1B43"/>
+                          </a:solidFill>
+                          <a:latin typeface="Calibri"/>
+                        </a:rPr>
+                        <a:t>STKD EIRELI ME - CAMPINAS / SP</a:t>
+                      </a:r>
+                    </a:p>
+                  </a:txBody>
+                  <a:tcPr>
+                    <a:solidFill>
+                      <a:srgbClr val="FFFFFF"/>
+                    </a:solidFill>
+                  </a:tcPr>
+                </a:tc>
+                <a:tc>
+                  <a:txBody>
+                    <a:bodyPr/>
+                    <a:lstStyle/>
+                    <a:p>
+                      <a:pPr algn="l"/>
+                      <a:r>
+                        <a:rPr sz="1000" b="0">
+                          <a:solidFill>
+                            <a:srgbClr val="1D1B43"/>
+                          </a:solidFill>
+                          <a:latin typeface="Calibri"/>
+                        </a:rPr>
+                        <a:t>CAMPINAS/SP</a:t>
+                      </a:r>
+                    </a:p>
+                  </a:txBody>
+                  <a:tcPr>
+                    <a:solidFill>
+                      <a:srgbClr val="FFFFFF"/>
+                    </a:solidFill>
+                  </a:tcPr>
+                </a:tc>
+                <a:tc>
+                  <a:txBody>
+                    <a:bodyPr/>
+                    <a:lstStyle/>
+                    <a:p>
+                      <a:pPr algn="l"/>
+                      <a:r>
+                        <a:rPr sz="1000" b="0">
+                          <a:solidFill>
+                            <a:srgbClr val="1D1B43"/>
+                          </a:solidFill>
+                          <a:latin typeface="Calibri"/>
+                        </a:rPr>
+                        <a:t>25/05/2026</a:t>
+                      </a:r>
+                    </a:p>
+                  </a:txBody>
+                  <a:tcPr>
+                    <a:solidFill>
+                      <a:srgbClr val="FFFFFF"/>
+                    </a:solidFill>
+                  </a:tcPr>
+                </a:tc>
+                <a:tc>
+                  <a:txBody>
+                    <a:bodyPr/>
+                    <a:lstStyle/>
+                    <a:p>
+                      <a:pPr algn="l"/>
+                      <a:r>
+                        <a:rPr sz="1000" b="0">
+                          <a:solidFill>
+                            <a:srgbClr val="1D1B43"/>
+                          </a:solidFill>
+                          <a:latin typeface="Calibri"/>
+                        </a:rPr>
+                        <a:t>ENTREGUE FORA DO PRAZO</a:t>
+                      </a:r>
+                    </a:p>
+                  </a:txBody>
+                  <a:tcPr>
+                    <a:solidFill>
+                      <a:srgbClr val="FFFFFF"/>
+                    </a:solidFill>
+                  </a:tcPr>
+                </a:tc>
+              </a:tr>
+              <a:tr h="268941">
+                <a:tc>
+                  <a:txBody>
+                    <a:bodyPr/>
+                    <a:lstStyle/>
+                    <a:p>
+                      <a:pPr algn="l"/>
+                      <a:r>
+                        <a:rPr sz="1000" b="0">
+                          <a:solidFill>
+                            <a:srgbClr val="1D1B43"/>
+                          </a:solidFill>
+                          <a:latin typeface="Calibri"/>
+                        </a:rPr>
+                        <a:t>284597</a:t>
+                      </a:r>
+                    </a:p>
+                  </a:txBody>
+                  <a:tcPr>
+                    <a:solidFill>
+                      <a:srgbClr val="F2F2F2"/>
+                    </a:solidFill>
+                  </a:tcPr>
+                </a:tc>
+                <a:tc>
+                  <a:txBody>
+                    <a:bodyPr/>
+                    <a:lstStyle/>
+                    <a:p>
+                      <a:pPr algn="l"/>
+                      <a:r>
+                        <a:rPr sz="1000" b="0">
+                          <a:solidFill>
+                            <a:srgbClr val="1D1B43"/>
+                          </a:solidFill>
+                          <a:latin typeface="Calibri"/>
+                        </a:rPr>
+                        <a:t>DOLFI 1920 MALAS DE - CURITIBA / PR</a:t>
+                      </a:r>
+                    </a:p>
+                  </a:txBody>
+                  <a:tcPr>
+                    <a:solidFill>
+                      <a:srgbClr val="F2F2F2"/>
+                    </a:solidFill>
+                  </a:tcPr>
+                </a:tc>
+                <a:tc>
+                  <a:txBody>
+                    <a:bodyPr/>
+                    <a:lstStyle/>
+                    <a:p>
+                      <a:pPr algn="l"/>
+                      <a:r>
+                        <a:rPr sz="1000" b="0">
+                          <a:solidFill>
+                            <a:srgbClr val="1D1B43"/>
+                          </a:solidFill>
+                          <a:latin typeface="Calibri"/>
+                        </a:rPr>
+                        <a:t>CURITIBA/PR</a:t>
+                      </a:r>
+                    </a:p>
+                  </a:txBody>
+                  <a:tcPr>
+                    <a:solidFill>
+                      <a:srgbClr val="F2F2F2"/>
+                    </a:solidFill>
+                  </a:tcPr>
+                </a:tc>
+                <a:tc>
+                  <a:txBody>
+                    <a:bodyPr/>
+                    <a:lstStyle/>
+                    <a:p>
+                      <a:pPr algn="l"/>
+                      <a:r>
+                        <a:rPr sz="1000" b="0">
+                          <a:solidFill>
+                            <a:srgbClr val="1D1B43"/>
+                          </a:solidFill>
+                          <a:latin typeface="Calibri"/>
+                        </a:rPr>
+                        <a:t>27/05/2026</a:t>
+                      </a:r>
+                    </a:p>
+                  </a:txBody>
+                  <a:tcPr>
+                    <a:solidFill>
+                      <a:srgbClr val="F2F2F2"/>
+                    </a:solidFill>
+                  </a:tcPr>
+                </a:tc>
+                <a:tc>
+                  <a:txBody>
+                    <a:bodyPr/>
+                    <a:lstStyle/>
+                    <a:p>
+                      <a:pPr algn="l"/>
+                      <a:r>
+                        <a:rPr sz="1000" b="0">
+                          <a:solidFill>
+                            <a:srgbClr val="1D1B43"/>
+                          </a:solidFill>
+                          <a:latin typeface="Calibri"/>
+                        </a:rPr>
+                        <a:t>ENTREGUE FORA DO PRAZO</a:t>
+                      </a:r>
+                    </a:p>
+                  </a:txBody>
+                  <a:tcPr>
+                    <a:solidFill>
+                      <a:srgbClr val="F2F2F2"/>
+                    </a:solidFill>
+                  </a:tcPr>
+                </a:tc>
+              </a:tr>
+              <a:tr h="268941">
+                <a:tc>
+                  <a:txBody>
+                    <a:bodyPr/>
+                    <a:lstStyle/>
+                    <a:p>
+                      <a:pPr algn="l"/>
+                      <a:r>
+                        <a:rPr sz="1000" b="0">
+                          <a:solidFill>
+                            <a:srgbClr val="1D1B43"/>
+                          </a:solidFill>
+                          <a:latin typeface="Calibri"/>
+                        </a:rPr>
+                        <a:t>284709</a:t>
+                      </a:r>
+                    </a:p>
+                  </a:txBody>
+                  <a:tcPr>
+                    <a:solidFill>
+                      <a:srgbClr val="FFFFFF"/>
+                    </a:solidFill>
+                  </a:tcPr>
+                </a:tc>
+                <a:tc>
+                  <a:txBody>
+                    <a:bodyPr/>
+                    <a:lstStyle/>
+                    <a:p>
+                      <a:pPr algn="l"/>
+                      <a:r>
+                        <a:rPr sz="1000" b="0">
+                          <a:solidFill>
+                            <a:srgbClr val="1D1B43"/>
+                          </a:solidFill>
+                          <a:latin typeface="Calibri"/>
+                        </a:rPr>
+                        <a:t>INOVATHI PARTICIPACO - JUNDIAI / SP</a:t>
+                      </a:r>
+                    </a:p>
+                  </a:txBody>
+                  <a:tcPr>
+                    <a:solidFill>
+                      <a:srgbClr val="FFFFFF"/>
+                    </a:solidFill>
+                  </a:tcPr>
+                </a:tc>
+                <a:tc>
+                  <a:txBody>
+                    <a:bodyPr/>
+                    <a:lstStyle/>
+                    <a:p>
+                      <a:pPr algn="l"/>
+                      <a:r>
+                        <a:rPr sz="1000" b="0">
+                          <a:solidFill>
+                            <a:srgbClr val="1D1B43"/>
+                          </a:solidFill>
+                          <a:latin typeface="Calibri"/>
+                        </a:rPr>
+                        <a:t>JUNDIAI/SP</a:t>
+                      </a:r>
+                    </a:p>
+                  </a:txBody>
+                  <a:tcPr>
+                    <a:solidFill>
+                      <a:srgbClr val="FFFFFF"/>
+                    </a:solidFill>
+                  </a:tcPr>
+                </a:tc>
+                <a:tc>
+                  <a:txBody>
+                    <a:bodyPr/>
+                    <a:lstStyle/>
+                    <a:p>
+                      <a:pPr algn="l"/>
+                      <a:r>
+                        <a:rPr sz="1000" b="0">
+                          <a:solidFill>
+                            <a:srgbClr val="1D1B43"/>
+                          </a:solidFill>
+                          <a:latin typeface="Calibri"/>
+                        </a:rPr>
+                        <a:t>27/05/2026</a:t>
+                      </a:r>
+                    </a:p>
+                  </a:txBody>
+                  <a:tcPr>
+                    <a:solidFill>
+                      <a:srgbClr val="FFFFFF"/>
+                    </a:solidFill>
+                  </a:tcPr>
+                </a:tc>
+                <a:tc>
+                  <a:txBody>
+                    <a:bodyPr/>
+                    <a:lstStyle/>
+                    <a:p>
+                      <a:pPr algn="l"/>
+                      <a:r>
+                        <a:rPr sz="1000" b="0">
+                          <a:solidFill>
+                            <a:srgbClr val="1D1B43"/>
+                          </a:solidFill>
+                          <a:latin typeface="Calibri"/>
+                        </a:rPr>
+                        <a:t>ENTREGUE FORA DO PRAZO</a:t>
+                      </a:r>
+                    </a:p>
+                  </a:txBody>
+                  <a:tcPr>
+                    <a:solidFill>
+                      <a:srgbClr val="FFFFFF"/>
+                    </a:solidFill>
+                  </a:tcPr>
+                </a:tc>
+              </a:tr>
+              <a:tr h="268941">
+                <a:tc>
+                  <a:txBody>
+                    <a:bodyPr/>
+                    <a:lstStyle/>
+                    <a:p>
+                      <a:pPr algn="l"/>
+                      <a:r>
+                        <a:rPr sz="1000" b="0">
+                          <a:solidFill>
+                            <a:srgbClr val="1D1B43"/>
+                          </a:solidFill>
+                          <a:latin typeface="Calibri"/>
+                        </a:rPr>
+                        <a:t>284745</a:t>
+                      </a:r>
+                    </a:p>
+                  </a:txBody>
+                  <a:tcPr>
+                    <a:solidFill>
+                      <a:srgbClr val="F2F2F2"/>
+                    </a:solidFill>
+                  </a:tcPr>
+                </a:tc>
+                <a:tc>
+                  <a:txBody>
+                    <a:bodyPr/>
+                    <a:lstStyle/>
+                    <a:p>
+                      <a:pPr algn="l"/>
+                      <a:r>
+                        <a:rPr sz="1000" b="0">
+                          <a:solidFill>
+                            <a:srgbClr val="1D1B43"/>
+                          </a:solidFill>
+                          <a:latin typeface="Calibri"/>
+                        </a:rPr>
+                        <a:t>DUFRY DO BRASIL DUTY - GUARULHOS / SP</a:t>
+                      </a:r>
+                    </a:p>
+                  </a:txBody>
+                  <a:tcPr>
+                    <a:solidFill>
+                      <a:srgbClr val="F2F2F2"/>
+                    </a:solidFill>
+                  </a:tcPr>
+                </a:tc>
+                <a:tc>
+                  <a:txBody>
+                    <a:bodyPr/>
+                    <a:lstStyle/>
+                    <a:p>
+                      <a:pPr algn="l"/>
+                      <a:r>
+                        <a:rPr sz="1000" b="0">
+                          <a:solidFill>
+                            <a:srgbClr val="1D1B43"/>
+                          </a:solidFill>
+                          <a:latin typeface="Calibri"/>
+                        </a:rPr>
+                        <a:t>GUARULHOS/SP</a:t>
+                      </a:r>
+                    </a:p>
+                  </a:txBody>
+                  <a:tcPr>
+                    <a:solidFill>
+                      <a:srgbClr val="F2F2F2"/>
+                    </a:solidFill>
+                  </a:tcPr>
+                </a:tc>
+                <a:tc>
+                  <a:txBody>
+                    <a:bodyPr/>
+                    <a:lstStyle/>
+                    <a:p>
+                      <a:pPr algn="l"/>
+                      <a:r>
+                        <a:rPr sz="1000" b="0">
+                          <a:solidFill>
+                            <a:srgbClr val="1D1B43"/>
+                          </a:solidFill>
+                          <a:latin typeface="Calibri"/>
+                        </a:rPr>
+                        <a:t>27/05/2026</a:t>
+                      </a:r>
+                    </a:p>
+                  </a:txBody>
+                  <a:tcPr>
+                    <a:solidFill>
+                      <a:srgbClr val="F2F2F2"/>
+                    </a:solidFill>
+                  </a:tcPr>
+                </a:tc>
+                <a:tc>
+                  <a:txBody>
+                    <a:bodyPr/>
+                    <a:lstStyle/>
+                    <a:p>
+                      <a:pPr algn="l"/>
+                      <a:r>
+                        <a:rPr sz="1000" b="0">
+                          <a:solidFill>
+                            <a:srgbClr val="1D1B43"/>
+                          </a:solidFill>
+                          <a:latin typeface="Calibri"/>
+                        </a:rPr>
+                        <a:t>FORA DO PRAZO</a:t>
+                      </a:r>
+                    </a:p>
+                  </a:txBody>
+                  <a:tcPr>
+                    <a:solidFill>
+                      <a:srgbClr val="F2F2F2"/>
+                    </a:solidFill>
+                  </a:tcPr>
+                </a:tc>
+              </a:tr>
+              <a:tr h="268941">
+                <a:tc>
+                  <a:txBody>
+                    <a:bodyPr/>
+                    <a:lstStyle/>
+                    <a:p>
+                      <a:pPr algn="l"/>
+                      <a:r>
+                        <a:rPr sz="1000" b="0">
+                          <a:solidFill>
+                            <a:srgbClr val="1D1B43"/>
+                          </a:solidFill>
+                          <a:latin typeface="Calibri"/>
+                        </a:rPr>
+                        <a:t>284864</a:t>
+                      </a:r>
+                    </a:p>
+                  </a:txBody>
+                  <a:tcPr>
+                    <a:solidFill>
+                      <a:srgbClr val="FFFFFF"/>
+                    </a:solidFill>
+                  </a:tcPr>
+                </a:tc>
+                <a:tc>
+                  <a:txBody>
+                    <a:bodyPr/>
+                    <a:lstStyle/>
+                    <a:p>
+                      <a:pPr algn="l"/>
+                      <a:r>
+                        <a:rPr sz="1000" b="0">
+                          <a:solidFill>
+                            <a:srgbClr val="1D1B43"/>
+                          </a:solidFill>
+                          <a:latin typeface="Calibri"/>
+                        </a:rPr>
+                        <a:t>KAMELEON BAG COMERCI - GUARULHOS / SP</a:t>
+                      </a:r>
+                    </a:p>
+                  </a:txBody>
+                  <a:tcPr>
+                    <a:solidFill>
+                      <a:srgbClr val="FFFFFF"/>
+                    </a:solidFill>
+                  </a:tcPr>
+                </a:tc>
+                <a:tc>
+                  <a:txBody>
+                    <a:bodyPr/>
+                    <a:lstStyle/>
+                    <a:p>
+                      <a:pPr algn="l"/>
+                      <a:r>
+                        <a:rPr sz="1000" b="0">
+                          <a:solidFill>
+                            <a:srgbClr val="1D1B43"/>
+                          </a:solidFill>
+                          <a:latin typeface="Calibri"/>
+                        </a:rPr>
+                        <a:t>GUARULHOS/SP</a:t>
+                      </a:r>
+                    </a:p>
+                  </a:txBody>
+                  <a:tcPr>
+                    <a:solidFill>
+                      <a:srgbClr val="FFFFFF"/>
+                    </a:solidFill>
+                  </a:tcPr>
+                </a:tc>
+                <a:tc>
+                  <a:txBody>
+                    <a:bodyPr/>
+                    <a:lstStyle/>
+                    <a:p>
+                      <a:pPr algn="l"/>
+                      <a:r>
+                        <a:rPr sz="1000" b="0">
+                          <a:solidFill>
+                            <a:srgbClr val="1D1B43"/>
+                          </a:solidFill>
+                          <a:latin typeface="Calibri"/>
+                        </a:rPr>
+                        <a:t>29/05/2026</a:t>
+                      </a:r>
+                    </a:p>
+                  </a:txBody>
+                  <a:tcPr>
+                    <a:solidFill>
+                      <a:srgbClr val="FFFFFF"/>
+                    </a:solidFill>
+                  </a:tcPr>
+                </a:tc>
+                <a:tc>
+                  <a:txBody>
+                    <a:bodyPr/>
+                    <a:lstStyle/>
+                    <a:p>
+                      <a:pPr algn="l"/>
+                      <a:r>
+                        <a:rPr sz="1000" b="0">
+                          <a:solidFill>
+                            <a:srgbClr val="1D1B43"/>
+                          </a:solidFill>
+                          <a:latin typeface="Calibri"/>
+                        </a:rPr>
+                        <a:t>ENTREGUE FORA DO PRAZO</a:t>
+                      </a:r>
+                    </a:p>
+                  </a:txBody>
+                  <a:tcPr>
+                    <a:solidFill>
+                      <a:srgbClr val="FFFFFF"/>
+                    </a:solidFill>
+                  </a:tcPr>
+                </a:tc>
+              </a:tr>
+              <a:tr h="268941">
+                <a:tc>
+                  <a:txBody>
+                    <a:bodyPr/>
+                    <a:lstStyle/>
+                    <a:p>
+                      <a:pPr algn="l"/>
+                      <a:r>
+                        <a:rPr sz="1000" b="0">
+                          <a:solidFill>
+                            <a:srgbClr val="1D1B43"/>
+                          </a:solidFill>
+                          <a:latin typeface="Calibri"/>
+                        </a:rPr>
+                        <a:t>285592</a:t>
+                      </a:r>
+                    </a:p>
+                  </a:txBody>
+                  <a:tcPr>
+                    <a:solidFill>
+                      <a:srgbClr val="F2F2F2"/>
+                    </a:solidFill>
+                  </a:tcPr>
+                </a:tc>
+                <a:tc>
+                  <a:txBody>
+                    <a:bodyPr/>
+                    <a:lstStyle/>
+                    <a:p>
+                      <a:pPr algn="l"/>
+                      <a:r>
+                        <a:rPr sz="1000" b="0">
+                          <a:solidFill>
+                            <a:srgbClr val="1D1B43"/>
+                          </a:solidFill>
+                          <a:latin typeface="Calibri"/>
+                        </a:rPr>
+                        <a:t>AMAZON SERVICOS DE V - CAJAMAR / SP</a:t>
+                      </a:r>
+                    </a:p>
+                  </a:txBody>
+                  <a:tcPr>
+                    <a:solidFill>
+                      <a:srgbClr val="F2F2F2"/>
                     </a:solidFill>
                   </a:tcPr>
                 </a:tc>
@@ -5531,53 +7286,53 @@
                   </a:txBody>
                   <a:tcPr>
                     <a:solidFill>
-                      <a:srgbClr val="FFFFFF"/>
-                    </a:solidFill>
-                  </a:tcPr>
-                </a:tc>
-                <a:tc>
-                  <a:txBody>
-                    <a:bodyPr/>
-                    <a:lstStyle/>
-                    <a:p>
-                      <a:pPr algn="l"/>
-                      <a:r>
-                        <a:rPr sz="1000" b="0">
-                          <a:solidFill>
-                            <a:srgbClr val="1D1B43"/>
-                          </a:solidFill>
-                          <a:latin typeface="Calibri"/>
-                        </a:rPr>
-                        <a:t>30/04/2026</a:t>
-                      </a:r>
-                    </a:p>
-                  </a:txBody>
-                  <a:tcPr>
-                    <a:solidFill>
-                      <a:srgbClr val="FFFFFF"/>
-                    </a:solidFill>
-                  </a:tcPr>
-                </a:tc>
-                <a:tc>
-                  <a:txBody>
-                    <a:bodyPr/>
-                    <a:lstStyle/>
-                    <a:p>
-                      <a:pPr algn="l"/>
-                      <a:r>
-                        <a:rPr sz="1000" b="0">
-                          <a:solidFill>
-                            <a:srgbClr val="1D1B43"/>
-                          </a:solidFill>
-                          <a:latin typeface="Calibri"/>
-                        </a:rPr>
-                        <a:t>ENTREGUE FORA DO PRAZO</a:t>
-                      </a:r>
-                    </a:p>
-                  </a:txBody>
-                  <a:tcPr>
-                    <a:solidFill>
-                      <a:srgbClr val="FFFFFF"/>
+                      <a:srgbClr val="F2F2F2"/>
+                    </a:solidFill>
+                  </a:tcPr>
+                </a:tc>
+                <a:tc>
+                  <a:txBody>
+                    <a:bodyPr/>
+                    <a:lstStyle/>
+                    <a:p>
+                      <a:pPr algn="l"/>
+                      <a:r>
+                        <a:rPr sz="1000" b="0">
+                          <a:solidFill>
+                            <a:srgbClr val="1D1B43"/>
+                          </a:solidFill>
+                          <a:latin typeface="Calibri"/>
+                        </a:rPr>
+                        <a:t>31/05/2026</a:t>
+                      </a:r>
+                    </a:p>
+                  </a:txBody>
+                  <a:tcPr>
+                    <a:solidFill>
+                      <a:srgbClr val="F2F2F2"/>
+                    </a:solidFill>
+                  </a:tcPr>
+                </a:tc>
+                <a:tc>
+                  <a:txBody>
+                    <a:bodyPr/>
+                    <a:lstStyle/>
+                    <a:p>
+                      <a:pPr algn="l"/>
+                      <a:r>
+                        <a:rPr sz="1000" b="0">
+                          <a:solidFill>
+                            <a:srgbClr val="1D1B43"/>
+                          </a:solidFill>
+                          <a:latin typeface="Calibri"/>
+                        </a:rPr>
+                        <a:t>FORA DO PRAZO</a:t>
+                      </a:r>
+                    </a:p>
+                  </a:txBody>
+                  <a:tcPr>
+                    <a:solidFill>
+                      <a:srgbClr val="F2F2F2"/>
                     </a:solidFill>
                   </a:tcPr>
                 </a:tc>
@@ -5724,7 +7479,7 @@
         </p:nvGraphicFramePr>
         <p:xfrm>
           <a:off x="731520" y="1920240"/>
-          <a:ext cx="10698480" cy="3200400"/>
+          <a:ext cx="10698480" cy="3657600"/>
         </p:xfrm>
         <a:graphic>
           <a:graphicData uri="http://schemas.openxmlformats.org/drawingml/2006/table">
@@ -5917,99 +7672,99 @@
                           </a:solidFill>
                           <a:latin typeface="Calibri"/>
                         </a:rPr>
-                        <a:t>188</a:t>
-                      </a:r>
-                    </a:p>
-                  </a:txBody>
-                  <a:tcPr>
-                    <a:solidFill>
-                      <a:srgbClr val="FFFFFF"/>
-                    </a:solidFill>
-                  </a:tcPr>
-                </a:tc>
-                <a:tc>
-                  <a:txBody>
-                    <a:bodyPr/>
-                    <a:lstStyle/>
-                    <a:p>
-                      <a:pPr algn="l"/>
-                      <a:r>
-                        <a:rPr sz="1000" b="0">
-                          <a:solidFill>
-                            <a:srgbClr val="1D1B43"/>
-                          </a:solidFill>
-                          <a:latin typeface="Calibri"/>
-                        </a:rPr>
-                        <a:t>187</a:t>
-                      </a:r>
-                    </a:p>
-                  </a:txBody>
-                  <a:tcPr>
-                    <a:solidFill>
-                      <a:srgbClr val="FFFFFF"/>
-                    </a:solidFill>
-                  </a:tcPr>
-                </a:tc>
-                <a:tc>
-                  <a:txBody>
-                    <a:bodyPr/>
-                    <a:lstStyle/>
-                    <a:p>
-                      <a:pPr algn="l"/>
-                      <a:r>
-                        <a:rPr sz="1000" b="0">
-                          <a:solidFill>
-                            <a:srgbClr val="1D1B43"/>
-                          </a:solidFill>
-                          <a:latin typeface="Calibri"/>
-                        </a:rPr>
-                        <a:t>1</a:t>
-                      </a:r>
-                    </a:p>
-                  </a:txBody>
-                  <a:tcPr>
-                    <a:solidFill>
-                      <a:srgbClr val="FFFFFF"/>
-                    </a:solidFill>
-                  </a:tcPr>
-                </a:tc>
-                <a:tc>
-                  <a:txBody>
-                    <a:bodyPr/>
-                    <a:lstStyle/>
-                    <a:p>
-                      <a:pPr algn="l"/>
-                      <a:r>
-                        <a:rPr sz="1000" b="0">
-                          <a:solidFill>
-                            <a:srgbClr val="1D1B43"/>
-                          </a:solidFill>
-                          <a:latin typeface="Calibri"/>
-                        </a:rPr>
-                        <a:t>99.5%</a:t>
-                      </a:r>
-                    </a:p>
-                  </a:txBody>
-                  <a:tcPr>
-                    <a:solidFill>
-                      <a:srgbClr val="FFFFFF"/>
-                    </a:solidFill>
-                  </a:tcPr>
-                </a:tc>
-                <a:tc>
-                  <a:txBody>
-                    <a:bodyPr/>
-                    <a:lstStyle/>
-                    <a:p>
-                      <a:pPr algn="l"/>
-                      <a:r>
-                        <a:rPr sz="1000" b="0">
-                          <a:solidFill>
-                            <a:srgbClr val="1D1B43"/>
-                          </a:solidFill>
-                          <a:latin typeface="Calibri"/>
-                        </a:rPr>
-                        <a:t>Excelente</a:t>
+                        <a:t>289</a:t>
+                      </a:r>
+                    </a:p>
+                  </a:txBody>
+                  <a:tcPr>
+                    <a:solidFill>
+                      <a:srgbClr val="FFFFFF"/>
+                    </a:solidFill>
+                  </a:tcPr>
+                </a:tc>
+                <a:tc>
+                  <a:txBody>
+                    <a:bodyPr/>
+                    <a:lstStyle/>
+                    <a:p>
+                      <a:pPr algn="l"/>
+                      <a:r>
+                        <a:rPr sz="1000" b="0">
+                          <a:solidFill>
+                            <a:srgbClr val="1D1B43"/>
+                          </a:solidFill>
+                          <a:latin typeface="Calibri"/>
+                        </a:rPr>
+                        <a:t>274</a:t>
+                      </a:r>
+                    </a:p>
+                  </a:txBody>
+                  <a:tcPr>
+                    <a:solidFill>
+                      <a:srgbClr val="FFFFFF"/>
+                    </a:solidFill>
+                  </a:tcPr>
+                </a:tc>
+                <a:tc>
+                  <a:txBody>
+                    <a:bodyPr/>
+                    <a:lstStyle/>
+                    <a:p>
+                      <a:pPr algn="l"/>
+                      <a:r>
+                        <a:rPr sz="1000" b="0">
+                          <a:solidFill>
+                            <a:srgbClr val="1D1B43"/>
+                          </a:solidFill>
+                          <a:latin typeface="Calibri"/>
+                        </a:rPr>
+                        <a:t>15</a:t>
+                      </a:r>
+                    </a:p>
+                  </a:txBody>
+                  <a:tcPr>
+                    <a:solidFill>
+                      <a:srgbClr val="FFFFFF"/>
+                    </a:solidFill>
+                  </a:tcPr>
+                </a:tc>
+                <a:tc>
+                  <a:txBody>
+                    <a:bodyPr/>
+                    <a:lstStyle/>
+                    <a:p>
+                      <a:pPr algn="l"/>
+                      <a:r>
+                        <a:rPr sz="1000" b="0">
+                          <a:solidFill>
+                            <a:srgbClr val="1D1B43"/>
+                          </a:solidFill>
+                          <a:latin typeface="Calibri"/>
+                        </a:rPr>
+                        <a:t>94.8%</a:t>
+                      </a:r>
+                    </a:p>
+                  </a:txBody>
+                  <a:tcPr>
+                    <a:solidFill>
+                      <a:srgbClr val="FFFFFF"/>
+                    </a:solidFill>
+                  </a:tcPr>
+                </a:tc>
+                <a:tc>
+                  <a:txBody>
+                    <a:bodyPr/>
+                    <a:lstStyle/>
+                    <a:p>
+                      <a:pPr algn="l"/>
+                      <a:r>
+                        <a:rPr sz="1000" b="0">
+                          <a:solidFill>
+                            <a:srgbClr val="1D1B43"/>
+                          </a:solidFill>
+                          <a:latin typeface="Calibri"/>
+                        </a:rPr>
+                        <a:t>Regular</a:t>
                       </a:r>
                     </a:p>
                   </a:txBody>
@@ -6057,7 +7812,7 @@
                           </a:solidFill>
                           <a:latin typeface="Calibri"/>
                         </a:rPr>
-                        <a:t>40</a:t>
+                        <a:t>23</a:t>
                       </a:r>
                     </a:p>
                   </a:txBody>
@@ -6080,7 +7835,7 @@
                           </a:solidFill>
                           <a:latin typeface="Calibri"/>
                         </a:rPr>
-                        <a:t>40</a:t>
+                        <a:t>23</a:t>
                       </a:r>
                     </a:p>
                   </a:txBody>
@@ -6174,122 +7929,122 @@
                           </a:solidFill>
                           <a:latin typeface="Calibri"/>
                         </a:rPr>
-                        <a:t>RJ</a:t>
-                      </a:r>
-                    </a:p>
-                  </a:txBody>
-                  <a:tcPr>
-                    <a:solidFill>
-                      <a:srgbClr val="FFFFFF"/>
-                    </a:solidFill>
-                  </a:tcPr>
-                </a:tc>
-                <a:tc>
-                  <a:txBody>
-                    <a:bodyPr/>
-                    <a:lstStyle/>
-                    <a:p>
-                      <a:pPr algn="l"/>
-                      <a:r>
-                        <a:rPr sz="1000" b="0">
-                          <a:solidFill>
-                            <a:srgbClr val="1D1B43"/>
-                          </a:solidFill>
-                          <a:latin typeface="Calibri"/>
-                        </a:rPr>
-                        <a:t>8</a:t>
-                      </a:r>
-                    </a:p>
-                  </a:txBody>
-                  <a:tcPr>
-                    <a:solidFill>
-                      <a:srgbClr val="FFFFFF"/>
-                    </a:solidFill>
-                  </a:tcPr>
-                </a:tc>
-                <a:tc>
-                  <a:txBody>
-                    <a:bodyPr/>
-                    <a:lstStyle/>
-                    <a:p>
-                      <a:pPr algn="l"/>
-                      <a:r>
-                        <a:rPr sz="1000" b="0">
-                          <a:solidFill>
-                            <a:srgbClr val="1D1B43"/>
-                          </a:solidFill>
-                          <a:latin typeface="Calibri"/>
-                        </a:rPr>
-                        <a:t>8</a:t>
-                      </a:r>
-                    </a:p>
-                  </a:txBody>
-                  <a:tcPr>
-                    <a:solidFill>
-                      <a:srgbClr val="FFFFFF"/>
-                    </a:solidFill>
-                  </a:tcPr>
-                </a:tc>
-                <a:tc>
-                  <a:txBody>
-                    <a:bodyPr/>
-                    <a:lstStyle/>
-                    <a:p>
-                      <a:pPr algn="l"/>
-                      <a:r>
-                        <a:rPr sz="1000" b="0">
-                          <a:solidFill>
-                            <a:srgbClr val="1D1B43"/>
-                          </a:solidFill>
-                          <a:latin typeface="Calibri"/>
-                        </a:rPr>
-                        <a:t>0</a:t>
-                      </a:r>
-                    </a:p>
-                  </a:txBody>
-                  <a:tcPr>
-                    <a:solidFill>
-                      <a:srgbClr val="FFFFFF"/>
-                    </a:solidFill>
-                  </a:tcPr>
-                </a:tc>
-                <a:tc>
-                  <a:txBody>
-                    <a:bodyPr/>
-                    <a:lstStyle/>
-                    <a:p>
-                      <a:pPr algn="l"/>
-                      <a:r>
-                        <a:rPr sz="1000" b="0">
-                          <a:solidFill>
-                            <a:srgbClr val="1D1B43"/>
-                          </a:solidFill>
-                          <a:latin typeface="Calibri"/>
-                        </a:rPr>
-                        <a:t>100.0%</a:t>
-                      </a:r>
-                    </a:p>
-                  </a:txBody>
-                  <a:tcPr>
-                    <a:solidFill>
-                      <a:srgbClr val="FFFFFF"/>
-                    </a:solidFill>
-                  </a:tcPr>
-                </a:tc>
-                <a:tc>
-                  <a:txBody>
-                    <a:bodyPr/>
-                    <a:lstStyle/>
-                    <a:p>
-                      <a:pPr algn="l"/>
-                      <a:r>
-                        <a:rPr sz="1000" b="0">
-                          <a:solidFill>
-                            <a:srgbClr val="1D1B43"/>
-                          </a:solidFill>
-                          <a:latin typeface="Calibri"/>
-                        </a:rPr>
-                        <a:t>Excelente</a:t>
+                        <a:t>PR</a:t>
+                      </a:r>
+                    </a:p>
+                  </a:txBody>
+                  <a:tcPr>
+                    <a:solidFill>
+                      <a:srgbClr val="FFFFFF"/>
+                    </a:solidFill>
+                  </a:tcPr>
+                </a:tc>
+                <a:tc>
+                  <a:txBody>
+                    <a:bodyPr/>
+                    <a:lstStyle/>
+                    <a:p>
+                      <a:pPr algn="l"/>
+                      <a:r>
+                        <a:rPr sz="1000" b="0">
+                          <a:solidFill>
+                            <a:srgbClr val="1D1B43"/>
+                          </a:solidFill>
+                          <a:latin typeface="Calibri"/>
+                        </a:rPr>
+                        <a:t>2</a:t>
+                      </a:r>
+                    </a:p>
+                  </a:txBody>
+                  <a:tcPr>
+                    <a:solidFill>
+                      <a:srgbClr val="FFFFFF"/>
+                    </a:solidFill>
+                  </a:tcPr>
+                </a:tc>
+                <a:tc>
+                  <a:txBody>
+                    <a:bodyPr/>
+                    <a:lstStyle/>
+                    <a:p>
+                      <a:pPr algn="l"/>
+                      <a:r>
+                        <a:rPr sz="1000" b="0">
+                          <a:solidFill>
+                            <a:srgbClr val="1D1B43"/>
+                          </a:solidFill>
+                          <a:latin typeface="Calibri"/>
+                        </a:rPr>
+                        <a:t>1</a:t>
+                      </a:r>
+                    </a:p>
+                  </a:txBody>
+                  <a:tcPr>
+                    <a:solidFill>
+                      <a:srgbClr val="FFFFFF"/>
+                    </a:solidFill>
+                  </a:tcPr>
+                </a:tc>
+                <a:tc>
+                  <a:txBody>
+                    <a:bodyPr/>
+                    <a:lstStyle/>
+                    <a:p>
+                      <a:pPr algn="l"/>
+                      <a:r>
+                        <a:rPr sz="1000" b="0">
+                          <a:solidFill>
+                            <a:srgbClr val="1D1B43"/>
+                          </a:solidFill>
+                          <a:latin typeface="Calibri"/>
+                        </a:rPr>
+                        <a:t>1</a:t>
+                      </a:r>
+                    </a:p>
+                  </a:txBody>
+                  <a:tcPr>
+                    <a:solidFill>
+                      <a:srgbClr val="FFFFFF"/>
+                    </a:solidFill>
+                  </a:tcPr>
+                </a:tc>
+                <a:tc>
+                  <a:txBody>
+                    <a:bodyPr/>
+                    <a:lstStyle/>
+                    <a:p>
+                      <a:pPr algn="l"/>
+                      <a:r>
+                        <a:rPr sz="1000" b="0">
+                          <a:solidFill>
+                            <a:srgbClr val="1D1B43"/>
+                          </a:solidFill>
+                          <a:latin typeface="Calibri"/>
+                        </a:rPr>
+                        <a:t>50.0%</a:t>
+                      </a:r>
+                    </a:p>
+                  </a:txBody>
+                  <a:tcPr>
+                    <a:solidFill>
+                      <a:srgbClr val="FFFFFF"/>
+                    </a:solidFill>
+                  </a:tcPr>
+                </a:tc>
+                <a:tc>
+                  <a:txBody>
+                    <a:bodyPr/>
+                    <a:lstStyle/>
+                    <a:p>
+                      <a:pPr algn="l"/>
+                      <a:r>
+                        <a:rPr sz="1000" b="0">
+                          <a:solidFill>
+                            <a:srgbClr val="1D1B43"/>
+                          </a:solidFill>
+                          <a:latin typeface="Calibri"/>
+                        </a:rPr>
+                        <a:t>Atencao</a:t>
                       </a:r>
                     </a:p>
                   </a:txBody>
@@ -6314,7 +8069,7 @@
                           </a:solidFill>
                           <a:latin typeface="Calibri"/>
                         </a:rPr>
-                        <a:t>PR</a:t>
+                        <a:t>MG</a:t>
                       </a:r>
                     </a:p>
                   </a:txBody>
@@ -6337,7 +8092,7 @@
                           </a:solidFill>
                           <a:latin typeface="Calibri"/>
                         </a:rPr>
-                        <a:t>4</a:t>
+                        <a:t>1</a:t>
                       </a:r>
                     </a:p>
                   </a:txBody>
@@ -6360,7 +8115,7 @@
                           </a:solidFill>
                           <a:latin typeface="Calibri"/>
                         </a:rPr>
-                        <a:t>4</a:t>
+                        <a:t>1</a:t>
                       </a:r>
                     </a:p>
                   </a:txBody>
@@ -6454,53 +8209,53 @@
                           </a:solidFill>
                           <a:latin typeface="Calibri"/>
                         </a:rPr>
-                        <a:t>RS</a:t>
-                      </a:r>
-                    </a:p>
-                  </a:txBody>
-                  <a:tcPr>
-                    <a:solidFill>
-                      <a:srgbClr val="FFFFFF"/>
-                    </a:solidFill>
-                  </a:tcPr>
-                </a:tc>
-                <a:tc>
-                  <a:txBody>
-                    <a:bodyPr/>
-                    <a:lstStyle/>
-                    <a:p>
-                      <a:pPr algn="l"/>
-                      <a:r>
-                        <a:rPr sz="1000" b="0">
-                          <a:solidFill>
-                            <a:srgbClr val="1D1B43"/>
-                          </a:solidFill>
-                          <a:latin typeface="Calibri"/>
-                        </a:rPr>
-                        <a:t>4</a:t>
-                      </a:r>
-                    </a:p>
-                  </a:txBody>
-                  <a:tcPr>
-                    <a:solidFill>
-                      <a:srgbClr val="FFFFFF"/>
-                    </a:solidFill>
-                  </a:tcPr>
-                </a:tc>
-                <a:tc>
-                  <a:txBody>
-                    <a:bodyPr/>
-                    <a:lstStyle/>
-                    <a:p>
-                      <a:pPr algn="l"/>
-                      <a:r>
-                        <a:rPr sz="1000" b="0">
-                          <a:solidFill>
-                            <a:srgbClr val="1D1B43"/>
-                          </a:solidFill>
-                          <a:latin typeface="Calibri"/>
-                        </a:rPr>
-                        <a:t>4</a:t>
+                        <a:t>GO</a:t>
+                      </a:r>
+                    </a:p>
+                  </a:txBody>
+                  <a:tcPr>
+                    <a:solidFill>
+                      <a:srgbClr val="FFFFFF"/>
+                    </a:solidFill>
+                  </a:tcPr>
+                </a:tc>
+                <a:tc>
+                  <a:txBody>
+                    <a:bodyPr/>
+                    <a:lstStyle/>
+                    <a:p>
+                      <a:pPr algn="l"/>
+                      <a:r>
+                        <a:rPr sz="1000" b="0">
+                          <a:solidFill>
+                            <a:srgbClr val="1D1B43"/>
+                          </a:solidFill>
+                          <a:latin typeface="Calibri"/>
+                        </a:rPr>
+                        <a:t>1</a:t>
+                      </a:r>
+                    </a:p>
+                  </a:txBody>
+                  <a:tcPr>
+                    <a:solidFill>
+                      <a:srgbClr val="FFFFFF"/>
+                    </a:solidFill>
+                  </a:tcPr>
+                </a:tc>
+                <a:tc>
+                  <a:txBody>
+                    <a:bodyPr/>
+                    <a:lstStyle/>
+                    <a:p>
+                      <a:pPr algn="l"/>
+                      <a:r>
+                        <a:rPr sz="1000" b="0">
+                          <a:solidFill>
+                            <a:srgbClr val="1D1B43"/>
+                          </a:solidFill>
+                          <a:latin typeface="Calibri"/>
+                        </a:rPr>
+                        <a:t>1</a:t>
                       </a:r>
                     </a:p>
                   </a:txBody>
@@ -6594,7 +8349,7 @@
                           </a:solidFill>
                           <a:latin typeface="Calibri"/>
                         </a:rPr>
-                        <a:t>MT</a:t>
+                        <a:t>DF</a:t>
                       </a:r>
                     </a:p>
                   </a:txBody>
@@ -6716,6 +8471,146 @@
                   <a:tcPr>
                     <a:solidFill>
                       <a:srgbClr val="F2F2F2"/>
+                    </a:solidFill>
+                  </a:tcPr>
+                </a:tc>
+              </a:tr>
+              <a:tr h="457200">
+                <a:tc>
+                  <a:txBody>
+                    <a:bodyPr/>
+                    <a:lstStyle/>
+                    <a:p>
+                      <a:pPr algn="l"/>
+                      <a:r>
+                        <a:rPr sz="1000" b="0">
+                          <a:solidFill>
+                            <a:srgbClr val="1D1B43"/>
+                          </a:solidFill>
+                          <a:latin typeface="Calibri"/>
+                        </a:rPr>
+                        <a:t>RJ</a:t>
+                      </a:r>
+                    </a:p>
+                  </a:txBody>
+                  <a:tcPr>
+                    <a:solidFill>
+                      <a:srgbClr val="FFFFFF"/>
+                    </a:solidFill>
+                  </a:tcPr>
+                </a:tc>
+                <a:tc>
+                  <a:txBody>
+                    <a:bodyPr/>
+                    <a:lstStyle/>
+                    <a:p>
+                      <a:pPr algn="l"/>
+                      <a:r>
+                        <a:rPr sz="1000" b="0">
+                          <a:solidFill>
+                            <a:srgbClr val="1D1B43"/>
+                          </a:solidFill>
+                          <a:latin typeface="Calibri"/>
+                        </a:rPr>
+                        <a:t>1</a:t>
+                      </a:r>
+                    </a:p>
+                  </a:txBody>
+                  <a:tcPr>
+                    <a:solidFill>
+                      <a:srgbClr val="FFFFFF"/>
+                    </a:solidFill>
+                  </a:tcPr>
+                </a:tc>
+                <a:tc>
+                  <a:txBody>
+                    <a:bodyPr/>
+                    <a:lstStyle/>
+                    <a:p>
+                      <a:pPr algn="l"/>
+                      <a:r>
+                        <a:rPr sz="1000" b="0">
+                          <a:solidFill>
+                            <a:srgbClr val="1D1B43"/>
+                          </a:solidFill>
+                          <a:latin typeface="Calibri"/>
+                        </a:rPr>
+                        <a:t>1</a:t>
+                      </a:r>
+                    </a:p>
+                  </a:txBody>
+                  <a:tcPr>
+                    <a:solidFill>
+                      <a:srgbClr val="FFFFFF"/>
+                    </a:solidFill>
+                  </a:tcPr>
+                </a:tc>
+                <a:tc>
+                  <a:txBody>
+                    <a:bodyPr/>
+                    <a:lstStyle/>
+                    <a:p>
+                      <a:pPr algn="l"/>
+                      <a:r>
+                        <a:rPr sz="1000" b="0">
+                          <a:solidFill>
+                            <a:srgbClr val="1D1B43"/>
+                          </a:solidFill>
+                          <a:latin typeface="Calibri"/>
+                        </a:rPr>
+                        <a:t>0</a:t>
+                      </a:r>
+                    </a:p>
+                  </a:txBody>
+                  <a:tcPr>
+                    <a:solidFill>
+                      <a:srgbClr val="FFFFFF"/>
+                    </a:solidFill>
+                  </a:tcPr>
+                </a:tc>
+                <a:tc>
+                  <a:txBody>
+                    <a:bodyPr/>
+                    <a:lstStyle/>
+                    <a:p>
+                      <a:pPr algn="l"/>
+                      <a:r>
+                        <a:rPr sz="1000" b="0">
+                          <a:solidFill>
+                            <a:srgbClr val="1D1B43"/>
+                          </a:solidFill>
+                          <a:latin typeface="Calibri"/>
+                        </a:rPr>
+                        <a:t>100.0%</a:t>
+                      </a:r>
+                    </a:p>
+                  </a:txBody>
+                  <a:tcPr>
+                    <a:solidFill>
+                      <a:srgbClr val="FFFFFF"/>
+                    </a:solidFill>
+                  </a:tcPr>
+                </a:tc>
+                <a:tc>
+                  <a:txBody>
+                    <a:bodyPr/>
+                    <a:lstStyle/>
+                    <a:p>
+                      <a:pPr algn="l"/>
+                      <a:r>
+                        <a:rPr sz="1000" b="0">
+                          <a:solidFill>
+                            <a:srgbClr val="1D1B43"/>
+                          </a:solidFill>
+                          <a:latin typeface="Calibri"/>
+                        </a:rPr>
+                        <a:t>Excelente</a:t>
+                      </a:r>
+                    </a:p>
+                  </a:txBody>
+                  <a:tcPr>
+                    <a:solidFill>
+                      <a:srgbClr val="FFFFFF"/>
                     </a:solidFill>
                   </a:tcPr>
                 </a:tc>
@@ -6804,7 +8699,7 @@
                 </a:solidFill>
                 <a:latin typeface="Calibri"/>
               </a:rPr>
-              <a:t>TOP DESTINATARIOS (91 pontos)</a:t>
+              <a:t>TOP DESTINATARIOS (111 pontos)</a:t>
             </a:r>
           </a:p>
         </p:txBody>
@@ -7102,99 +8997,99 @@
                           </a:solidFill>
                           <a:latin typeface="Calibri"/>
                         </a:rPr>
-                        <a:t>42</a:t>
-                      </a:r>
-                    </a:p>
-                  </a:txBody>
-                  <a:tcPr>
-                    <a:solidFill>
-                      <a:srgbClr val="FFFFFF"/>
-                    </a:solidFill>
-                  </a:tcPr>
-                </a:tc>
-                <a:tc>
-                  <a:txBody>
-                    <a:bodyPr/>
-                    <a:lstStyle/>
-                    <a:p>
-                      <a:pPr algn="l"/>
-                      <a:r>
-                        <a:rPr sz="1000" b="0">
-                          <a:solidFill>
-                            <a:srgbClr val="1D1B43"/>
-                          </a:solidFill>
-                          <a:latin typeface="Calibri"/>
-                        </a:rPr>
-                        <a:t>42</a:t>
-                      </a:r>
-                    </a:p>
-                  </a:txBody>
-                  <a:tcPr>
-                    <a:solidFill>
-                      <a:srgbClr val="FFFFFF"/>
-                    </a:solidFill>
-                  </a:tcPr>
-                </a:tc>
-                <a:tc>
-                  <a:txBody>
-                    <a:bodyPr/>
-                    <a:lstStyle/>
-                    <a:p>
-                      <a:pPr algn="l"/>
-                      <a:r>
-                        <a:rPr sz="1000" b="0">
-                          <a:solidFill>
-                            <a:srgbClr val="1D1B43"/>
-                          </a:solidFill>
-                          <a:latin typeface="Calibri"/>
-                        </a:rPr>
-                        <a:t>0</a:t>
-                      </a:r>
-                    </a:p>
-                  </a:txBody>
-                  <a:tcPr>
-                    <a:solidFill>
-                      <a:srgbClr val="FFFFFF"/>
-                    </a:solidFill>
-                  </a:tcPr>
-                </a:tc>
-                <a:tc>
-                  <a:txBody>
-                    <a:bodyPr/>
-                    <a:lstStyle/>
-                    <a:p>
-                      <a:pPr algn="l"/>
-                      <a:r>
-                        <a:rPr sz="1000" b="0">
-                          <a:solidFill>
-                            <a:srgbClr val="1D1B43"/>
-                          </a:solidFill>
-                          <a:latin typeface="Calibri"/>
-                        </a:rPr>
-                        <a:t>100.0%</a:t>
-                      </a:r>
-                    </a:p>
-                  </a:txBody>
-                  <a:tcPr>
-                    <a:solidFill>
-                      <a:srgbClr val="FFFFFF"/>
-                    </a:solidFill>
-                  </a:tcPr>
-                </a:tc>
-                <a:tc>
-                  <a:txBody>
-                    <a:bodyPr/>
-                    <a:lstStyle/>
-                    <a:p>
-                      <a:pPr algn="l"/>
-                      <a:r>
-                        <a:rPr sz="1000" b="0">
-                          <a:solidFill>
-                            <a:srgbClr val="1D1B43"/>
-                          </a:solidFill>
-                          <a:latin typeface="Calibri"/>
-                        </a:rPr>
-                        <a:t>Excelente</a:t>
+                        <a:t>61</a:t>
+                      </a:r>
+                    </a:p>
+                  </a:txBody>
+                  <a:tcPr>
+                    <a:solidFill>
+                      <a:srgbClr val="FFFFFF"/>
+                    </a:solidFill>
+                  </a:tcPr>
+                </a:tc>
+                <a:tc>
+                  <a:txBody>
+                    <a:bodyPr/>
+                    <a:lstStyle/>
+                    <a:p>
+                      <a:pPr algn="l"/>
+                      <a:r>
+                        <a:rPr sz="1000" b="0">
+                          <a:solidFill>
+                            <a:srgbClr val="1D1B43"/>
+                          </a:solidFill>
+                          <a:latin typeface="Calibri"/>
+                        </a:rPr>
+                        <a:t>58</a:t>
+                      </a:r>
+                    </a:p>
+                  </a:txBody>
+                  <a:tcPr>
+                    <a:solidFill>
+                      <a:srgbClr val="FFFFFF"/>
+                    </a:solidFill>
+                  </a:tcPr>
+                </a:tc>
+                <a:tc>
+                  <a:txBody>
+                    <a:bodyPr/>
+                    <a:lstStyle/>
+                    <a:p>
+                      <a:pPr algn="l"/>
+                      <a:r>
+                        <a:rPr sz="1000" b="0">
+                          <a:solidFill>
+                            <a:srgbClr val="1D1B43"/>
+                          </a:solidFill>
+                          <a:latin typeface="Calibri"/>
+                        </a:rPr>
+                        <a:t>3</a:t>
+                      </a:r>
+                    </a:p>
+                  </a:txBody>
+                  <a:tcPr>
+                    <a:solidFill>
+                      <a:srgbClr val="FFFFFF"/>
+                    </a:solidFill>
+                  </a:tcPr>
+                </a:tc>
+                <a:tc>
+                  <a:txBody>
+                    <a:bodyPr/>
+                    <a:lstStyle/>
+                    <a:p>
+                      <a:pPr algn="l"/>
+                      <a:r>
+                        <a:rPr sz="1000" b="0">
+                          <a:solidFill>
+                            <a:srgbClr val="1D1B43"/>
+                          </a:solidFill>
+                          <a:latin typeface="Calibri"/>
+                        </a:rPr>
+                        <a:t>95.1%</a:t>
+                      </a:r>
+                    </a:p>
+                  </a:txBody>
+                  <a:tcPr>
+                    <a:solidFill>
+                      <a:srgbClr val="FFFFFF"/>
+                    </a:solidFill>
+                  </a:tcPr>
+                </a:tc>
+                <a:tc>
+                  <a:txBody>
+                    <a:bodyPr/>
+                    <a:lstStyle/>
+                    <a:p>
+                      <a:pPr algn="l"/>
+                      <a:r>
+                        <a:rPr sz="1000" b="0">
+                          <a:solidFill>
+                            <a:srgbClr val="1D1B43"/>
+                          </a:solidFill>
+                          <a:latin typeface="Calibri"/>
+                        </a:rPr>
+                        <a:t>Regular</a:t>
                       </a:r>
                     </a:p>
                   </a:txBody>
@@ -7242,7 +9137,7 @@
                           </a:solidFill>
                           <a:latin typeface="Calibri"/>
                         </a:rPr>
-                        <a:t>SAMSONITE BRASIL LTD - NAVEGANTES / SC</a:t>
+                        <a:t>NAMASTE SERVICOS LTD - SAO PAULO / SP</a:t>
                       </a:r>
                     </a:p>
                   </a:txBody>
@@ -7265,7 +9160,7 @@
                           </a:solidFill>
                           <a:latin typeface="Calibri"/>
                         </a:rPr>
-                        <a:t>19</a:t>
+                        <a:t>23</a:t>
                       </a:r>
                     </a:p>
                   </a:txBody>
@@ -7288,7 +9183,7 @@
                           </a:solidFill>
                           <a:latin typeface="Calibri"/>
                         </a:rPr>
-                        <a:t>19</a:t>
+                        <a:t>23</a:t>
                       </a:r>
                     </a:p>
                   </a:txBody>
@@ -7405,53 +9300,53 @@
                           </a:solidFill>
                           <a:latin typeface="Calibri"/>
                         </a:rPr>
-                        <a:t>NAMASTE SERVICOS LTD - SAO PAULO / SP</a:t>
-                      </a:r>
-                    </a:p>
-                  </a:txBody>
-                  <a:tcPr>
-                    <a:solidFill>
-                      <a:srgbClr val="FFFFFF"/>
-                    </a:solidFill>
-                  </a:tcPr>
-                </a:tc>
-                <a:tc>
-                  <a:txBody>
-                    <a:bodyPr/>
-                    <a:lstStyle/>
-                    <a:p>
-                      <a:pPr algn="l"/>
-                      <a:r>
-                        <a:rPr sz="1000" b="0">
-                          <a:solidFill>
-                            <a:srgbClr val="1D1B43"/>
-                          </a:solidFill>
-                          <a:latin typeface="Calibri"/>
-                        </a:rPr>
-                        <a:t>15</a:t>
-                      </a:r>
-                    </a:p>
-                  </a:txBody>
-                  <a:tcPr>
-                    <a:solidFill>
-                      <a:srgbClr val="FFFFFF"/>
-                    </a:solidFill>
-                  </a:tcPr>
-                </a:tc>
-                <a:tc>
-                  <a:txBody>
-                    <a:bodyPr/>
-                    <a:lstStyle/>
-                    <a:p>
-                      <a:pPr algn="l"/>
-                      <a:r>
-                        <a:rPr sz="1000" b="0">
-                          <a:solidFill>
-                            <a:srgbClr val="1D1B43"/>
-                          </a:solidFill>
-                          <a:latin typeface="Calibri"/>
-                        </a:rPr>
-                        <a:t>15</a:t>
+                        <a:t>INOVATHI PARTICIPACO - SAO PAULO / SP</a:t>
+                      </a:r>
+                    </a:p>
+                  </a:txBody>
+                  <a:tcPr>
+                    <a:solidFill>
+                      <a:srgbClr val="FFFFFF"/>
+                    </a:solidFill>
+                  </a:tcPr>
+                </a:tc>
+                <a:tc>
+                  <a:txBody>
+                    <a:bodyPr/>
+                    <a:lstStyle/>
+                    <a:p>
+                      <a:pPr algn="l"/>
+                      <a:r>
+                        <a:rPr sz="1000" b="0">
+                          <a:solidFill>
+                            <a:srgbClr val="1D1B43"/>
+                          </a:solidFill>
+                          <a:latin typeface="Calibri"/>
+                        </a:rPr>
+                        <a:t>14</a:t>
+                      </a:r>
+                    </a:p>
+                  </a:txBody>
+                  <a:tcPr>
+                    <a:solidFill>
+                      <a:srgbClr val="FFFFFF"/>
+                    </a:solidFill>
+                  </a:tcPr>
+                </a:tc>
+                <a:tc>
+                  <a:txBody>
+                    <a:bodyPr/>
+                    <a:lstStyle/>
+                    <a:p>
+                      <a:pPr algn="l"/>
+                      <a:r>
+                        <a:rPr sz="1000" b="0">
+                          <a:solidFill>
+                            <a:srgbClr val="1D1B43"/>
+                          </a:solidFill>
+                          <a:latin typeface="Calibri"/>
+                        </a:rPr>
+                        <a:t>14</a:t>
                       </a:r>
                     </a:p>
                   </a:txBody>
@@ -7591,7 +9486,7 @@
                           </a:solidFill>
                           <a:latin typeface="Calibri"/>
                         </a:rPr>
-                        <a:t>9</a:t>
+                        <a:t>12</a:t>
                       </a:r>
                     </a:p>
                   </a:txBody>
@@ -7614,7 +9509,7 @@
                           </a:solidFill>
                           <a:latin typeface="Calibri"/>
                         </a:rPr>
-                        <a:t>9</a:t>
+                        <a:t>11</a:t>
                       </a:r>
                     </a:p>
                   </a:txBody>
@@ -7637,7 +9532,7 @@
                           </a:solidFill>
                           <a:latin typeface="Calibri"/>
                         </a:rPr>
-                        <a:t>0</a:t>
+                        <a:t>1</a:t>
                       </a:r>
                     </a:p>
                   </a:txBody>
@@ -7660,7 +9555,7 @@
                           </a:solidFill>
                           <a:latin typeface="Calibri"/>
                         </a:rPr>
-                        <a:t>100.0%</a:t>
+                        <a:t>91.7%</a:t>
                       </a:r>
                     </a:p>
                   </a:txBody>
@@ -7683,7 +9578,7 @@
                           </a:solidFill>
                           <a:latin typeface="Calibri"/>
                         </a:rPr>
-                        <a:t>Excelente</a:t>
+                        <a:t>Regular</a:t>
                       </a:r>
                     </a:p>
                   </a:txBody>
@@ -7731,7 +9626,7 @@
                           </a:solidFill>
                           <a:latin typeface="Calibri"/>
                         </a:rPr>
-                        <a:t>INTERTRAVEL BRASIL C - RIBEIRAO PRETO / SP</a:t>
+                        <a:t>SAM PRAIA ARTIGOS DE - SANTOS / SP</a:t>
                       </a:r>
                     </a:p>
                   </a:txBody>
@@ -7894,7 +9789,7 @@
                           </a:solidFill>
                           <a:latin typeface="Calibri"/>
                         </a:rPr>
-                        <a:t>SAMSONITE BRASIL LTD - SAO ROQUE / SP</a:t>
+                        <a:t>SAMSONITE BRASIL LTD - ITUPEVA / SP</a:t>
                       </a:r>
                     </a:p>
                   </a:txBody>
@@ -7917,7 +9812,7 @@
                           </a:solidFill>
                           <a:latin typeface="Calibri"/>
                         </a:rPr>
-                        <a:t>6</a:t>
+                        <a:t>7</a:t>
                       </a:r>
                     </a:p>
                   </a:txBody>
@@ -7940,7 +9835,7 @@
                           </a:solidFill>
                           <a:latin typeface="Calibri"/>
                         </a:rPr>
-                        <a:t>6</a:t>
+                        <a:t>7</a:t>
                       </a:r>
                     </a:p>
                   </a:txBody>
@@ -8057,7 +9952,7 @@
                           </a:solidFill>
                           <a:latin typeface="Calibri"/>
                         </a:rPr>
-                        <a:t>INTERTRAVEL BRASIL C - SAO JOSE DO RIO PRETO / S</a:t>
+                        <a:t>GIOVANA S. VIEIRA CO - CAMPINAS / SP</a:t>
                       </a:r>
                     </a:p>
                   </a:txBody>
@@ -8220,7 +10115,7 @@
                           </a:solidFill>
                           <a:latin typeface="Calibri"/>
                         </a:rPr>
-                        <a:t>SAMSONITE BRASIL LTD - ITUPEVA / SP</a:t>
+                        <a:t>SAMITT JARDIM ARTIGO - SAO PAULO / SP</a:t>
                       </a:r>
                     </a:p>
                   </a:txBody>
@@ -8243,7 +10138,7 @@
                           </a:solidFill>
                           <a:latin typeface="Calibri"/>
                         </a:rPr>
-                        <a:t>5</a:t>
+                        <a:t>6</a:t>
                       </a:r>
                     </a:p>
                   </a:txBody>
@@ -8266,7 +10161,7 @@
                           </a:solidFill>
                           <a:latin typeface="Calibri"/>
                         </a:rPr>
-                        <a:t>5</a:t>
+                        <a:t>6</a:t>
                       </a:r>
                     </a:p>
                   </a:txBody>
@@ -8383,53 +10278,53 @@
                           </a:solidFill>
                           <a:latin typeface="Calibri"/>
                         </a:rPr>
-                        <a:t>GIOVANA S. VIEIRA CO - CAMPINAS / SP</a:t>
-                      </a:r>
-                    </a:p>
-                  </a:txBody>
-                  <a:tcPr>
-                    <a:solidFill>
-                      <a:srgbClr val="FFFFFF"/>
-                    </a:solidFill>
-                  </a:tcPr>
-                </a:tc>
-                <a:tc>
-                  <a:txBody>
-                    <a:bodyPr/>
-                    <a:lstStyle/>
-                    <a:p>
-                      <a:pPr algn="l"/>
-                      <a:r>
-                        <a:rPr sz="1000" b="0">
-                          <a:solidFill>
-                            <a:srgbClr val="1D1B43"/>
-                          </a:solidFill>
-                          <a:latin typeface="Calibri"/>
-                        </a:rPr>
-                        <a:t>5</a:t>
-                      </a:r>
-                    </a:p>
-                  </a:txBody>
-                  <a:tcPr>
-                    <a:solidFill>
-                      <a:srgbClr val="FFFFFF"/>
-                    </a:solidFill>
-                  </a:tcPr>
-                </a:tc>
-                <a:tc>
-                  <a:txBody>
-                    <a:bodyPr/>
-                    <a:lstStyle/>
-                    <a:p>
-                      <a:pPr algn="l"/>
-                      <a:r>
-                        <a:rPr sz="1000" b="0">
-                          <a:solidFill>
-                            <a:srgbClr val="1D1B43"/>
-                          </a:solidFill>
-                          <a:latin typeface="Calibri"/>
-                        </a:rPr>
-                        <a:t>5</a:t>
+                        <a:t>INTERTRAVEL BRASIL C - RIBEIRAO PRETO / SP</a:t>
+                      </a:r>
+                    </a:p>
+                  </a:txBody>
+                  <a:tcPr>
+                    <a:solidFill>
+                      <a:srgbClr val="FFFFFF"/>
+                    </a:solidFill>
+                  </a:tcPr>
+                </a:tc>
+                <a:tc>
+                  <a:txBody>
+                    <a:bodyPr/>
+                    <a:lstStyle/>
+                    <a:p>
+                      <a:pPr algn="l"/>
+                      <a:r>
+                        <a:rPr sz="1000" b="0">
+                          <a:solidFill>
+                            <a:srgbClr val="1D1B43"/>
+                          </a:solidFill>
+                          <a:latin typeface="Calibri"/>
+                        </a:rPr>
+                        <a:t>6</a:t>
+                      </a:r>
+                    </a:p>
+                  </a:txBody>
+                  <a:tcPr>
+                    <a:solidFill>
+                      <a:srgbClr val="FFFFFF"/>
+                    </a:solidFill>
+                  </a:tcPr>
+                </a:tc>
+                <a:tc>
+                  <a:txBody>
+                    <a:bodyPr/>
+                    <a:lstStyle/>
+                    <a:p>
+                      <a:pPr algn="l"/>
+                      <a:r>
+                        <a:rPr sz="1000" b="0">
+                          <a:solidFill>
+                            <a:srgbClr val="1D1B43"/>
+                          </a:solidFill>
+                          <a:latin typeface="Calibri"/>
+                        </a:rPr>
+                        <a:t>6</a:t>
                       </a:r>
                     </a:p>
                   </a:txBody>
@@ -8569,6 +10464,29 @@
                           </a:solidFill>
                           <a:latin typeface="Calibri"/>
                         </a:rPr>
+                        <a:t>6</a:t>
+                      </a:r>
+                    </a:p>
+                  </a:txBody>
+                  <a:tcPr>
+                    <a:solidFill>
+                      <a:srgbClr val="F2F2F2"/>
+                    </a:solidFill>
+                  </a:tcPr>
+                </a:tc>
+                <a:tc>
+                  <a:txBody>
+                    <a:bodyPr/>
+                    <a:lstStyle/>
+                    <a:p>
+                      <a:pPr algn="l"/>
+                      <a:r>
+                        <a:rPr sz="1000" b="0">
+                          <a:solidFill>
+                            <a:srgbClr val="1D1B43"/>
+                          </a:solidFill>
+                          <a:latin typeface="Calibri"/>
+                        </a:rPr>
                         <a:t>5</a:t>
                       </a:r>
                     </a:p>
@@ -8592,7 +10510,7 @@
                           </a:solidFill>
                           <a:latin typeface="Calibri"/>
                         </a:rPr>
-                        <a:t>5</a:t>
+                        <a:t>1</a:t>
                       </a:r>
                     </a:p>
                   </a:txBody>
@@ -8615,7 +10533,7 @@
                           </a:solidFill>
                           <a:latin typeface="Calibri"/>
                         </a:rPr>
-                        <a:t>0</a:t>
+                        <a:t>83.3%</a:t>
                       </a:r>
                     </a:p>
                   </a:txBody>
@@ -8638,30 +10556,7 @@
                           </a:solidFill>
                           <a:latin typeface="Calibri"/>
                         </a:rPr>
-                        <a:t>100.0%</a:t>
-                      </a:r>
-                    </a:p>
-                  </a:txBody>
-                  <a:tcPr>
-                    <a:solidFill>
-                      <a:srgbClr val="F2F2F2"/>
-                    </a:solidFill>
-                  </a:tcPr>
-                </a:tc>
-                <a:tc>
-                  <a:txBody>
-                    <a:bodyPr/>
-                    <a:lstStyle/>
-                    <a:p>
-                      <a:pPr algn="l"/>
-                      <a:r>
-                        <a:rPr sz="1000" b="0">
-                          <a:solidFill>
-                            <a:srgbClr val="1D1B43"/>
-                          </a:solidFill>
-                          <a:latin typeface="Calibri"/>
-                        </a:rPr>
-                        <a:t>Excelente</a:t>
+                        <a:t>Atencao</a:t>
                       </a:r>
                     </a:p>
                   </a:txBody>
@@ -8709,53 +10604,53 @@
                           </a:solidFill>
                           <a:latin typeface="Calibri"/>
                         </a:rPr>
-                        <a:t>SAMITT JARDIM ARTIGO - SAO PAULO / SP</a:t>
-                      </a:r>
-                    </a:p>
-                  </a:txBody>
-                  <a:tcPr>
-                    <a:solidFill>
-                      <a:srgbClr val="FFFFFF"/>
-                    </a:solidFill>
-                  </a:tcPr>
-                </a:tc>
-                <a:tc>
-                  <a:txBody>
-                    <a:bodyPr/>
-                    <a:lstStyle/>
-                    <a:p>
-                      <a:pPr algn="l"/>
-                      <a:r>
-                        <a:rPr sz="1000" b="0">
-                          <a:solidFill>
-                            <a:srgbClr val="1D1B43"/>
-                          </a:solidFill>
-                          <a:latin typeface="Calibri"/>
-                        </a:rPr>
-                        <a:t>5</a:t>
-                      </a:r>
-                    </a:p>
-                  </a:txBody>
-                  <a:tcPr>
-                    <a:solidFill>
-                      <a:srgbClr val="FFFFFF"/>
-                    </a:solidFill>
-                  </a:tcPr>
-                </a:tc>
-                <a:tc>
-                  <a:txBody>
-                    <a:bodyPr/>
-                    <a:lstStyle/>
-                    <a:p>
-                      <a:pPr algn="l"/>
-                      <a:r>
-                        <a:rPr sz="1000" b="0">
-                          <a:solidFill>
-                            <a:srgbClr val="1D1B43"/>
-                          </a:solidFill>
-                          <a:latin typeface="Calibri"/>
-                        </a:rPr>
-                        <a:t>5</a:t>
+                        <a:t>SAL PIRACICABA ARTIG - PIRACICABA / SP</a:t>
+                      </a:r>
+                    </a:p>
+                  </a:txBody>
+                  <a:tcPr>
+                    <a:solidFill>
+                      <a:srgbClr val="FFFFFF"/>
+                    </a:solidFill>
+                  </a:tcPr>
+                </a:tc>
+                <a:tc>
+                  <a:txBody>
+                    <a:bodyPr/>
+                    <a:lstStyle/>
+                    <a:p>
+                      <a:pPr algn="l"/>
+                      <a:r>
+                        <a:rPr sz="1000" b="0">
+                          <a:solidFill>
+                            <a:srgbClr val="1D1B43"/>
+                          </a:solidFill>
+                          <a:latin typeface="Calibri"/>
+                        </a:rPr>
+                        <a:t>6</a:t>
+                      </a:r>
+                    </a:p>
+                  </a:txBody>
+                  <a:tcPr>
+                    <a:solidFill>
+                      <a:srgbClr val="FFFFFF"/>
+                    </a:solidFill>
+                  </a:tcPr>
+                </a:tc>
+                <a:tc>
+                  <a:txBody>
+                    <a:bodyPr/>
+                    <a:lstStyle/>
+                    <a:p>
+                      <a:pPr algn="l"/>
+                      <a:r>
+                        <a:rPr sz="1000" b="0">
+                          <a:solidFill>
+                            <a:srgbClr val="1D1B43"/>
+                          </a:solidFill>
+                          <a:latin typeface="Calibri"/>
+                        </a:rPr>
+                        <a:t>6</a:t>
                       </a:r>
                     </a:p>
                   </a:txBody>
@@ -8872,7 +10767,7 @@
                           </a:solidFill>
                           <a:latin typeface="Calibri"/>
                         </a:rPr>
-                        <a:t>SAS NORTE ARTIGOS DE - SAO PAULO / SP</a:t>
+                        <a:t>TRIPOLI CENTER COURO - SAO PAULO / SP</a:t>
                       </a:r>
                     </a:p>
                   </a:txBody>
@@ -8895,7 +10790,7 @@
                           </a:solidFill>
                           <a:latin typeface="Calibri"/>
                         </a:rPr>
-                        <a:t>5</a:t>
+                        <a:t>6</a:t>
                       </a:r>
                     </a:p>
                   </a:txBody>
@@ -8918,7 +10813,7 @@
                           </a:solidFill>
                           <a:latin typeface="Calibri"/>
                         </a:rPr>
-                        <a:t>5</a:t>
+                        <a:t>6</a:t>
                       </a:r>
                     </a:p>
                   </a:txBody>
@@ -9035,53 +10930,53 @@
                           </a:solidFill>
                           <a:latin typeface="Calibri"/>
                         </a:rPr>
-                        <a:t>NOVA TK CENTER COURO - SAO PAULO / SP</a:t>
-                      </a:r>
-                    </a:p>
-                  </a:txBody>
-                  <a:tcPr>
-                    <a:solidFill>
-                      <a:srgbClr val="FFFFFF"/>
-                    </a:solidFill>
-                  </a:tcPr>
-                </a:tc>
-                <a:tc>
-                  <a:txBody>
-                    <a:bodyPr/>
-                    <a:lstStyle/>
-                    <a:p>
-                      <a:pPr algn="l"/>
-                      <a:r>
-                        <a:rPr sz="1000" b="0">
-                          <a:solidFill>
-                            <a:srgbClr val="1D1B43"/>
-                          </a:solidFill>
-                          <a:latin typeface="Calibri"/>
-                        </a:rPr>
-                        <a:t>5</a:t>
-                      </a:r>
-                    </a:p>
-                  </a:txBody>
-                  <a:tcPr>
-                    <a:solidFill>
-                      <a:srgbClr val="FFFFFF"/>
-                    </a:solidFill>
-                  </a:tcPr>
-                </a:tc>
-                <a:tc>
-                  <a:txBody>
-                    <a:bodyPr/>
-                    <a:lstStyle/>
-                    <a:p>
-                      <a:pPr algn="l"/>
-                      <a:r>
-                        <a:rPr sz="1000" b="0">
-                          <a:solidFill>
-                            <a:srgbClr val="1D1B43"/>
-                          </a:solidFill>
-                          <a:latin typeface="Calibri"/>
-                        </a:rPr>
-                        <a:t>5</a:t>
+                        <a:t>SATE BALNEA ARTIGOS - BALNEARIO CAMBORIU / SC</a:t>
+                      </a:r>
+                    </a:p>
+                  </a:txBody>
+                  <a:tcPr>
+                    <a:solidFill>
+                      <a:srgbClr val="FFFFFF"/>
+                    </a:solidFill>
+                  </a:tcPr>
+                </a:tc>
+                <a:tc>
+                  <a:txBody>
+                    <a:bodyPr/>
+                    <a:lstStyle/>
+                    <a:p>
+                      <a:pPr algn="l"/>
+                      <a:r>
+                        <a:rPr sz="1000" b="0">
+                          <a:solidFill>
+                            <a:srgbClr val="1D1B43"/>
+                          </a:solidFill>
+                          <a:latin typeface="Calibri"/>
+                        </a:rPr>
+                        <a:t>6</a:t>
+                      </a:r>
+                    </a:p>
+                  </a:txBody>
+                  <a:tcPr>
+                    <a:solidFill>
+                      <a:srgbClr val="FFFFFF"/>
+                    </a:solidFill>
+                  </a:tcPr>
+                </a:tc>
+                <a:tc>
+                  <a:txBody>
+                    <a:bodyPr/>
+                    <a:lstStyle/>
+                    <a:p>
+                      <a:pPr algn="l"/>
+                      <a:r>
+                        <a:rPr sz="1000" b="0">
+                          <a:solidFill>
+                            <a:srgbClr val="1D1B43"/>
+                          </a:solidFill>
+                          <a:latin typeface="Calibri"/>
+                        </a:rPr>
+                        <a:t>6</a:t>
                       </a:r>
                     </a:p>
                   </a:txBody>
@@ -9198,7 +11093,7 @@
                           </a:solidFill>
                           <a:latin typeface="Calibri"/>
                         </a:rPr>
-                        <a:t>TRIESTE COMERCIO DE - FLORIANOPOLIS / SC</a:t>
+                        <a:t>SAMSONITE BRASIL LTD - NAVEGANTES / SC</a:t>
                       </a:r>
                     </a:p>
                   </a:txBody>
